--- a/GJW_Energy_Techno_Commercial_Proposal.pptx
+++ b/GJW_Energy_Techno_Commercial_Proposal.pptx
@@ -15,6 +15,7 @@
     <p:sldId id="263" r:id="rId14"/>
     <p:sldId id="264" r:id="rId15"/>
     <p:sldId id="265" r:id="rId16"/>
+    <p:sldId id="266" r:id="rId17"/>
   </p:sldIdLst>
   <p:sldSz cx="12191695" cy="6858000" type="screen4x3"/>
   <p:notesSz cx="6858000" cy="9144000"/>
@@ -3097,12 +3098,21 @@
         <p:nvPr/>
       </p:nvGrpSpPr>
       <p:grpSpPr/>
-      <p:sp>
-        <p:nvSpPr>
-          <p:cNvPr id="2" name="Rectangle 1"/>
-          <p:cNvSpPr/>
-          <p:nvPr/>
-        </p:nvSpPr>
+      <p:pic>
+        <p:nvPicPr>
+          <p:cNvPr id="2" name="Picture 1" descr="cover-shaded.jpg"/>
+          <p:cNvPicPr>
+            <a:picLocks noChangeAspect="1"/>
+          </p:cNvPicPr>
+          <p:nvPr/>
+        </p:nvPicPr>
+        <p:blipFill>
+          <a:blip r:embed="rId2"/>
+          <a:srcRect t="7781" b="7781"/>
+          <a:stretch>
+            <a:fillRect/>
+          </a:stretch>
+        </p:blipFill>
         <p:spPr>
           <a:xfrm>
             <a:off x="0" y="0"/>
@@ -3111,36 +3121,8 @@
           <a:prstGeom prst="rect">
             <a:avLst/>
           </a:prstGeom>
-          <a:solidFill>
-            <a:srgbClr val="0A0A0C"/>
-          </a:solidFill>
-          <a:ln>
-            <a:noFill/>
-          </a:ln>
-          <a:effectLst/>
-        </p:spPr>
-        <p:style>
-          <a:lnRef idx="1">
-            <a:schemeClr val="accent1"/>
-          </a:lnRef>
-          <a:fillRef idx="3">
-            <a:schemeClr val="accent1"/>
-          </a:fillRef>
-          <a:effectRef idx="2">
-            <a:schemeClr val="accent1"/>
-          </a:effectRef>
-          <a:fontRef idx="minor">
-            <a:schemeClr val="lt1"/>
-          </a:fontRef>
-        </p:style>
-        <p:txBody>
-          <a:bodyPr rtlCol="0" anchor="ctr"/>
-          <a:lstStyle/>
-          <a:p>
-            <a:pPr algn="ctr"/>
-          </a:p>
-        </p:txBody>
-      </p:sp>
+        </p:spPr>
+      </p:pic>
       <p:sp>
         <p:nvSpPr>
           <p:cNvPr id="3" name="Rectangle 2"/>
@@ -3318,7 +3300,7 @@
             <a:r>
               <a:rPr sz="2000" b="0" spc="20">
                 <a:solidFill>
-                  <a:srgbClr val="8C8C8C"/>
+                  <a:srgbClr val="C9C9C9"/>
                 </a:solidFill>
                 <a:latin typeface="Cabinet Grotesk"/>
               </a:rPr>
@@ -3755,6 +3737,128 @@
             <a:avLst/>
           </a:prstGeom>
           <a:solidFill>
+            <a:srgbClr val="F7F7F5"/>
+          </a:solidFill>
+          <a:ln>
+            <a:noFill/>
+          </a:ln>
+          <a:effectLst/>
+        </p:spPr>
+        <p:style>
+          <a:lnRef idx="1">
+            <a:schemeClr val="accent1"/>
+          </a:lnRef>
+          <a:fillRef idx="3">
+            <a:schemeClr val="accent1"/>
+          </a:fillRef>
+          <a:effectRef idx="2">
+            <a:schemeClr val="accent1"/>
+          </a:effectRef>
+          <a:fontRef idx="minor">
+            <a:schemeClr val="lt1"/>
+          </a:fontRef>
+        </p:style>
+        <p:txBody>
+          <a:bodyPr rtlCol="0" anchor="ctr"/>
+          <a:lstStyle/>
+          <a:p>
+            <a:pPr algn="ctr"/>
+          </a:p>
+        </p:txBody>
+      </p:sp>
+      <p:sp>
+        <p:nvSpPr>
+          <p:cNvPr id="3" name="TextBox 2"/>
+          <p:cNvSpPr txBox="1"/>
+          <p:nvPr/>
+        </p:nvSpPr>
+        <p:spPr>
+          <a:xfrm>
+            <a:off x="822960" y="566928"/>
+            <a:ext cx="8229600" cy="274320"/>
+          </a:xfrm>
+          <a:prstGeom prst="rect">
+            <a:avLst/>
+          </a:prstGeom>
+          <a:noFill/>
+        </p:spPr>
+        <p:txBody>
+          <a:bodyPr wrap="square" anchor="t" lIns="0" rIns="0" tIns="0" bIns="0">
+            <a:spAutoFit/>
+          </a:bodyPr>
+          <a:lstStyle/>
+          <a:p>
+            <a:pPr algn="l">
+              <a:lnSpc>
+                <a:spcPct val="100000"/>
+              </a:lnSpc>
+            </a:pPr>
+            <a:r>
+              <a:rPr sz="1100" b="1" spc="350">
+                <a:solidFill>
+                  <a:srgbClr val="D97725"/>
+                </a:solidFill>
+                <a:latin typeface="JetBrains Mono"/>
+              </a:rPr>
+              <a:t>09 — COMMERCIAL TERMS</a:t>
+            </a:r>
+          </a:p>
+        </p:txBody>
+      </p:sp>
+      <p:sp>
+        <p:nvSpPr>
+          <p:cNvPr id="4" name="TextBox 3"/>
+          <p:cNvSpPr txBox="1"/>
+          <p:nvPr/>
+        </p:nvSpPr>
+        <p:spPr>
+          <a:xfrm>
+            <a:off x="822960" y="960120"/>
+            <a:ext cx="10545775" cy="1463040"/>
+          </a:xfrm>
+          <a:prstGeom prst="rect">
+            <a:avLst/>
+          </a:prstGeom>
+          <a:noFill/>
+        </p:spPr>
+        <p:txBody>
+          <a:bodyPr wrap="square" anchor="t" lIns="0" rIns="0" tIns="0" bIns="0">
+            <a:spAutoFit/>
+          </a:bodyPr>
+          <a:lstStyle/>
+          <a:p>
+            <a:pPr algn="l">
+              <a:lnSpc>
+                <a:spcPct val="95000"/>
+              </a:lnSpc>
+            </a:pPr>
+            <a:r>
+              <a:rPr sz="4400" b="1" spc="-10">
+                <a:solidFill>
+                  <a:srgbClr val="0A0A0C"/>
+                </a:solidFill>
+                <a:latin typeface="Cabinet Grotesk"/>
+              </a:rPr>
+              <a:t>CLEAR TERMS. NO SURPRISES.</a:t>
+            </a:r>
+          </a:p>
+        </p:txBody>
+      </p:sp>
+      <p:sp>
+        <p:nvSpPr>
+          <p:cNvPr id="5" name="Rectangle 4"/>
+          <p:cNvSpPr/>
+          <p:nvPr/>
+        </p:nvSpPr>
+        <p:spPr>
+          <a:xfrm>
+            <a:off x="822960" y="2148840"/>
+            <a:ext cx="2377440" cy="19050"/>
+          </a:xfrm>
+          <a:prstGeom prst="rect">
+            <a:avLst/>
+          </a:prstGeom>
+          <a:solidFill>
             <a:srgbClr val="0A0A0C"/>
           </a:solidFill>
           <a:ln>
@@ -3784,6 +3888,1181 @@
           </a:p>
         </p:txBody>
       </p:sp>
+      <p:sp>
+        <p:nvSpPr>
+          <p:cNvPr id="6" name="TextBox 5"/>
+          <p:cNvSpPr txBox="1"/>
+          <p:nvPr/>
+        </p:nvSpPr>
+        <p:spPr>
+          <a:xfrm>
+            <a:off x="822960" y="2286000"/>
+            <a:ext cx="2377440" cy="457200"/>
+          </a:xfrm>
+          <a:prstGeom prst="rect">
+            <a:avLst/>
+          </a:prstGeom>
+          <a:noFill/>
+        </p:spPr>
+        <p:txBody>
+          <a:bodyPr wrap="square" anchor="t" lIns="0" rIns="0" tIns="0" bIns="0">
+            <a:spAutoFit/>
+          </a:bodyPr>
+          <a:lstStyle/>
+          <a:p>
+            <a:pPr algn="l">
+              <a:lnSpc>
+                <a:spcPct val="100000"/>
+              </a:lnSpc>
+            </a:pPr>
+            <a:r>
+              <a:rPr sz="2600" b="1" spc="-10">
+                <a:solidFill>
+                  <a:srgbClr val="D97725"/>
+                </a:solidFill>
+                <a:latin typeface="Cabinet Grotesk"/>
+              </a:rPr>
+              <a:t>30%</a:t>
+            </a:r>
+          </a:p>
+        </p:txBody>
+      </p:sp>
+      <p:sp>
+        <p:nvSpPr>
+          <p:cNvPr id="7" name="TextBox 6"/>
+          <p:cNvSpPr txBox="1"/>
+          <p:nvPr/>
+        </p:nvSpPr>
+        <p:spPr>
+          <a:xfrm>
+            <a:off x="822960" y="2788920"/>
+            <a:ext cx="2331720" cy="640080"/>
+          </a:xfrm>
+          <a:prstGeom prst="rect">
+            <a:avLst/>
+          </a:prstGeom>
+          <a:noFill/>
+        </p:spPr>
+        <p:txBody>
+          <a:bodyPr wrap="square" anchor="t" lIns="0" rIns="0" tIns="0" bIns="0">
+            <a:spAutoFit/>
+          </a:bodyPr>
+          <a:lstStyle/>
+          <a:p>
+            <a:pPr algn="l">
+              <a:lnSpc>
+                <a:spcPct val="125000"/>
+              </a:lnSpc>
+            </a:pPr>
+            <a:r>
+              <a:rPr sz="900" b="0" spc="150">
+                <a:solidFill>
+                  <a:srgbClr val="737371"/>
+                </a:solidFill>
+                <a:latin typeface="JetBrains Mono"/>
+              </a:rPr>
+              <a:t>CONTRACT SIGNATURE &amp; MOBILISATION</a:t>
+            </a:r>
+          </a:p>
+        </p:txBody>
+      </p:sp>
+      <p:sp>
+        <p:nvSpPr>
+          <p:cNvPr id="8" name="Rectangle 7"/>
+          <p:cNvSpPr/>
+          <p:nvPr/>
+        </p:nvSpPr>
+        <p:spPr>
+          <a:xfrm>
+            <a:off x="3547872" y="2148840"/>
+            <a:ext cx="2377440" cy="19050"/>
+          </a:xfrm>
+          <a:prstGeom prst="rect">
+            <a:avLst/>
+          </a:prstGeom>
+          <a:solidFill>
+            <a:srgbClr val="0A0A0C"/>
+          </a:solidFill>
+          <a:ln>
+            <a:noFill/>
+          </a:ln>
+          <a:effectLst/>
+        </p:spPr>
+        <p:style>
+          <a:lnRef idx="1">
+            <a:schemeClr val="accent1"/>
+          </a:lnRef>
+          <a:fillRef idx="3">
+            <a:schemeClr val="accent1"/>
+          </a:fillRef>
+          <a:effectRef idx="2">
+            <a:schemeClr val="accent1"/>
+          </a:effectRef>
+          <a:fontRef idx="minor">
+            <a:schemeClr val="lt1"/>
+          </a:fontRef>
+        </p:style>
+        <p:txBody>
+          <a:bodyPr rtlCol="0" anchor="ctr"/>
+          <a:lstStyle/>
+          <a:p>
+            <a:pPr algn="ctr"/>
+          </a:p>
+        </p:txBody>
+      </p:sp>
+      <p:sp>
+        <p:nvSpPr>
+          <p:cNvPr id="9" name="TextBox 8"/>
+          <p:cNvSpPr txBox="1"/>
+          <p:nvPr/>
+        </p:nvSpPr>
+        <p:spPr>
+          <a:xfrm>
+            <a:off x="3547872" y="2286000"/>
+            <a:ext cx="2377440" cy="457200"/>
+          </a:xfrm>
+          <a:prstGeom prst="rect">
+            <a:avLst/>
+          </a:prstGeom>
+          <a:noFill/>
+        </p:spPr>
+        <p:txBody>
+          <a:bodyPr wrap="square" anchor="t" lIns="0" rIns="0" tIns="0" bIns="0">
+            <a:spAutoFit/>
+          </a:bodyPr>
+          <a:lstStyle/>
+          <a:p>
+            <a:pPr algn="l">
+              <a:lnSpc>
+                <a:spcPct val="100000"/>
+              </a:lnSpc>
+            </a:pPr>
+            <a:r>
+              <a:rPr sz="2600" b="1" spc="-10">
+                <a:solidFill>
+                  <a:srgbClr val="D97725"/>
+                </a:solidFill>
+                <a:latin typeface="Cabinet Grotesk"/>
+              </a:rPr>
+              <a:t>40%</a:t>
+            </a:r>
+          </a:p>
+        </p:txBody>
+      </p:sp>
+      <p:sp>
+        <p:nvSpPr>
+          <p:cNvPr id="10" name="TextBox 9"/>
+          <p:cNvSpPr txBox="1"/>
+          <p:nvPr/>
+        </p:nvSpPr>
+        <p:spPr>
+          <a:xfrm>
+            <a:off x="3547872" y="2788920"/>
+            <a:ext cx="2331720" cy="640080"/>
+          </a:xfrm>
+          <a:prstGeom prst="rect">
+            <a:avLst/>
+          </a:prstGeom>
+          <a:noFill/>
+        </p:spPr>
+        <p:txBody>
+          <a:bodyPr wrap="square" anchor="t" lIns="0" rIns="0" tIns="0" bIns="0">
+            <a:spAutoFit/>
+          </a:bodyPr>
+          <a:lstStyle/>
+          <a:p>
+            <a:pPr algn="l">
+              <a:lnSpc>
+                <a:spcPct val="125000"/>
+              </a:lnSpc>
+            </a:pPr>
+            <a:r>
+              <a:rPr sz="900" b="0" spc="150">
+                <a:solidFill>
+                  <a:srgbClr val="737371"/>
+                </a:solidFill>
+                <a:latin typeface="JetBrains Mono"/>
+              </a:rPr>
+              <a:t>MAJOR EQUIPMENT DELIVERED TO SITE</a:t>
+            </a:r>
+          </a:p>
+        </p:txBody>
+      </p:sp>
+      <p:sp>
+        <p:nvSpPr>
+          <p:cNvPr id="11" name="Rectangle 10"/>
+          <p:cNvSpPr/>
+          <p:nvPr/>
+        </p:nvSpPr>
+        <p:spPr>
+          <a:xfrm>
+            <a:off x="6272784" y="2148840"/>
+            <a:ext cx="2377440" cy="19050"/>
+          </a:xfrm>
+          <a:prstGeom prst="rect">
+            <a:avLst/>
+          </a:prstGeom>
+          <a:solidFill>
+            <a:srgbClr val="0A0A0C"/>
+          </a:solidFill>
+          <a:ln>
+            <a:noFill/>
+          </a:ln>
+          <a:effectLst/>
+        </p:spPr>
+        <p:style>
+          <a:lnRef idx="1">
+            <a:schemeClr val="accent1"/>
+          </a:lnRef>
+          <a:fillRef idx="3">
+            <a:schemeClr val="accent1"/>
+          </a:fillRef>
+          <a:effectRef idx="2">
+            <a:schemeClr val="accent1"/>
+          </a:effectRef>
+          <a:fontRef idx="minor">
+            <a:schemeClr val="lt1"/>
+          </a:fontRef>
+        </p:style>
+        <p:txBody>
+          <a:bodyPr rtlCol="0" anchor="ctr"/>
+          <a:lstStyle/>
+          <a:p>
+            <a:pPr algn="ctr"/>
+          </a:p>
+        </p:txBody>
+      </p:sp>
+      <p:sp>
+        <p:nvSpPr>
+          <p:cNvPr id="12" name="TextBox 11"/>
+          <p:cNvSpPr txBox="1"/>
+          <p:nvPr/>
+        </p:nvSpPr>
+        <p:spPr>
+          <a:xfrm>
+            <a:off x="6272784" y="2286000"/>
+            <a:ext cx="2377440" cy="457200"/>
+          </a:xfrm>
+          <a:prstGeom prst="rect">
+            <a:avLst/>
+          </a:prstGeom>
+          <a:noFill/>
+        </p:spPr>
+        <p:txBody>
+          <a:bodyPr wrap="square" anchor="t" lIns="0" rIns="0" tIns="0" bIns="0">
+            <a:spAutoFit/>
+          </a:bodyPr>
+          <a:lstStyle/>
+          <a:p>
+            <a:pPr algn="l">
+              <a:lnSpc>
+                <a:spcPct val="100000"/>
+              </a:lnSpc>
+            </a:pPr>
+            <a:r>
+              <a:rPr sz="2600" b="1" spc="-10">
+                <a:solidFill>
+                  <a:srgbClr val="D97725"/>
+                </a:solidFill>
+                <a:latin typeface="Cabinet Grotesk"/>
+              </a:rPr>
+              <a:t>20%</a:t>
+            </a:r>
+          </a:p>
+        </p:txBody>
+      </p:sp>
+      <p:sp>
+        <p:nvSpPr>
+          <p:cNvPr id="13" name="TextBox 12"/>
+          <p:cNvSpPr txBox="1"/>
+          <p:nvPr/>
+        </p:nvSpPr>
+        <p:spPr>
+          <a:xfrm>
+            <a:off x="6272784" y="2788920"/>
+            <a:ext cx="2331720" cy="640080"/>
+          </a:xfrm>
+          <a:prstGeom prst="rect">
+            <a:avLst/>
+          </a:prstGeom>
+          <a:noFill/>
+        </p:spPr>
+        <p:txBody>
+          <a:bodyPr wrap="square" anchor="t" lIns="0" rIns="0" tIns="0" bIns="0">
+            <a:spAutoFit/>
+          </a:bodyPr>
+          <a:lstStyle/>
+          <a:p>
+            <a:pPr algn="l">
+              <a:lnSpc>
+                <a:spcPct val="125000"/>
+              </a:lnSpc>
+            </a:pPr>
+            <a:r>
+              <a:rPr sz="900" b="0" spc="150">
+                <a:solidFill>
+                  <a:srgbClr val="737371"/>
+                </a:solidFill>
+                <a:latin typeface="JetBrains Mono"/>
+              </a:rPr>
+              <a:t>MECHANICAL COMPLETION</a:t>
+            </a:r>
+          </a:p>
+        </p:txBody>
+      </p:sp>
+      <p:sp>
+        <p:nvSpPr>
+          <p:cNvPr id="14" name="Rectangle 13"/>
+          <p:cNvSpPr/>
+          <p:nvPr/>
+        </p:nvSpPr>
+        <p:spPr>
+          <a:xfrm>
+            <a:off x="8997696" y="2148840"/>
+            <a:ext cx="2377440" cy="19050"/>
+          </a:xfrm>
+          <a:prstGeom prst="rect">
+            <a:avLst/>
+          </a:prstGeom>
+          <a:solidFill>
+            <a:srgbClr val="0A0A0C"/>
+          </a:solidFill>
+          <a:ln>
+            <a:noFill/>
+          </a:ln>
+          <a:effectLst/>
+        </p:spPr>
+        <p:style>
+          <a:lnRef idx="1">
+            <a:schemeClr val="accent1"/>
+          </a:lnRef>
+          <a:fillRef idx="3">
+            <a:schemeClr val="accent1"/>
+          </a:fillRef>
+          <a:effectRef idx="2">
+            <a:schemeClr val="accent1"/>
+          </a:effectRef>
+          <a:fontRef idx="minor">
+            <a:schemeClr val="lt1"/>
+          </a:fontRef>
+        </p:style>
+        <p:txBody>
+          <a:bodyPr rtlCol="0" anchor="ctr"/>
+          <a:lstStyle/>
+          <a:p>
+            <a:pPr algn="ctr"/>
+          </a:p>
+        </p:txBody>
+      </p:sp>
+      <p:sp>
+        <p:nvSpPr>
+          <p:cNvPr id="15" name="TextBox 14"/>
+          <p:cNvSpPr txBox="1"/>
+          <p:nvPr/>
+        </p:nvSpPr>
+        <p:spPr>
+          <a:xfrm>
+            <a:off x="8997696" y="2286000"/>
+            <a:ext cx="2377440" cy="457200"/>
+          </a:xfrm>
+          <a:prstGeom prst="rect">
+            <a:avLst/>
+          </a:prstGeom>
+          <a:noFill/>
+        </p:spPr>
+        <p:txBody>
+          <a:bodyPr wrap="square" anchor="t" lIns="0" rIns="0" tIns="0" bIns="0">
+            <a:spAutoFit/>
+          </a:bodyPr>
+          <a:lstStyle/>
+          <a:p>
+            <a:pPr algn="l">
+              <a:lnSpc>
+                <a:spcPct val="100000"/>
+              </a:lnSpc>
+            </a:pPr>
+            <a:r>
+              <a:rPr sz="2600" b="1" spc="-10">
+                <a:solidFill>
+                  <a:srgbClr val="D97725"/>
+                </a:solidFill>
+                <a:latin typeface="Cabinet Grotesk"/>
+              </a:rPr>
+              <a:t>10%</a:t>
+            </a:r>
+          </a:p>
+        </p:txBody>
+      </p:sp>
+      <p:sp>
+        <p:nvSpPr>
+          <p:cNvPr id="16" name="TextBox 15"/>
+          <p:cNvSpPr txBox="1"/>
+          <p:nvPr/>
+        </p:nvSpPr>
+        <p:spPr>
+          <a:xfrm>
+            <a:off x="8997696" y="2788920"/>
+            <a:ext cx="2331720" cy="640080"/>
+          </a:xfrm>
+          <a:prstGeom prst="rect">
+            <a:avLst/>
+          </a:prstGeom>
+          <a:noFill/>
+        </p:spPr>
+        <p:txBody>
+          <a:bodyPr wrap="square" anchor="t" lIns="0" rIns="0" tIns="0" bIns="0">
+            <a:spAutoFit/>
+          </a:bodyPr>
+          <a:lstStyle/>
+          <a:p>
+            <a:pPr algn="l">
+              <a:lnSpc>
+                <a:spcPct val="125000"/>
+              </a:lnSpc>
+            </a:pPr>
+            <a:r>
+              <a:rPr sz="900" b="0" spc="150">
+                <a:solidFill>
+                  <a:srgbClr val="737371"/>
+                </a:solidFill>
+                <a:latin typeface="JetBrains Mono"/>
+              </a:rPr>
+              <a:t>COMMISSIONING &amp; ACCEPTANCE</a:t>
+            </a:r>
+          </a:p>
+        </p:txBody>
+      </p:sp>
+      <p:sp>
+        <p:nvSpPr>
+          <p:cNvPr id="17" name="TextBox 16"/>
+          <p:cNvSpPr txBox="1"/>
+          <p:nvPr/>
+        </p:nvSpPr>
+        <p:spPr>
+          <a:xfrm>
+            <a:off x="822960" y="3749039"/>
+            <a:ext cx="2377440" cy="274320"/>
+          </a:xfrm>
+          <a:prstGeom prst="rect">
+            <a:avLst/>
+          </a:prstGeom>
+          <a:noFill/>
+        </p:spPr>
+        <p:txBody>
+          <a:bodyPr wrap="square" anchor="t" lIns="0" rIns="0" tIns="0" bIns="0">
+            <a:spAutoFit/>
+          </a:bodyPr>
+          <a:lstStyle/>
+          <a:p>
+            <a:pPr algn="l">
+              <a:lnSpc>
+                <a:spcPct val="100000"/>
+              </a:lnSpc>
+            </a:pPr>
+            <a:r>
+              <a:rPr sz="1000" b="1" spc="220">
+                <a:solidFill>
+                  <a:srgbClr val="D97725"/>
+                </a:solidFill>
+                <a:latin typeface="JetBrains Mono"/>
+              </a:rPr>
+              <a:t>VALIDITY</a:t>
+            </a:r>
+          </a:p>
+        </p:txBody>
+      </p:sp>
+      <p:sp>
+        <p:nvSpPr>
+          <p:cNvPr id="18" name="TextBox 17"/>
+          <p:cNvSpPr txBox="1"/>
+          <p:nvPr/>
+        </p:nvSpPr>
+        <p:spPr>
+          <a:xfrm>
+            <a:off x="3291840" y="3721607"/>
+            <a:ext cx="8046720" cy="365760"/>
+          </a:xfrm>
+          <a:prstGeom prst="rect">
+            <a:avLst/>
+          </a:prstGeom>
+          <a:noFill/>
+        </p:spPr>
+        <p:txBody>
+          <a:bodyPr wrap="square" anchor="t" lIns="0" rIns="0" tIns="0" bIns="0">
+            <a:spAutoFit/>
+          </a:bodyPr>
+          <a:lstStyle/>
+          <a:p>
+            <a:pPr algn="l">
+              <a:lnSpc>
+                <a:spcPct val="100000"/>
+              </a:lnSpc>
+            </a:pPr>
+            <a:r>
+              <a:rPr sz="1150" b="0">
+                <a:solidFill>
+                  <a:srgbClr val="0A0A0C"/>
+                </a:solidFill>
+                <a:latin typeface="Satoshi"/>
+              </a:rPr>
+              <a:t>This offer remains open for [30] days from the date of issue.</a:t>
+            </a:r>
+          </a:p>
+        </p:txBody>
+      </p:sp>
+      <p:sp>
+        <p:nvSpPr>
+          <p:cNvPr id="19" name="Rectangle 18"/>
+          <p:cNvSpPr/>
+          <p:nvPr/>
+        </p:nvSpPr>
+        <p:spPr>
+          <a:xfrm>
+            <a:off x="822960" y="4096511"/>
+            <a:ext cx="10543032" cy="9525"/>
+          </a:xfrm>
+          <a:prstGeom prst="rect">
+            <a:avLst/>
+          </a:prstGeom>
+          <a:solidFill>
+            <a:srgbClr val="E3E3E0"/>
+          </a:solidFill>
+          <a:ln>
+            <a:noFill/>
+          </a:ln>
+          <a:effectLst/>
+        </p:spPr>
+        <p:style>
+          <a:lnRef idx="1">
+            <a:schemeClr val="accent1"/>
+          </a:lnRef>
+          <a:fillRef idx="3">
+            <a:schemeClr val="accent1"/>
+          </a:fillRef>
+          <a:effectRef idx="2">
+            <a:schemeClr val="accent1"/>
+          </a:effectRef>
+          <a:fontRef idx="minor">
+            <a:schemeClr val="lt1"/>
+          </a:fontRef>
+        </p:style>
+        <p:txBody>
+          <a:bodyPr rtlCol="0" anchor="ctr"/>
+          <a:lstStyle/>
+          <a:p>
+            <a:pPr algn="ctr"/>
+          </a:p>
+        </p:txBody>
+      </p:sp>
+      <p:sp>
+        <p:nvSpPr>
+          <p:cNvPr id="20" name="TextBox 19"/>
+          <p:cNvSpPr txBox="1"/>
+          <p:nvPr/>
+        </p:nvSpPr>
+        <p:spPr>
+          <a:xfrm>
+            <a:off x="822960" y="4224527"/>
+            <a:ext cx="2377440" cy="274320"/>
+          </a:xfrm>
+          <a:prstGeom prst="rect">
+            <a:avLst/>
+          </a:prstGeom>
+          <a:noFill/>
+        </p:spPr>
+        <p:txBody>
+          <a:bodyPr wrap="square" anchor="t" lIns="0" rIns="0" tIns="0" bIns="0">
+            <a:spAutoFit/>
+          </a:bodyPr>
+          <a:lstStyle/>
+          <a:p>
+            <a:pPr algn="l">
+              <a:lnSpc>
+                <a:spcPct val="100000"/>
+              </a:lnSpc>
+            </a:pPr>
+            <a:r>
+              <a:rPr sz="1000" b="1" spc="220">
+                <a:solidFill>
+                  <a:srgbClr val="D97725"/>
+                </a:solidFill>
+                <a:latin typeface="JetBrains Mono"/>
+              </a:rPr>
+              <a:t>WARRANTIES</a:t>
+            </a:r>
+          </a:p>
+        </p:txBody>
+      </p:sp>
+      <p:sp>
+        <p:nvSpPr>
+          <p:cNvPr id="21" name="TextBox 20"/>
+          <p:cNvSpPr txBox="1"/>
+          <p:nvPr/>
+        </p:nvSpPr>
+        <p:spPr>
+          <a:xfrm>
+            <a:off x="3291840" y="4197095"/>
+            <a:ext cx="8046720" cy="365760"/>
+          </a:xfrm>
+          <a:prstGeom prst="rect">
+            <a:avLst/>
+          </a:prstGeom>
+          <a:noFill/>
+        </p:spPr>
+        <p:txBody>
+          <a:bodyPr wrap="square" anchor="t" lIns="0" rIns="0" tIns="0" bIns="0">
+            <a:spAutoFit/>
+          </a:bodyPr>
+          <a:lstStyle/>
+          <a:p>
+            <a:pPr algn="l">
+              <a:lnSpc>
+                <a:spcPct val="100000"/>
+              </a:lnSpc>
+            </a:pPr>
+            <a:r>
+              <a:rPr sz="1150" b="0">
+                <a:solidFill>
+                  <a:srgbClr val="0A0A0C"/>
+                </a:solidFill>
+                <a:latin typeface="Satoshi"/>
+              </a:rPr>
+              <a:t>Modules [12/25] yrs product &amp; performance · inverters [5–10] yrs · workmanship [2] yrs.</a:t>
+            </a:r>
+          </a:p>
+        </p:txBody>
+      </p:sp>
+      <p:sp>
+        <p:nvSpPr>
+          <p:cNvPr id="22" name="Rectangle 21"/>
+          <p:cNvSpPr/>
+          <p:nvPr/>
+        </p:nvSpPr>
+        <p:spPr>
+          <a:xfrm>
+            <a:off x="822960" y="4571999"/>
+            <a:ext cx="10543032" cy="9525"/>
+          </a:xfrm>
+          <a:prstGeom prst="rect">
+            <a:avLst/>
+          </a:prstGeom>
+          <a:solidFill>
+            <a:srgbClr val="E3E3E0"/>
+          </a:solidFill>
+          <a:ln>
+            <a:noFill/>
+          </a:ln>
+          <a:effectLst/>
+        </p:spPr>
+        <p:style>
+          <a:lnRef idx="1">
+            <a:schemeClr val="accent1"/>
+          </a:lnRef>
+          <a:fillRef idx="3">
+            <a:schemeClr val="accent1"/>
+          </a:fillRef>
+          <a:effectRef idx="2">
+            <a:schemeClr val="accent1"/>
+          </a:effectRef>
+          <a:fontRef idx="minor">
+            <a:schemeClr val="lt1"/>
+          </a:fontRef>
+        </p:style>
+        <p:txBody>
+          <a:bodyPr rtlCol="0" anchor="ctr"/>
+          <a:lstStyle/>
+          <a:p>
+            <a:pPr algn="ctr"/>
+          </a:p>
+        </p:txBody>
+      </p:sp>
+      <p:sp>
+        <p:nvSpPr>
+          <p:cNvPr id="23" name="TextBox 22"/>
+          <p:cNvSpPr txBox="1"/>
+          <p:nvPr/>
+        </p:nvSpPr>
+        <p:spPr>
+          <a:xfrm>
+            <a:off x="822960" y="4700015"/>
+            <a:ext cx="2377440" cy="274320"/>
+          </a:xfrm>
+          <a:prstGeom prst="rect">
+            <a:avLst/>
+          </a:prstGeom>
+          <a:noFill/>
+        </p:spPr>
+        <p:txBody>
+          <a:bodyPr wrap="square" anchor="t" lIns="0" rIns="0" tIns="0" bIns="0">
+            <a:spAutoFit/>
+          </a:bodyPr>
+          <a:lstStyle/>
+          <a:p>
+            <a:pPr algn="l">
+              <a:lnSpc>
+                <a:spcPct val="100000"/>
+              </a:lnSpc>
+            </a:pPr>
+            <a:r>
+              <a:rPr sz="1000" b="1" spc="220">
+                <a:solidFill>
+                  <a:srgbClr val="D97725"/>
+                </a:solidFill>
+                <a:latin typeface="JetBrains Mono"/>
+              </a:rPr>
+              <a:t>PERFORMANCE</a:t>
+            </a:r>
+          </a:p>
+        </p:txBody>
+      </p:sp>
+      <p:sp>
+        <p:nvSpPr>
+          <p:cNvPr id="24" name="TextBox 23"/>
+          <p:cNvSpPr txBox="1"/>
+          <p:nvPr/>
+        </p:nvSpPr>
+        <p:spPr>
+          <a:xfrm>
+            <a:off x="3291840" y="4672583"/>
+            <a:ext cx="8046720" cy="365760"/>
+          </a:xfrm>
+          <a:prstGeom prst="rect">
+            <a:avLst/>
+          </a:prstGeom>
+          <a:noFill/>
+        </p:spPr>
+        <p:txBody>
+          <a:bodyPr wrap="square" anchor="t" lIns="0" rIns="0" tIns="0" bIns="0">
+            <a:spAutoFit/>
+          </a:bodyPr>
+          <a:lstStyle/>
+          <a:p>
+            <a:pPr algn="l">
+              <a:lnSpc>
+                <a:spcPct val="100000"/>
+              </a:lnSpc>
+            </a:pPr>
+            <a:r>
+              <a:rPr sz="1150" b="0">
+                <a:solidFill>
+                  <a:srgbClr val="0A0A0C"/>
+                </a:solidFill>
+                <a:latin typeface="Satoshi"/>
+              </a:rPr>
+              <a:t>Year-one yield per PVsyst P50 estimate · measured at the generation meter.</a:t>
+            </a:r>
+          </a:p>
+        </p:txBody>
+      </p:sp>
+      <p:sp>
+        <p:nvSpPr>
+          <p:cNvPr id="25" name="Rectangle 24"/>
+          <p:cNvSpPr/>
+          <p:nvPr/>
+        </p:nvSpPr>
+        <p:spPr>
+          <a:xfrm>
+            <a:off x="822960" y="5047487"/>
+            <a:ext cx="10543032" cy="9525"/>
+          </a:xfrm>
+          <a:prstGeom prst="rect">
+            <a:avLst/>
+          </a:prstGeom>
+          <a:solidFill>
+            <a:srgbClr val="E3E3E0"/>
+          </a:solidFill>
+          <a:ln>
+            <a:noFill/>
+          </a:ln>
+          <a:effectLst/>
+        </p:spPr>
+        <p:style>
+          <a:lnRef idx="1">
+            <a:schemeClr val="accent1"/>
+          </a:lnRef>
+          <a:fillRef idx="3">
+            <a:schemeClr val="accent1"/>
+          </a:fillRef>
+          <a:effectRef idx="2">
+            <a:schemeClr val="accent1"/>
+          </a:effectRef>
+          <a:fontRef idx="minor">
+            <a:schemeClr val="lt1"/>
+          </a:fontRef>
+        </p:style>
+        <p:txBody>
+          <a:bodyPr rtlCol="0" anchor="ctr"/>
+          <a:lstStyle/>
+          <a:p>
+            <a:pPr algn="ctr"/>
+          </a:p>
+        </p:txBody>
+      </p:sp>
+      <p:sp>
+        <p:nvSpPr>
+          <p:cNvPr id="26" name="TextBox 25"/>
+          <p:cNvSpPr txBox="1"/>
+          <p:nvPr/>
+        </p:nvSpPr>
+        <p:spPr>
+          <a:xfrm>
+            <a:off x="822960" y="5175503"/>
+            <a:ext cx="2377440" cy="274320"/>
+          </a:xfrm>
+          <a:prstGeom prst="rect">
+            <a:avLst/>
+          </a:prstGeom>
+          <a:noFill/>
+        </p:spPr>
+        <p:txBody>
+          <a:bodyPr wrap="square" anchor="t" lIns="0" rIns="0" tIns="0" bIns="0">
+            <a:spAutoFit/>
+          </a:bodyPr>
+          <a:lstStyle/>
+          <a:p>
+            <a:pPr algn="l">
+              <a:lnSpc>
+                <a:spcPct val="100000"/>
+              </a:lnSpc>
+            </a:pPr>
+            <a:r>
+              <a:rPr sz="1000" b="1" spc="220">
+                <a:solidFill>
+                  <a:srgbClr val="D97725"/>
+                </a:solidFill>
+                <a:latin typeface="JetBrains Mono"/>
+              </a:rPr>
+              <a:t>EXCLUSIONS</a:t>
+            </a:r>
+          </a:p>
+        </p:txBody>
+      </p:sp>
+      <p:sp>
+        <p:nvSpPr>
+          <p:cNvPr id="27" name="TextBox 26"/>
+          <p:cNvSpPr txBox="1"/>
+          <p:nvPr/>
+        </p:nvSpPr>
+        <p:spPr>
+          <a:xfrm>
+            <a:off x="3291840" y="5148071"/>
+            <a:ext cx="8046720" cy="365760"/>
+          </a:xfrm>
+          <a:prstGeom prst="rect">
+            <a:avLst/>
+          </a:prstGeom>
+          <a:noFill/>
+        </p:spPr>
+        <p:txBody>
+          <a:bodyPr wrap="square" anchor="t" lIns="0" rIns="0" tIns="0" bIns="0">
+            <a:spAutoFit/>
+          </a:bodyPr>
+          <a:lstStyle/>
+          <a:p>
+            <a:pPr algn="l">
+              <a:lnSpc>
+                <a:spcPct val="100000"/>
+              </a:lnSpc>
+            </a:pPr>
+            <a:r>
+              <a:rPr sz="1150" b="0">
+                <a:solidFill>
+                  <a:srgbClr val="0A0A0C"/>
+                </a:solidFill>
+                <a:latin typeface="Satoshi"/>
+              </a:rPr>
+              <a:t>Utility connection fees · grid reinforcement · unforeseen civils · VAT unless stated.</a:t>
+            </a:r>
+          </a:p>
+        </p:txBody>
+      </p:sp>
+      <p:sp>
+        <p:nvSpPr>
+          <p:cNvPr id="28" name="Rectangle 27"/>
+          <p:cNvSpPr/>
+          <p:nvPr/>
+        </p:nvSpPr>
+        <p:spPr>
+          <a:xfrm>
+            <a:off x="822960" y="5522975"/>
+            <a:ext cx="10543032" cy="9525"/>
+          </a:xfrm>
+          <a:prstGeom prst="rect">
+            <a:avLst/>
+          </a:prstGeom>
+          <a:solidFill>
+            <a:srgbClr val="E3E3E0"/>
+          </a:solidFill>
+          <a:ln>
+            <a:noFill/>
+          </a:ln>
+          <a:effectLst/>
+        </p:spPr>
+        <p:style>
+          <a:lnRef idx="1">
+            <a:schemeClr val="accent1"/>
+          </a:lnRef>
+          <a:fillRef idx="3">
+            <a:schemeClr val="accent1"/>
+          </a:fillRef>
+          <a:effectRef idx="2">
+            <a:schemeClr val="accent1"/>
+          </a:effectRef>
+          <a:fontRef idx="minor">
+            <a:schemeClr val="lt1"/>
+          </a:fontRef>
+        </p:style>
+        <p:txBody>
+          <a:bodyPr rtlCol="0" anchor="ctr"/>
+          <a:lstStyle/>
+          <a:p>
+            <a:pPr algn="ctr"/>
+          </a:p>
+        </p:txBody>
+      </p:sp>
+      <p:sp>
+        <p:nvSpPr>
+          <p:cNvPr id="29" name="TextBox 28"/>
+          <p:cNvSpPr txBox="1"/>
+          <p:nvPr/>
+        </p:nvSpPr>
+        <p:spPr>
+          <a:xfrm>
+            <a:off x="822960" y="5650991"/>
+            <a:ext cx="2377440" cy="274320"/>
+          </a:xfrm>
+          <a:prstGeom prst="rect">
+            <a:avLst/>
+          </a:prstGeom>
+          <a:noFill/>
+        </p:spPr>
+        <p:txBody>
+          <a:bodyPr wrap="square" anchor="t" lIns="0" rIns="0" tIns="0" bIns="0">
+            <a:spAutoFit/>
+          </a:bodyPr>
+          <a:lstStyle/>
+          <a:p>
+            <a:pPr algn="l">
+              <a:lnSpc>
+                <a:spcPct val="100000"/>
+              </a:lnSpc>
+            </a:pPr>
+            <a:r>
+              <a:rPr sz="1000" b="1" spc="220">
+                <a:solidFill>
+                  <a:srgbClr val="D97725"/>
+                </a:solidFill>
+                <a:latin typeface="JetBrains Mono"/>
+              </a:rPr>
+              <a:t>GOVERNING TERMS</a:t>
+            </a:r>
+          </a:p>
+        </p:txBody>
+      </p:sp>
+      <p:sp>
+        <p:nvSpPr>
+          <p:cNvPr id="30" name="TextBox 29"/>
+          <p:cNvSpPr txBox="1"/>
+          <p:nvPr/>
+        </p:nvSpPr>
+        <p:spPr>
+          <a:xfrm>
+            <a:off x="3291840" y="5623559"/>
+            <a:ext cx="8046720" cy="365760"/>
+          </a:xfrm>
+          <a:prstGeom prst="rect">
+            <a:avLst/>
+          </a:prstGeom>
+          <a:noFill/>
+        </p:spPr>
+        <p:txBody>
+          <a:bodyPr wrap="square" anchor="t" lIns="0" rIns="0" tIns="0" bIns="0">
+            <a:spAutoFit/>
+          </a:bodyPr>
+          <a:lstStyle/>
+          <a:p>
+            <a:pPr algn="l">
+              <a:lnSpc>
+                <a:spcPct val="100000"/>
+              </a:lnSpc>
+            </a:pPr>
+            <a:r>
+              <a:rPr sz="1150" b="0">
+                <a:solidFill>
+                  <a:srgbClr val="0A0A0C"/>
+                </a:solidFill>
+                <a:latin typeface="Satoshi"/>
+              </a:rPr>
+              <a:t>[FIDIC-based / client contract] · Kenyan law · amicable resolution then arbitration.</a:t>
+            </a:r>
+          </a:p>
+        </p:txBody>
+      </p:sp>
+      <p:sp>
+        <p:nvSpPr>
+          <p:cNvPr id="31" name="Rectangle 30"/>
+          <p:cNvSpPr/>
+          <p:nvPr/>
+        </p:nvSpPr>
+        <p:spPr>
+          <a:xfrm>
+            <a:off x="822960" y="5998463"/>
+            <a:ext cx="10543032" cy="9525"/>
+          </a:xfrm>
+          <a:prstGeom prst="rect">
+            <a:avLst/>
+          </a:prstGeom>
+          <a:solidFill>
+            <a:srgbClr val="E3E3E0"/>
+          </a:solidFill>
+          <a:ln>
+            <a:noFill/>
+          </a:ln>
+          <a:effectLst/>
+        </p:spPr>
+        <p:style>
+          <a:lnRef idx="1">
+            <a:schemeClr val="accent1"/>
+          </a:lnRef>
+          <a:fillRef idx="3">
+            <a:schemeClr val="accent1"/>
+          </a:fillRef>
+          <a:effectRef idx="2">
+            <a:schemeClr val="accent1"/>
+          </a:effectRef>
+          <a:fontRef idx="minor">
+            <a:schemeClr val="lt1"/>
+          </a:fontRef>
+        </p:style>
+        <p:txBody>
+          <a:bodyPr rtlCol="0" anchor="ctr"/>
+          <a:lstStyle/>
+          <a:p>
+            <a:pPr algn="ctr"/>
+          </a:p>
+        </p:txBody>
+      </p:sp>
+      <p:sp>
+        <p:nvSpPr>
+          <p:cNvPr id="32" name="TextBox 31"/>
+          <p:cNvSpPr txBox="1"/>
+          <p:nvPr/>
+        </p:nvSpPr>
+        <p:spPr>
+          <a:xfrm>
+            <a:off x="822960" y="6419088"/>
+            <a:ext cx="7315200" cy="274320"/>
+          </a:xfrm>
+          <a:prstGeom prst="rect">
+            <a:avLst/>
+          </a:prstGeom>
+          <a:noFill/>
+        </p:spPr>
+        <p:txBody>
+          <a:bodyPr wrap="square" anchor="t" lIns="0" rIns="0" tIns="0" bIns="0">
+            <a:spAutoFit/>
+          </a:bodyPr>
+          <a:lstStyle/>
+          <a:p>
+            <a:pPr algn="l">
+              <a:lnSpc>
+                <a:spcPct val="100000"/>
+              </a:lnSpc>
+            </a:pPr>
+            <a:r>
+              <a:rPr sz="800" b="0" spc="200">
+                <a:solidFill>
+                  <a:srgbClr val="A6A6A3"/>
+                </a:solidFill>
+                <a:latin typeface="JetBrains Mono"/>
+              </a:rPr>
+              <a:t>GJW ENERGY — TECHNO-COMMERCIAL PROPOSAL · GJW-TCO-[YYYY]-[NNN]</a:t>
+            </a:r>
+          </a:p>
+        </p:txBody>
+      </p:sp>
+      <p:sp>
+        <p:nvSpPr>
+          <p:cNvPr id="33" name="TextBox 32"/>
+          <p:cNvSpPr txBox="1"/>
+          <p:nvPr/>
+        </p:nvSpPr>
+        <p:spPr>
+          <a:xfrm>
+            <a:off x="11109960" y="6419088"/>
+            <a:ext cx="320040" cy="274320"/>
+          </a:xfrm>
+          <a:prstGeom prst="rect">
+            <a:avLst/>
+          </a:prstGeom>
+          <a:noFill/>
+        </p:spPr>
+        <p:txBody>
+          <a:bodyPr wrap="square" anchor="t" lIns="0" rIns="0" tIns="0" bIns="0">
+            <a:spAutoFit/>
+          </a:bodyPr>
+          <a:lstStyle/>
+          <a:p>
+            <a:pPr algn="r">
+              <a:lnSpc>
+                <a:spcPct val="100000"/>
+              </a:lnSpc>
+            </a:pPr>
+            <a:r>
+              <a:rPr sz="900" b="1" spc="150">
+                <a:solidFill>
+                  <a:srgbClr val="D97725"/>
+                </a:solidFill>
+                <a:latin typeface="JetBrains Mono"/>
+              </a:rPr>
+              <a:t>10</a:t>
+            </a:r>
+          </a:p>
+        </p:txBody>
+      </p:sp>
+    </p:spTree>
+  </p:cSld>
+  <p:clrMapOvr>
+    <a:masterClrMapping/>
+  </p:clrMapOvr>
+</p:sld>
+</file>
+
+<file path=ppt/slides/slide11.xml><?xml version="1.0" encoding="utf-8"?>
+<p:sld xmlns:a="http://schemas.openxmlformats.org/drawingml/2006/main" xmlns:p="http://schemas.openxmlformats.org/presentationml/2006/main" xmlns:r="http://schemas.openxmlformats.org/officeDocument/2006/relationships">
+  <p:cSld>
+    <p:spTree>
+      <p:nvGrpSpPr>
+        <p:cNvPr id="1" name=""/>
+        <p:cNvGrpSpPr/>
+        <p:nvPr/>
+      </p:nvGrpSpPr>
+      <p:grpSpPr/>
+      <p:pic>
+        <p:nvPicPr>
+          <p:cNvPr id="2" name="Picture 1" descr="close-shaded.jpg"/>
+          <p:cNvPicPr>
+            <a:picLocks noChangeAspect="1"/>
+          </p:cNvPicPr>
+          <p:nvPr/>
+        </p:nvPicPr>
+        <p:blipFill>
+          <a:blip r:embed="rId2"/>
+          <a:srcRect t="12499" b="12499"/>
+          <a:stretch>
+            <a:fillRect/>
+          </a:stretch>
+        </p:blipFill>
+        <p:spPr>
+          <a:xfrm>
+            <a:off x="0" y="0"/>
+            <a:ext cx="12191695" cy="6858000"/>
+          </a:xfrm>
+          <a:prstGeom prst="rect">
+            <a:avLst/>
+          </a:prstGeom>
+        </p:spPr>
+      </p:pic>
       <p:sp>
         <p:nvSpPr>
           <p:cNvPr id="3" name="Rectangle 2"/>
@@ -4364,7 +5643,7 @@
                 </a:solidFill>
                 <a:latin typeface="JetBrains Mono"/>
               </a:rPr>
-              <a:t>10</a:t>
+              <a:t>11</a:t>
             </a:r>
           </a:p>
         </p:txBody>
@@ -5328,7 +6607,7 @@
             <a:avLst/>
           </a:prstGeom>
           <a:solidFill>
-            <a:srgbClr val="F7F7F5"/>
+            <a:srgbClr val="0A0A0C"/>
           </a:solidFill>
           <a:ln>
             <a:noFill/>
@@ -5391,7 +6670,7 @@
                 </a:solidFill>
                 <a:latin typeface="JetBrains Mono"/>
               </a:rPr>
-              <a:t>02 — YOUR REQUIREMENT</a:t>
+              <a:t>02 — GEOGRAPHICAL PRESENCE</a:t>
             </a:r>
           </a:p>
         </p:txBody>
@@ -5404,8 +6683,8 @@
         </p:nvSpPr>
         <p:spPr>
           <a:xfrm>
-            <a:off x="822960" y="960120"/>
-            <a:ext cx="10545775" cy="1463040"/>
+            <a:off x="822960" y="914400"/>
+            <a:ext cx="6035040" cy="1463040"/>
           </a:xfrm>
           <a:prstGeom prst="rect">
             <a:avLst/>
@@ -5424,13 +6703,13 @@
               </a:lnSpc>
             </a:pPr>
             <a:r>
-              <a:rPr sz="4400" b="1" spc="-10">
-                <a:solidFill>
-                  <a:srgbClr val="0A0A0C"/>
+              <a:rPr sz="3600" b="1" spc="-10">
+                <a:solidFill>
+                  <a:srgbClr val="FFFFFF"/>
                 </a:solidFill>
                 <a:latin typeface="Cabinet Grotesk"/>
               </a:rPr>
-              <a:t>THE BRIEF, AS WE UNDERSTAND IT.</a:t>
+              <a:t>ONE TEAM. FIVE TERRITORIES.</a:t>
             </a:r>
           </a:p>
         </p:txBody>
@@ -5443,8 +6722,47 @@
         </p:nvSpPr>
         <p:spPr>
           <a:xfrm>
-            <a:off x="822960" y="2011680"/>
-            <a:ext cx="2377440" cy="274320"/>
+            <a:off x="822960" y="2148840"/>
+            <a:ext cx="5852160" cy="914400"/>
+          </a:xfrm>
+          <a:prstGeom prst="rect">
+            <a:avLst/>
+          </a:prstGeom>
+          <a:noFill/>
+        </p:spPr>
+        <p:txBody>
+          <a:bodyPr wrap="square" anchor="t" lIns="0" rIns="0" tIns="0" bIns="0">
+            <a:spAutoFit/>
+          </a:bodyPr>
+          <a:lstStyle/>
+          <a:p>
+            <a:pPr algn="l">
+              <a:lnSpc>
+                <a:spcPct val="130000"/>
+              </a:lnSpc>
+            </a:pPr>
+            <a:r>
+              <a:rPr sz="1250" b="0">
+                <a:solidFill>
+                  <a:srgbClr val="8C8C8C"/>
+                </a:solidFill>
+                <a:latin typeface="Satoshi"/>
+              </a:rPr>
+              <a:t>Headquartered in Kenya, with project delivery and development experience across the region — one engineering standard, applied everywhere we work.</a:t>
+            </a:r>
+          </a:p>
+        </p:txBody>
+      </p:sp>
+      <p:sp>
+        <p:nvSpPr>
+          <p:cNvPr id="6" name="TextBox 5"/>
+          <p:cNvSpPr txBox="1"/>
+          <p:nvPr/>
+        </p:nvSpPr>
+        <p:spPr>
+          <a:xfrm>
+            <a:off x="822960" y="3154680"/>
+            <a:ext cx="502920" cy="274320"/>
           </a:xfrm>
           <a:prstGeom prst="rect">
             <a:avLst/>
@@ -5463,27 +6781,27 @@
               </a:lnSpc>
             </a:pPr>
             <a:r>
-              <a:rPr sz="1000" b="1" spc="220">
+              <a:rPr sz="1100" b="1" spc="150">
                 <a:solidFill>
                   <a:srgbClr val="D97725"/>
                 </a:solidFill>
                 <a:latin typeface="JetBrains Mono"/>
               </a:rPr>
-              <a:t>CLIENT</a:t>
-            </a:r>
-          </a:p>
-        </p:txBody>
-      </p:sp>
-      <p:sp>
-        <p:nvSpPr>
-          <p:cNvPr id="6" name="TextBox 5"/>
-          <p:cNvSpPr txBox="1"/>
-          <p:nvPr/>
-        </p:nvSpPr>
-        <p:spPr>
-          <a:xfrm>
-            <a:off x="3291840" y="1984248"/>
-            <a:ext cx="8046720" cy="320040"/>
+              <a:t>01</a:t>
+            </a:r>
+          </a:p>
+        </p:txBody>
+      </p:sp>
+      <p:sp>
+        <p:nvSpPr>
+          <p:cNvPr id="7" name="TextBox 6"/>
+          <p:cNvSpPr txBox="1"/>
+          <p:nvPr/>
+        </p:nvSpPr>
+        <p:spPr>
+          <a:xfrm>
+            <a:off x="1417320" y="3136392"/>
+            <a:ext cx="2377440" cy="320040"/>
           </a:xfrm>
           <a:prstGeom prst="rect">
             <a:avLst/>
@@ -5502,33 +6820,72 @@
               </a:lnSpc>
             </a:pPr>
             <a:r>
-              <a:rPr sz="1250" b="0">
-                <a:solidFill>
-                  <a:srgbClr val="0A0A0C"/>
-                </a:solidFill>
-                <a:latin typeface="Satoshi"/>
-              </a:rPr>
-              <a:t>[CLIENT NAME]</a:t>
-            </a:r>
-          </a:p>
-        </p:txBody>
-      </p:sp>
-      <p:sp>
-        <p:nvSpPr>
-          <p:cNvPr id="7" name="Rectangle 6"/>
+              <a:rPr sz="1500" b="1" spc="40">
+                <a:solidFill>
+                  <a:srgbClr val="FFFFFF"/>
+                </a:solidFill>
+                <a:latin typeface="Cabinet Grotesk"/>
+              </a:rPr>
+              <a:t>KENYA</a:t>
+            </a:r>
+          </a:p>
+        </p:txBody>
+      </p:sp>
+      <p:sp>
+        <p:nvSpPr>
+          <p:cNvPr id="8" name="TextBox 7"/>
+          <p:cNvSpPr txBox="1"/>
+          <p:nvPr/>
+        </p:nvSpPr>
+        <p:spPr>
+          <a:xfrm>
+            <a:off x="3886200" y="3191256"/>
+            <a:ext cx="3108960" cy="274320"/>
+          </a:xfrm>
+          <a:prstGeom prst="rect">
+            <a:avLst/>
+          </a:prstGeom>
+          <a:noFill/>
+        </p:spPr>
+        <p:txBody>
+          <a:bodyPr wrap="square" anchor="t" lIns="0" rIns="0" tIns="0" bIns="0">
+            <a:spAutoFit/>
+          </a:bodyPr>
+          <a:lstStyle/>
+          <a:p>
+            <a:pPr algn="l">
+              <a:lnSpc>
+                <a:spcPct val="100000"/>
+              </a:lnSpc>
+            </a:pPr>
+            <a:r>
+              <a:rPr sz="850" b="0" spc="150">
+                <a:solidFill>
+                  <a:srgbClr val="8C8C8C"/>
+                </a:solidFill>
+                <a:latin typeface="JetBrains Mono"/>
+              </a:rPr>
+              <a:t>HOME MARKET · EPRA-LICENSED DELIVERY</a:t>
+            </a:r>
+          </a:p>
+        </p:txBody>
+      </p:sp>
+      <p:sp>
+        <p:nvSpPr>
+          <p:cNvPr id="9" name="Rectangle 8"/>
           <p:cNvSpPr/>
           <p:nvPr/>
         </p:nvSpPr>
         <p:spPr>
           <a:xfrm>
-            <a:off x="822960" y="2414016"/>
-            <a:ext cx="10543032" cy="9525"/>
+            <a:off x="822960" y="3611880"/>
+            <a:ext cx="6035040" cy="9525"/>
           </a:xfrm>
           <a:prstGeom prst="rect">
             <a:avLst/>
           </a:prstGeom>
           <a:solidFill>
-            <a:srgbClr val="E3E3E0"/>
+            <a:srgbClr val="5A5A5E"/>
           </a:solidFill>
           <a:ln>
             <a:noFill/>
@@ -5559,14 +6916,14 @@
       </p:sp>
       <p:sp>
         <p:nvSpPr>
-          <p:cNvPr id="8" name="TextBox 7"/>
-          <p:cNvSpPr txBox="1"/>
-          <p:nvPr/>
-        </p:nvSpPr>
-        <p:spPr>
-          <a:xfrm>
-            <a:off x="822960" y="2578608"/>
-            <a:ext cx="2377440" cy="274320"/>
+          <p:cNvPr id="10" name="TextBox 9"/>
+          <p:cNvSpPr txBox="1"/>
+          <p:nvPr/>
+        </p:nvSpPr>
+        <p:spPr>
+          <a:xfrm>
+            <a:off x="822960" y="3776472"/>
+            <a:ext cx="502920" cy="274320"/>
           </a:xfrm>
           <a:prstGeom prst="rect">
             <a:avLst/>
@@ -5585,27 +6942,27 @@
               </a:lnSpc>
             </a:pPr>
             <a:r>
-              <a:rPr sz="1000" b="1" spc="220">
+              <a:rPr sz="1100" b="1" spc="150">
                 <a:solidFill>
                   <a:srgbClr val="D97725"/>
                 </a:solidFill>
                 <a:latin typeface="JetBrains Mono"/>
               </a:rPr>
-              <a:t>SITE</a:t>
-            </a:r>
-          </a:p>
-        </p:txBody>
-      </p:sp>
-      <p:sp>
-        <p:nvSpPr>
-          <p:cNvPr id="9" name="TextBox 8"/>
-          <p:cNvSpPr txBox="1"/>
-          <p:nvPr/>
-        </p:nvSpPr>
-        <p:spPr>
-          <a:xfrm>
-            <a:off x="3291840" y="2551176"/>
-            <a:ext cx="8046720" cy="320040"/>
+              <a:t>02</a:t>
+            </a:r>
+          </a:p>
+        </p:txBody>
+      </p:sp>
+      <p:sp>
+        <p:nvSpPr>
+          <p:cNvPr id="11" name="TextBox 10"/>
+          <p:cNvSpPr txBox="1"/>
+          <p:nvPr/>
+        </p:nvSpPr>
+        <p:spPr>
+          <a:xfrm>
+            <a:off x="1417320" y="3758184"/>
+            <a:ext cx="2377440" cy="320040"/>
           </a:xfrm>
           <a:prstGeom prst="rect">
             <a:avLst/>
@@ -5624,33 +6981,72 @@
               </a:lnSpc>
             </a:pPr>
             <a:r>
-              <a:rPr sz="1250" b="0">
-                <a:solidFill>
-                  <a:srgbClr val="0A0A0C"/>
-                </a:solidFill>
-                <a:latin typeface="Satoshi"/>
-              </a:rPr>
-              <a:t>[SITE / FACILITY], [TOWN], [COUNTRY]</a:t>
-            </a:r>
-          </a:p>
-        </p:txBody>
-      </p:sp>
-      <p:sp>
-        <p:nvSpPr>
-          <p:cNvPr id="10" name="Rectangle 9"/>
+              <a:rPr sz="1500" b="1" spc="40">
+                <a:solidFill>
+                  <a:srgbClr val="FFFFFF"/>
+                </a:solidFill>
+                <a:latin typeface="Cabinet Grotesk"/>
+              </a:rPr>
+              <a:t>UGANDA</a:t>
+            </a:r>
+          </a:p>
+        </p:txBody>
+      </p:sp>
+      <p:sp>
+        <p:nvSpPr>
+          <p:cNvPr id="12" name="TextBox 11"/>
+          <p:cNvSpPr txBox="1"/>
+          <p:nvPr/>
+        </p:nvSpPr>
+        <p:spPr>
+          <a:xfrm>
+            <a:off x="3886200" y="3813048"/>
+            <a:ext cx="3108960" cy="274320"/>
+          </a:xfrm>
+          <a:prstGeom prst="rect">
+            <a:avLst/>
+          </a:prstGeom>
+          <a:noFill/>
+        </p:spPr>
+        <p:txBody>
+          <a:bodyPr wrap="square" anchor="t" lIns="0" rIns="0" tIns="0" bIns="0">
+            <a:spAutoFit/>
+          </a:bodyPr>
+          <a:lstStyle/>
+          <a:p>
+            <a:pPr algn="l">
+              <a:lnSpc>
+                <a:spcPct val="100000"/>
+              </a:lnSpc>
+            </a:pPr>
+            <a:r>
+              <a:rPr sz="850" b="0" spc="150">
+                <a:solidFill>
+                  <a:srgbClr val="8C8C8C"/>
+                </a:solidFill>
+                <a:latin typeface="JetBrains Mono"/>
+              </a:rPr>
+              <a:t>C&amp;I SOLAR &amp; STORAGE</a:t>
+            </a:r>
+          </a:p>
+        </p:txBody>
+      </p:sp>
+      <p:sp>
+        <p:nvSpPr>
+          <p:cNvPr id="13" name="Rectangle 12"/>
           <p:cNvSpPr/>
           <p:nvPr/>
         </p:nvSpPr>
         <p:spPr>
           <a:xfrm>
-            <a:off x="822960" y="2980944"/>
-            <a:ext cx="10543032" cy="9525"/>
+            <a:off x="822960" y="4233672"/>
+            <a:ext cx="6035040" cy="9525"/>
           </a:xfrm>
           <a:prstGeom prst="rect">
             <a:avLst/>
           </a:prstGeom>
           <a:solidFill>
-            <a:srgbClr val="E3E3E0"/>
+            <a:srgbClr val="5A5A5E"/>
           </a:solidFill>
           <a:ln>
             <a:noFill/>
@@ -5681,14 +7077,14 @@
       </p:sp>
       <p:sp>
         <p:nvSpPr>
-          <p:cNvPr id="11" name="TextBox 10"/>
-          <p:cNvSpPr txBox="1"/>
-          <p:nvPr/>
-        </p:nvSpPr>
-        <p:spPr>
-          <a:xfrm>
-            <a:off x="822960" y="3145536"/>
-            <a:ext cx="2377440" cy="274320"/>
+          <p:cNvPr id="14" name="TextBox 13"/>
+          <p:cNvSpPr txBox="1"/>
+          <p:nvPr/>
+        </p:nvSpPr>
+        <p:spPr>
+          <a:xfrm>
+            <a:off x="822960" y="4398264"/>
+            <a:ext cx="502920" cy="274320"/>
           </a:xfrm>
           <a:prstGeom prst="rect">
             <a:avLst/>
@@ -5707,27 +7103,27 @@
               </a:lnSpc>
             </a:pPr>
             <a:r>
-              <a:rPr sz="1000" b="1" spc="220">
+              <a:rPr sz="1100" b="1" spc="150">
                 <a:solidFill>
                   <a:srgbClr val="D97725"/>
                 </a:solidFill>
                 <a:latin typeface="JetBrains Mono"/>
               </a:rPr>
-              <a:t>OBJECTIVE</a:t>
-            </a:r>
-          </a:p>
-        </p:txBody>
-      </p:sp>
-      <p:sp>
-        <p:nvSpPr>
-          <p:cNvPr id="12" name="TextBox 11"/>
-          <p:cNvSpPr txBox="1"/>
-          <p:nvPr/>
-        </p:nvSpPr>
-        <p:spPr>
-          <a:xfrm>
-            <a:off x="3291840" y="3118104"/>
-            <a:ext cx="8046720" cy="320040"/>
+              <a:t>03</a:t>
+            </a:r>
+          </a:p>
+        </p:txBody>
+      </p:sp>
+      <p:sp>
+        <p:nvSpPr>
+          <p:cNvPr id="15" name="TextBox 14"/>
+          <p:cNvSpPr txBox="1"/>
+          <p:nvPr/>
+        </p:nvSpPr>
+        <p:spPr>
+          <a:xfrm>
+            <a:off x="1417320" y="4379976"/>
+            <a:ext cx="2377440" cy="320040"/>
           </a:xfrm>
           <a:prstGeom prst="rect">
             <a:avLst/>
@@ -5746,33 +7142,72 @@
               </a:lnSpc>
             </a:pPr>
             <a:r>
-              <a:rPr sz="1250" b="0">
-                <a:solidFill>
-                  <a:srgbClr val="0A0A0C"/>
-                </a:solidFill>
-                <a:latin typeface="Satoshi"/>
-              </a:rPr>
-              <a:t>[Reduce grid energy costs / secure supply / displace diesel]</a:t>
-            </a:r>
-          </a:p>
-        </p:txBody>
-      </p:sp>
-      <p:sp>
-        <p:nvSpPr>
-          <p:cNvPr id="13" name="Rectangle 12"/>
+              <a:rPr sz="1500" b="1" spc="40">
+                <a:solidFill>
+                  <a:srgbClr val="FFFFFF"/>
+                </a:solidFill>
+                <a:latin typeface="Cabinet Grotesk"/>
+              </a:rPr>
+              <a:t>TANZANIA</a:t>
+            </a:r>
+          </a:p>
+        </p:txBody>
+      </p:sp>
+      <p:sp>
+        <p:nvSpPr>
+          <p:cNvPr id="16" name="TextBox 15"/>
+          <p:cNvSpPr txBox="1"/>
+          <p:nvPr/>
+        </p:nvSpPr>
+        <p:spPr>
+          <a:xfrm>
+            <a:off x="3886200" y="4434840"/>
+            <a:ext cx="3108960" cy="274320"/>
+          </a:xfrm>
+          <a:prstGeom prst="rect">
+            <a:avLst/>
+          </a:prstGeom>
+          <a:noFill/>
+        </p:spPr>
+        <p:txBody>
+          <a:bodyPr wrap="square" anchor="t" lIns="0" rIns="0" tIns="0" bIns="0">
+            <a:spAutoFit/>
+          </a:bodyPr>
+          <a:lstStyle/>
+          <a:p>
+            <a:pPr algn="l">
+              <a:lnSpc>
+                <a:spcPct val="100000"/>
+              </a:lnSpc>
+            </a:pPr>
+            <a:r>
+              <a:rPr sz="850" b="0" spc="150">
+                <a:solidFill>
+                  <a:srgbClr val="8C8C8C"/>
+                </a:solidFill>
+                <a:latin typeface="JetBrains Mono"/>
+              </a:rPr>
+              <a:t>C&amp;I SOLAR &amp; STORAGE</a:t>
+            </a:r>
+          </a:p>
+        </p:txBody>
+      </p:sp>
+      <p:sp>
+        <p:nvSpPr>
+          <p:cNvPr id="17" name="Rectangle 16"/>
           <p:cNvSpPr/>
           <p:nvPr/>
         </p:nvSpPr>
         <p:spPr>
           <a:xfrm>
-            <a:off x="822960" y="3547872"/>
-            <a:ext cx="10543032" cy="9525"/>
+            <a:off x="822960" y="4855464"/>
+            <a:ext cx="6035040" cy="9525"/>
           </a:xfrm>
           <a:prstGeom prst="rect">
             <a:avLst/>
           </a:prstGeom>
           <a:solidFill>
-            <a:srgbClr val="E3E3E0"/>
+            <a:srgbClr val="5A5A5E"/>
           </a:solidFill>
           <a:ln>
             <a:noFill/>
@@ -5803,14 +7238,14 @@
       </p:sp>
       <p:sp>
         <p:nvSpPr>
-          <p:cNvPr id="14" name="TextBox 13"/>
-          <p:cNvSpPr txBox="1"/>
-          <p:nvPr/>
-        </p:nvSpPr>
-        <p:spPr>
-          <a:xfrm>
-            <a:off x="822960" y="3712464"/>
-            <a:ext cx="2377440" cy="274320"/>
+          <p:cNvPr id="18" name="TextBox 17"/>
+          <p:cNvSpPr txBox="1"/>
+          <p:nvPr/>
+        </p:nvSpPr>
+        <p:spPr>
+          <a:xfrm>
+            <a:off x="822960" y="5020056"/>
+            <a:ext cx="502920" cy="274320"/>
           </a:xfrm>
           <a:prstGeom prst="rect">
             <a:avLst/>
@@ -5829,27 +7264,27 @@
               </a:lnSpc>
             </a:pPr>
             <a:r>
-              <a:rPr sz="1000" b="1" spc="220">
+              <a:rPr sz="1100" b="1" spc="150">
                 <a:solidFill>
                   <a:srgbClr val="D97725"/>
                 </a:solidFill>
                 <a:latin typeface="JetBrains Mono"/>
               </a:rPr>
-              <a:t>LOAD PROFILE</a:t>
-            </a:r>
-          </a:p>
-        </p:txBody>
-      </p:sp>
-      <p:sp>
-        <p:nvSpPr>
-          <p:cNvPr id="15" name="TextBox 14"/>
-          <p:cNvSpPr txBox="1"/>
-          <p:nvPr/>
-        </p:nvSpPr>
-        <p:spPr>
-          <a:xfrm>
-            <a:off x="3291840" y="3685032"/>
-            <a:ext cx="8046720" cy="320040"/>
+              <a:t>04</a:t>
+            </a:r>
+          </a:p>
+        </p:txBody>
+      </p:sp>
+      <p:sp>
+        <p:nvSpPr>
+          <p:cNvPr id="19" name="TextBox 18"/>
+          <p:cNvSpPr txBox="1"/>
+          <p:nvPr/>
+        </p:nvSpPr>
+        <p:spPr>
+          <a:xfrm>
+            <a:off x="1417320" y="5001768"/>
+            <a:ext cx="2377440" cy="320040"/>
           </a:xfrm>
           <a:prstGeom prst="rect">
             <a:avLst/>
@@ -5868,33 +7303,72 @@
               </a:lnSpc>
             </a:pPr>
             <a:r>
-              <a:rPr sz="1250" b="0">
-                <a:solidFill>
-                  <a:srgbClr val="0A0A0C"/>
-                </a:solidFill>
-                <a:latin typeface="Satoshi"/>
-              </a:rPr>
-              <a:t>[Daytime baseload ±XXX kW · peak XXX kVA · XX,XXX kWh/month]</a:t>
-            </a:r>
-          </a:p>
-        </p:txBody>
-      </p:sp>
-      <p:sp>
-        <p:nvSpPr>
-          <p:cNvPr id="16" name="Rectangle 15"/>
+              <a:rPr sz="1500" b="1" spc="40">
+                <a:solidFill>
+                  <a:srgbClr val="FFFFFF"/>
+                </a:solidFill>
+                <a:latin typeface="Cabinet Grotesk"/>
+              </a:rPr>
+              <a:t>SOMALIA</a:t>
+            </a:r>
+          </a:p>
+        </p:txBody>
+      </p:sp>
+      <p:sp>
+        <p:nvSpPr>
+          <p:cNvPr id="20" name="TextBox 19"/>
+          <p:cNvSpPr txBox="1"/>
+          <p:nvPr/>
+        </p:nvSpPr>
+        <p:spPr>
+          <a:xfrm>
+            <a:off x="3886200" y="5056632"/>
+            <a:ext cx="3108960" cy="274320"/>
+          </a:xfrm>
+          <a:prstGeom prst="rect">
+            <a:avLst/>
+          </a:prstGeom>
+          <a:noFill/>
+        </p:spPr>
+        <p:txBody>
+          <a:bodyPr wrap="square" anchor="t" lIns="0" rIns="0" tIns="0" bIns="0">
+            <a:spAutoFit/>
+          </a:bodyPr>
+          <a:lstStyle/>
+          <a:p>
+            <a:pPr algn="l">
+              <a:lnSpc>
+                <a:spcPct val="100000"/>
+              </a:lnSpc>
+            </a:pPr>
+            <a:r>
+              <a:rPr sz="850" b="0" spc="150">
+                <a:solidFill>
+                  <a:srgbClr val="8C8C8C"/>
+                </a:solidFill>
+                <a:latin typeface="JetBrains Mono"/>
+              </a:rPr>
+              <a:t>OFF-GRID &amp; DIESEL DISPLACEMENT</a:t>
+            </a:r>
+          </a:p>
+        </p:txBody>
+      </p:sp>
+      <p:sp>
+        <p:nvSpPr>
+          <p:cNvPr id="21" name="Rectangle 20"/>
           <p:cNvSpPr/>
           <p:nvPr/>
         </p:nvSpPr>
         <p:spPr>
           <a:xfrm>
-            <a:off x="822960" y="4114800"/>
-            <a:ext cx="10543032" cy="9525"/>
+            <a:off x="822960" y="5477256"/>
+            <a:ext cx="6035040" cy="9525"/>
           </a:xfrm>
           <a:prstGeom prst="rect">
             <a:avLst/>
           </a:prstGeom>
           <a:solidFill>
-            <a:srgbClr val="E3E3E0"/>
+            <a:srgbClr val="5A5A5E"/>
           </a:solidFill>
           <a:ln>
             <a:noFill/>
@@ -5925,14 +7399,14 @@
       </p:sp>
       <p:sp>
         <p:nvSpPr>
-          <p:cNvPr id="17" name="TextBox 16"/>
-          <p:cNvSpPr txBox="1"/>
-          <p:nvPr/>
-        </p:nvSpPr>
-        <p:spPr>
-          <a:xfrm>
-            <a:off x="822960" y="4279392"/>
-            <a:ext cx="2377440" cy="274320"/>
+          <p:cNvPr id="22" name="TextBox 21"/>
+          <p:cNvSpPr txBox="1"/>
+          <p:nvPr/>
+        </p:nvSpPr>
+        <p:spPr>
+          <a:xfrm>
+            <a:off x="822960" y="5641848"/>
+            <a:ext cx="502920" cy="274320"/>
           </a:xfrm>
           <a:prstGeom prst="rect">
             <a:avLst/>
@@ -5951,27 +7425,27 @@
               </a:lnSpc>
             </a:pPr>
             <a:r>
-              <a:rPr sz="1000" b="1" spc="220">
+              <a:rPr sz="1100" b="1" spc="150">
                 <a:solidFill>
                   <a:srgbClr val="D97725"/>
                 </a:solidFill>
                 <a:latin typeface="JetBrains Mono"/>
               </a:rPr>
-              <a:t>SUPPLY CONTEXT</a:t>
-            </a:r>
-          </a:p>
-        </p:txBody>
-      </p:sp>
-      <p:sp>
-        <p:nvSpPr>
-          <p:cNvPr id="18" name="TextBox 17"/>
-          <p:cNvSpPr txBox="1"/>
-          <p:nvPr/>
-        </p:nvSpPr>
-        <p:spPr>
-          <a:xfrm>
-            <a:off x="3291840" y="4251960"/>
-            <a:ext cx="8046720" cy="320040"/>
+              <a:t>05</a:t>
+            </a:r>
+          </a:p>
+        </p:txBody>
+      </p:sp>
+      <p:sp>
+        <p:nvSpPr>
+          <p:cNvPr id="23" name="TextBox 22"/>
+          <p:cNvSpPr txBox="1"/>
+          <p:nvPr/>
+        </p:nvSpPr>
+        <p:spPr>
+          <a:xfrm>
+            <a:off x="1417320" y="5623560"/>
+            <a:ext cx="2377440" cy="320040"/>
           </a:xfrm>
           <a:prstGeom prst="rect">
             <a:avLst/>
@@ -5990,33 +7464,72 @@
               </a:lnSpc>
             </a:pPr>
             <a:r>
-              <a:rPr sz="1250" b="0">
-                <a:solidFill>
-                  <a:srgbClr val="0A0A0C"/>
-                </a:solidFill>
-                <a:latin typeface="Satoshi"/>
-              </a:rPr>
-              <a:t>[Utility grid — utility tariff / outage profile / genset backup]</a:t>
-            </a:r>
-          </a:p>
-        </p:txBody>
-      </p:sp>
-      <p:sp>
-        <p:nvSpPr>
-          <p:cNvPr id="19" name="Rectangle 18"/>
+              <a:rPr sz="1500" b="1" spc="40">
+                <a:solidFill>
+                  <a:srgbClr val="FFFFFF"/>
+                </a:solidFill>
+                <a:latin typeface="Cabinet Grotesk"/>
+              </a:rPr>
+              <a:t>SOMALILAND</a:t>
+            </a:r>
+          </a:p>
+        </p:txBody>
+      </p:sp>
+      <p:sp>
+        <p:nvSpPr>
+          <p:cNvPr id="24" name="TextBox 23"/>
+          <p:cNvSpPr txBox="1"/>
+          <p:nvPr/>
+        </p:nvSpPr>
+        <p:spPr>
+          <a:xfrm>
+            <a:off x="3886200" y="5678424"/>
+            <a:ext cx="3108960" cy="274320"/>
+          </a:xfrm>
+          <a:prstGeom prst="rect">
+            <a:avLst/>
+          </a:prstGeom>
+          <a:noFill/>
+        </p:spPr>
+        <p:txBody>
+          <a:bodyPr wrap="square" anchor="t" lIns="0" rIns="0" tIns="0" bIns="0">
+            <a:spAutoFit/>
+          </a:bodyPr>
+          <a:lstStyle/>
+          <a:p>
+            <a:pPr algn="l">
+              <a:lnSpc>
+                <a:spcPct val="100000"/>
+              </a:lnSpc>
+            </a:pPr>
+            <a:r>
+              <a:rPr sz="850" b="0" spc="150">
+                <a:solidFill>
+                  <a:srgbClr val="8C8C8C"/>
+                </a:solidFill>
+                <a:latin typeface="JetBrains Mono"/>
+              </a:rPr>
+              <a:t>WATER &amp; UTILITY SOLAR</a:t>
+            </a:r>
+          </a:p>
+        </p:txBody>
+      </p:sp>
+      <p:sp>
+        <p:nvSpPr>
+          <p:cNvPr id="25" name="Rectangle 24"/>
           <p:cNvSpPr/>
           <p:nvPr/>
         </p:nvSpPr>
         <p:spPr>
           <a:xfrm>
-            <a:off x="822960" y="4681728"/>
-            <a:ext cx="10543032" cy="9525"/>
+            <a:off x="822960" y="6099048"/>
+            <a:ext cx="6035040" cy="9525"/>
           </a:xfrm>
           <a:prstGeom prst="rect">
             <a:avLst/>
           </a:prstGeom>
           <a:solidFill>
-            <a:srgbClr val="E3E3E0"/>
+            <a:srgbClr val="5A5A5E"/>
           </a:solidFill>
           <a:ln>
             <a:noFill/>
@@ -6045,170 +7558,33 @@
           </a:p>
         </p:txBody>
       </p:sp>
-      <p:sp>
-        <p:nvSpPr>
-          <p:cNvPr id="20" name="TextBox 19"/>
-          <p:cNvSpPr txBox="1"/>
-          <p:nvPr/>
-        </p:nvSpPr>
-        <p:spPr>
-          <a:xfrm>
-            <a:off x="822960" y="4846320"/>
-            <a:ext cx="2377440" cy="274320"/>
-          </a:xfrm>
-          <a:prstGeom prst="rect">
-            <a:avLst/>
-          </a:prstGeom>
-          <a:noFill/>
-        </p:spPr>
-        <p:txBody>
-          <a:bodyPr wrap="square" anchor="t" lIns="0" rIns="0" tIns="0" bIns="0">
-            <a:spAutoFit/>
-          </a:bodyPr>
-          <a:lstStyle/>
-          <a:p>
-            <a:pPr algn="l">
-              <a:lnSpc>
-                <a:spcPct val="100000"/>
-              </a:lnSpc>
-            </a:pPr>
-            <a:r>
-              <a:rPr sz="1000" b="1" spc="220">
-                <a:solidFill>
-                  <a:srgbClr val="D97725"/>
-                </a:solidFill>
-                <a:latin typeface="JetBrains Mono"/>
-              </a:rPr>
-              <a:t>CONSTRAINTS</a:t>
-            </a:r>
-          </a:p>
-        </p:txBody>
-      </p:sp>
-      <p:sp>
-        <p:nvSpPr>
-          <p:cNvPr id="21" name="TextBox 20"/>
-          <p:cNvSpPr txBox="1"/>
-          <p:nvPr/>
-        </p:nvSpPr>
-        <p:spPr>
-          <a:xfrm>
-            <a:off x="3291840" y="4818888"/>
-            <a:ext cx="8046720" cy="320040"/>
-          </a:xfrm>
-          <a:prstGeom prst="rect">
-            <a:avLst/>
-          </a:prstGeom>
-          <a:noFill/>
-        </p:spPr>
-        <p:txBody>
-          <a:bodyPr wrap="square" anchor="t" lIns="0" rIns="0" tIns="0" bIns="0">
-            <a:spAutoFit/>
-          </a:bodyPr>
-          <a:lstStyle/>
-          <a:p>
-            <a:pPr algn="l">
-              <a:lnSpc>
-                <a:spcPct val="100000"/>
-              </a:lnSpc>
-            </a:pPr>
-            <a:r>
-              <a:rPr sz="1250" b="0">
-                <a:solidFill>
-                  <a:srgbClr val="0A0A0C"/>
-                </a:solidFill>
-                <a:latin typeface="Satoshi"/>
-              </a:rPr>
-              <a:t>[Roof or land availability · outage windows · interconnection limits]</a:t>
-            </a:r>
-          </a:p>
-        </p:txBody>
-      </p:sp>
-      <p:sp>
-        <p:nvSpPr>
-          <p:cNvPr id="22" name="Rectangle 21"/>
-          <p:cNvSpPr/>
-          <p:nvPr/>
-        </p:nvSpPr>
-        <p:spPr>
-          <a:xfrm>
-            <a:off x="822960" y="5248656"/>
-            <a:ext cx="10543032" cy="9525"/>
-          </a:xfrm>
-          <a:prstGeom prst="rect">
-            <a:avLst/>
-          </a:prstGeom>
-          <a:solidFill>
-            <a:srgbClr val="E3E3E0"/>
-          </a:solidFill>
-          <a:ln>
-            <a:noFill/>
-          </a:ln>
-          <a:effectLst/>
-        </p:spPr>
-        <p:style>
-          <a:lnRef idx="1">
-            <a:schemeClr val="accent1"/>
-          </a:lnRef>
-          <a:fillRef idx="3">
-            <a:schemeClr val="accent1"/>
-          </a:fillRef>
-          <a:effectRef idx="2">
-            <a:schemeClr val="accent1"/>
-          </a:effectRef>
-          <a:fontRef idx="minor">
-            <a:schemeClr val="lt1"/>
-          </a:fontRef>
-        </p:style>
-        <p:txBody>
-          <a:bodyPr rtlCol="0" anchor="ctr"/>
-          <a:lstStyle/>
-          <a:p>
-            <a:pPr algn="ctr"/>
-          </a:p>
-        </p:txBody>
-      </p:sp>
-      <p:sp>
-        <p:nvSpPr>
-          <p:cNvPr id="23" name="TextBox 22"/>
-          <p:cNvSpPr txBox="1"/>
-          <p:nvPr/>
-        </p:nvSpPr>
-        <p:spPr>
-          <a:xfrm>
-            <a:off x="822960" y="5715000"/>
-            <a:ext cx="10515600" cy="914400"/>
-          </a:xfrm>
-          <a:prstGeom prst="rect">
-            <a:avLst/>
-          </a:prstGeom>
-          <a:noFill/>
-        </p:spPr>
-        <p:txBody>
-          <a:bodyPr wrap="square" anchor="t" lIns="0" rIns="0" tIns="0" bIns="0">
-            <a:spAutoFit/>
-          </a:bodyPr>
-          <a:lstStyle/>
-          <a:p>
-            <a:pPr algn="l">
-              <a:lnSpc>
-                <a:spcPct val="125000"/>
-              </a:lnSpc>
-            </a:pPr>
-            <a:r>
-              <a:rPr sz="1100" b="0">
-                <a:solidFill>
-                  <a:srgbClr val="737371"/>
-                </a:solidFill>
-                <a:latin typeface="Satoshi"/>
-              </a:rPr>
-              <a:t>Source: [site visit dated ___ / client data pack / utility bills for ___ months]. Any assumption stated here is confirmed during detailed design and does not alter the fixed price unless the physical scope changes.</a:t>
-            </a:r>
-          </a:p>
-        </p:txBody>
-      </p:sp>
-      <p:sp>
-        <p:nvSpPr>
-          <p:cNvPr id="24" name="TextBox 23"/>
+      <p:pic>
+        <p:nvPicPr>
+          <p:cNvPr id="26" name="Picture 25" descr="presence-map.png"/>
+          <p:cNvPicPr>
+            <a:picLocks noChangeAspect="1"/>
+          </p:cNvPicPr>
+          <p:nvPr/>
+        </p:nvPicPr>
+        <p:blipFill>
+          <a:blip r:embed="rId2"/>
+          <a:stretch>
+            <a:fillRect/>
+          </a:stretch>
+        </p:blipFill>
+        <p:spPr>
+          <a:xfrm>
+            <a:off x="6949440" y="914400"/>
+            <a:ext cx="4396859" cy="5394960"/>
+          </a:xfrm>
+          <a:prstGeom prst="rect">
+            <a:avLst/>
+          </a:prstGeom>
+        </p:spPr>
+      </p:pic>
+      <p:sp>
+        <p:nvSpPr>
+          <p:cNvPr id="27" name="TextBox 26"/>
           <p:cNvSpPr txBox="1"/>
           <p:nvPr/>
         </p:nvSpPr>
@@ -6236,7 +7612,7 @@
             <a:r>
               <a:rPr sz="800" b="0" spc="200">
                 <a:solidFill>
-                  <a:srgbClr val="A6A6A3"/>
+                  <a:srgbClr val="8C8C8C"/>
                 </a:solidFill>
                 <a:latin typeface="JetBrains Mono"/>
               </a:rPr>
@@ -6247,7 +7623,7 @@
       </p:sp>
       <p:sp>
         <p:nvSpPr>
-          <p:cNvPr id="25" name="TextBox 24"/>
+          <p:cNvPr id="28" name="TextBox 27"/>
           <p:cNvSpPr txBox="1"/>
           <p:nvPr/>
         </p:nvSpPr>
@@ -6380,7 +7756,7 @@
                 </a:solidFill>
                 <a:latin typeface="JetBrains Mono"/>
               </a:rPr>
-              <a:t>03 — TECHNICAL OFFER</a:t>
+              <a:t>03 — YOUR REQUIREMENT</a:t>
             </a:r>
           </a:p>
         </p:txBody>
@@ -6419,7 +7795,7 @@
                 </a:solidFill>
                 <a:latin typeface="Cabinet Grotesk"/>
               </a:rPr>
-              <a:t>PROPOSED SYSTEM.</a:t>
+              <a:t>THE BRIEF, AS WE UNDERSTAND IT.</a:t>
             </a:r>
           </a:p>
         </p:txBody>
@@ -6432,8 +7808,8 @@
         </p:nvSpPr>
         <p:spPr>
           <a:xfrm>
-            <a:off x="822960" y="1965960"/>
-            <a:ext cx="2834640" cy="274320"/>
+            <a:off x="822960" y="2011680"/>
+            <a:ext cx="2377440" cy="274320"/>
           </a:xfrm>
           <a:prstGeom prst="rect">
             <a:avLst/>
@@ -6452,13 +7828,13 @@
               </a:lnSpc>
             </a:pPr>
             <a:r>
-              <a:rPr sz="1000" b="1" spc="200">
+              <a:rPr sz="1000" b="1" spc="220">
                 <a:solidFill>
                   <a:srgbClr val="D97725"/>
                 </a:solidFill>
                 <a:latin typeface="JetBrains Mono"/>
               </a:rPr>
-              <a:t>SYSTEM SIZE</a:t>
+              <a:t>CLIENT</a:t>
             </a:r>
           </a:p>
         </p:txBody>
@@ -6471,8 +7847,8 @@
         </p:nvSpPr>
         <p:spPr>
           <a:xfrm>
-            <a:off x="3840480" y="1938528"/>
-            <a:ext cx="7498079" cy="320040"/>
+            <a:off x="3291840" y="1984248"/>
+            <a:ext cx="8046720" cy="320040"/>
           </a:xfrm>
           <a:prstGeom prst="rect">
             <a:avLst/>
@@ -6491,13 +7867,13 @@
               </a:lnSpc>
             </a:pPr>
             <a:r>
-              <a:rPr sz="1200" b="0">
+              <a:rPr sz="1250" b="0">
                 <a:solidFill>
                   <a:srgbClr val="0A0A0C"/>
                 </a:solidFill>
                 <a:latin typeface="Satoshi"/>
               </a:rPr>
-              <a:t>[XXX] kWp DC / [XXX] kW AC</a:t>
+              <a:t>[CLIENT NAME]</a:t>
             </a:r>
           </a:p>
         </p:txBody>
@@ -6510,7 +7886,7 @@
         </p:nvSpPr>
         <p:spPr>
           <a:xfrm>
-            <a:off x="822960" y="2313432"/>
+            <a:off x="822960" y="2414016"/>
             <a:ext cx="10543032" cy="9525"/>
           </a:xfrm>
           <a:prstGeom prst="rect">
@@ -6554,8 +7930,8 @@
         </p:nvSpPr>
         <p:spPr>
           <a:xfrm>
-            <a:off x="822960" y="2441448"/>
-            <a:ext cx="2834640" cy="274320"/>
+            <a:off x="822960" y="2578608"/>
+            <a:ext cx="2377440" cy="274320"/>
           </a:xfrm>
           <a:prstGeom prst="rect">
             <a:avLst/>
@@ -6574,13 +7950,13 @@
               </a:lnSpc>
             </a:pPr>
             <a:r>
-              <a:rPr sz="1000" b="1" spc="200">
+              <a:rPr sz="1000" b="1" spc="220">
                 <a:solidFill>
                   <a:srgbClr val="D97725"/>
                 </a:solidFill>
                 <a:latin typeface="JetBrains Mono"/>
               </a:rPr>
-              <a:t>PV MODULES</a:t>
+              <a:t>SITE</a:t>
             </a:r>
           </a:p>
         </p:txBody>
@@ -6593,8 +7969,8 @@
         </p:nvSpPr>
         <p:spPr>
           <a:xfrm>
-            <a:off x="3840480" y="2414016"/>
-            <a:ext cx="7498079" cy="320040"/>
+            <a:off x="3291840" y="2551176"/>
+            <a:ext cx="8046720" cy="320040"/>
           </a:xfrm>
           <a:prstGeom prst="rect">
             <a:avLst/>
@@ -6613,13 +7989,13 @@
               </a:lnSpc>
             </a:pPr>
             <a:r>
-              <a:rPr sz="1200" b="0">
+              <a:rPr sz="1250" b="0">
                 <a:solidFill>
                   <a:srgbClr val="0A0A0C"/>
                 </a:solidFill>
                 <a:latin typeface="Satoshi"/>
               </a:rPr>
-              <a:t>[N × XXX Wp Tier-1 mono / n-type · make per final BOQ]</a:t>
+              <a:t>[SITE / FACILITY], [TOWN], [COUNTRY]</a:t>
             </a:r>
           </a:p>
         </p:txBody>
@@ -6632,7 +8008,7 @@
         </p:nvSpPr>
         <p:spPr>
           <a:xfrm>
-            <a:off x="822960" y="2788920"/>
+            <a:off x="822960" y="2980944"/>
             <a:ext cx="10543032" cy="9525"/>
           </a:xfrm>
           <a:prstGeom prst="rect">
@@ -6676,8 +8052,8 @@
         </p:nvSpPr>
         <p:spPr>
           <a:xfrm>
-            <a:off x="822960" y="2916936"/>
-            <a:ext cx="2834640" cy="274320"/>
+            <a:off x="822960" y="3145536"/>
+            <a:ext cx="2377440" cy="274320"/>
           </a:xfrm>
           <a:prstGeom prst="rect">
             <a:avLst/>
@@ -6696,13 +8072,13 @@
               </a:lnSpc>
             </a:pPr>
             <a:r>
-              <a:rPr sz="1000" b="1" spc="200">
+              <a:rPr sz="1000" b="1" spc="220">
                 <a:solidFill>
                   <a:srgbClr val="D97725"/>
                 </a:solidFill>
                 <a:latin typeface="JetBrains Mono"/>
               </a:rPr>
-              <a:t>INVERTERS</a:t>
+              <a:t>OBJECTIVE</a:t>
             </a:r>
           </a:p>
         </p:txBody>
@@ -6715,8 +8091,8 @@
         </p:nvSpPr>
         <p:spPr>
           <a:xfrm>
-            <a:off x="3840480" y="2889504"/>
-            <a:ext cx="7498079" cy="320040"/>
+            <a:off x="3291840" y="3118104"/>
+            <a:ext cx="8046720" cy="320040"/>
           </a:xfrm>
           <a:prstGeom prst="rect">
             <a:avLst/>
@@ -6735,13 +8111,13 @@
               </a:lnSpc>
             </a:pPr>
             <a:r>
-              <a:rPr sz="1200" b="0">
+              <a:rPr sz="1250" b="0">
                 <a:solidFill>
                   <a:srgbClr val="0A0A0C"/>
                 </a:solidFill>
                 <a:latin typeface="Satoshi"/>
               </a:rPr>
-              <a:t>[N × XXX kW string inverters · make per final BOQ]</a:t>
+              <a:t>[Reduce grid energy costs / secure supply / displace diesel]</a:t>
             </a:r>
           </a:p>
         </p:txBody>
@@ -6754,7 +8130,7 @@
         </p:nvSpPr>
         <p:spPr>
           <a:xfrm>
-            <a:off x="822960" y="3264408"/>
+            <a:off x="822960" y="3547872"/>
             <a:ext cx="10543032" cy="9525"/>
           </a:xfrm>
           <a:prstGeom prst="rect">
@@ -6798,8 +8174,8 @@
         </p:nvSpPr>
         <p:spPr>
           <a:xfrm>
-            <a:off x="822960" y="3392424"/>
-            <a:ext cx="2834640" cy="274320"/>
+            <a:off x="822960" y="3712464"/>
+            <a:ext cx="2377440" cy="274320"/>
           </a:xfrm>
           <a:prstGeom prst="rect">
             <a:avLst/>
@@ -6818,13 +8194,13 @@
               </a:lnSpc>
             </a:pPr>
             <a:r>
-              <a:rPr sz="1000" b="1" spc="200">
+              <a:rPr sz="1000" b="1" spc="220">
                 <a:solidFill>
                   <a:srgbClr val="D97725"/>
                 </a:solidFill>
                 <a:latin typeface="JetBrains Mono"/>
               </a:rPr>
-              <a:t>STORAGE (OPTION)</a:t>
+              <a:t>LOAD PROFILE</a:t>
             </a:r>
           </a:p>
         </p:txBody>
@@ -6837,8 +8213,8 @@
         </p:nvSpPr>
         <p:spPr>
           <a:xfrm>
-            <a:off x="3840480" y="3364992"/>
-            <a:ext cx="7498079" cy="320040"/>
+            <a:off x="3291840" y="3685032"/>
+            <a:ext cx="8046720" cy="320040"/>
           </a:xfrm>
           <a:prstGeom prst="rect">
             <a:avLst/>
@@ -6857,13 +8233,13 @@
               </a:lnSpc>
             </a:pPr>
             <a:r>
-              <a:rPr sz="1200" b="0">
+              <a:rPr sz="1250" b="0">
                 <a:solidFill>
                   <a:srgbClr val="0A0A0C"/>
                 </a:solidFill>
                 <a:latin typeface="Satoshi"/>
               </a:rPr>
-              <a:t>[XXX kWh LFP BESS · hybrid inverter / PCS]</a:t>
+              <a:t>[Daytime baseload ±XXX kW · peak XXX kVA · XX,XXX kWh/month]</a:t>
             </a:r>
           </a:p>
         </p:txBody>
@@ -6876,7 +8252,7 @@
         </p:nvSpPr>
         <p:spPr>
           <a:xfrm>
-            <a:off x="822960" y="3739896"/>
+            <a:off x="822960" y="4114800"/>
             <a:ext cx="10543032" cy="9525"/>
           </a:xfrm>
           <a:prstGeom prst="rect">
@@ -6920,8 +8296,8 @@
         </p:nvSpPr>
         <p:spPr>
           <a:xfrm>
-            <a:off x="822960" y="3867912"/>
-            <a:ext cx="2834640" cy="274320"/>
+            <a:off x="822960" y="4279392"/>
+            <a:ext cx="2377440" cy="274320"/>
           </a:xfrm>
           <a:prstGeom prst="rect">
             <a:avLst/>
@@ -6940,13 +8316,13 @@
               </a:lnSpc>
             </a:pPr>
             <a:r>
-              <a:rPr sz="1000" b="1" spc="200">
+              <a:rPr sz="1000" b="1" spc="220">
                 <a:solidFill>
                   <a:srgbClr val="D97725"/>
                 </a:solidFill>
                 <a:latin typeface="JetBrains Mono"/>
               </a:rPr>
-              <a:t>GRID INTERFACE</a:t>
+              <a:t>SUPPLY CONTEXT</a:t>
             </a:r>
           </a:p>
         </p:txBody>
@@ -6959,8 +8335,8 @@
         </p:nvSpPr>
         <p:spPr>
           <a:xfrm>
-            <a:off x="3840480" y="3840480"/>
-            <a:ext cx="7498079" cy="320040"/>
+            <a:off x="3291840" y="4251960"/>
+            <a:ext cx="8046720" cy="320040"/>
           </a:xfrm>
           <a:prstGeom prst="rect">
             <a:avLst/>
@@ -6979,13 +8355,13 @@
               </a:lnSpc>
             </a:pPr>
             <a:r>
-              <a:rPr sz="1200" b="0">
+              <a:rPr sz="1250" b="0">
                 <a:solidFill>
                   <a:srgbClr val="0A0A0C"/>
                 </a:solidFill>
                 <a:latin typeface="Satoshi"/>
               </a:rPr>
-              <a:t>[Grid-tied / grid-stabilising · protection &amp; synchronisation per utility]</a:t>
+              <a:t>[Utility grid — utility tariff / outage profile / genset backup]</a:t>
             </a:r>
           </a:p>
         </p:txBody>
@@ -6998,7 +8374,7 @@
         </p:nvSpPr>
         <p:spPr>
           <a:xfrm>
-            <a:off x="822960" y="4215384"/>
+            <a:off x="822960" y="4681728"/>
             <a:ext cx="10543032" cy="9525"/>
           </a:xfrm>
           <a:prstGeom prst="rect">
@@ -7042,8 +8418,8 @@
         </p:nvSpPr>
         <p:spPr>
           <a:xfrm>
-            <a:off x="822960" y="4343400"/>
-            <a:ext cx="2834640" cy="274320"/>
+            <a:off x="822960" y="4846320"/>
+            <a:ext cx="2377440" cy="274320"/>
           </a:xfrm>
           <a:prstGeom prst="rect">
             <a:avLst/>
@@ -7062,13 +8438,13 @@
               </a:lnSpc>
             </a:pPr>
             <a:r>
-              <a:rPr sz="1000" b="1" spc="200">
+              <a:rPr sz="1000" b="1" spc="220">
                 <a:solidFill>
                   <a:srgbClr val="D97725"/>
                 </a:solidFill>
                 <a:latin typeface="JetBrains Mono"/>
               </a:rPr>
-              <a:t>MOUNTING</a:t>
+              <a:t>CONSTRAINTS</a:t>
             </a:r>
           </a:p>
         </p:txBody>
@@ -7081,8 +8457,8 @@
         </p:nvSpPr>
         <p:spPr>
           <a:xfrm>
-            <a:off x="3840480" y="4315968"/>
-            <a:ext cx="7498079" cy="320040"/>
+            <a:off x="3291840" y="4818888"/>
+            <a:ext cx="8046720" cy="320040"/>
           </a:xfrm>
           <a:prstGeom prst="rect">
             <a:avLst/>
@@ -7101,13 +8477,13 @@
               </a:lnSpc>
             </a:pPr>
             <a:r>
-              <a:rPr sz="1200" b="0">
+              <a:rPr sz="1250" b="0">
                 <a:solidFill>
                   <a:srgbClr val="0A0A0C"/>
                 </a:solidFill>
                 <a:latin typeface="Satoshi"/>
               </a:rPr>
-              <a:t>[Roof / ground-mounted · hot-dip galvanised structure]</a:t>
+              <a:t>[Roof or land availability · outage windows · interconnection limits]</a:t>
             </a:r>
           </a:p>
         </p:txBody>
@@ -7120,7 +8496,7 @@
         </p:nvSpPr>
         <p:spPr>
           <a:xfrm>
-            <a:off x="822960" y="4690872"/>
+            <a:off x="822960" y="5248656"/>
             <a:ext cx="10543032" cy="9525"/>
           </a:xfrm>
           <a:prstGeom prst="rect">
@@ -7164,33 +8540,33 @@
         </p:nvSpPr>
         <p:spPr>
           <a:xfrm>
-            <a:off x="822960" y="4818888"/>
-            <a:ext cx="2834640" cy="274320"/>
-          </a:xfrm>
-          <a:prstGeom prst="rect">
-            <a:avLst/>
-          </a:prstGeom>
-          <a:noFill/>
-        </p:spPr>
-        <p:txBody>
-          <a:bodyPr wrap="square" anchor="t" lIns="0" rIns="0" tIns="0" bIns="0">
-            <a:spAutoFit/>
-          </a:bodyPr>
-          <a:lstStyle/>
-          <a:p>
-            <a:pPr algn="l">
-              <a:lnSpc>
-                <a:spcPct val="100000"/>
-              </a:lnSpc>
-            </a:pPr>
-            <a:r>
-              <a:rPr sz="1000" b="1" spc="200">
-                <a:solidFill>
-                  <a:srgbClr val="D97725"/>
-                </a:solidFill>
-                <a:latin typeface="JetBrains Mono"/>
-              </a:rPr>
-              <a:t>MONITORING</a:t>
+            <a:off x="822960" y="5715000"/>
+            <a:ext cx="10515600" cy="914400"/>
+          </a:xfrm>
+          <a:prstGeom prst="rect">
+            <a:avLst/>
+          </a:prstGeom>
+          <a:noFill/>
+        </p:spPr>
+        <p:txBody>
+          <a:bodyPr wrap="square" anchor="t" lIns="0" rIns="0" tIns="0" bIns="0">
+            <a:spAutoFit/>
+          </a:bodyPr>
+          <a:lstStyle/>
+          <a:p>
+            <a:pPr algn="l">
+              <a:lnSpc>
+                <a:spcPct val="125000"/>
+              </a:lnSpc>
+            </a:pPr>
+            <a:r>
+              <a:rPr sz="1100" b="0">
+                <a:solidFill>
+                  <a:srgbClr val="737371"/>
+                </a:solidFill>
+                <a:latin typeface="Satoshi"/>
+              </a:rPr>
+              <a:t>Source: [site visit dated ___ / client data pack / utility bills for ___ months]. Any assumption stated here is confirmed during detailed design and does not alter the fixed price unless the physical scope changes.</a:t>
             </a:r>
           </a:p>
         </p:txBody>
@@ -7198,250 +8574,6 @@
       <p:sp>
         <p:nvSpPr>
           <p:cNvPr id="24" name="TextBox 23"/>
-          <p:cNvSpPr txBox="1"/>
-          <p:nvPr/>
-        </p:nvSpPr>
-        <p:spPr>
-          <a:xfrm>
-            <a:off x="3840480" y="4791456"/>
-            <a:ext cx="7498079" cy="320040"/>
-          </a:xfrm>
-          <a:prstGeom prst="rect">
-            <a:avLst/>
-          </a:prstGeom>
-          <a:noFill/>
-        </p:spPr>
-        <p:txBody>
-          <a:bodyPr wrap="square" anchor="t" lIns="0" rIns="0" tIns="0" bIns="0">
-            <a:spAutoFit/>
-          </a:bodyPr>
-          <a:lstStyle/>
-          <a:p>
-            <a:pPr algn="l">
-              <a:lnSpc>
-                <a:spcPct val="100000"/>
-              </a:lnSpc>
-            </a:pPr>
-            <a:r>
-              <a:rPr sz="1200" b="0">
-                <a:solidFill>
-                  <a:srgbClr val="0A0A0C"/>
-                </a:solidFill>
-                <a:latin typeface="Satoshi"/>
-              </a:rPr>
-              <a:t>[String-level monitoring · remote portal · generation meter]</a:t>
-            </a:r>
-          </a:p>
-        </p:txBody>
-      </p:sp>
-      <p:sp>
-        <p:nvSpPr>
-          <p:cNvPr id="25" name="Rectangle 24"/>
-          <p:cNvSpPr/>
-          <p:nvPr/>
-        </p:nvSpPr>
-        <p:spPr>
-          <a:xfrm>
-            <a:off x="822960" y="5166360"/>
-            <a:ext cx="10543032" cy="9525"/>
-          </a:xfrm>
-          <a:prstGeom prst="rect">
-            <a:avLst/>
-          </a:prstGeom>
-          <a:solidFill>
-            <a:srgbClr val="E3E3E0"/>
-          </a:solidFill>
-          <a:ln>
-            <a:noFill/>
-          </a:ln>
-          <a:effectLst/>
-        </p:spPr>
-        <p:style>
-          <a:lnRef idx="1">
-            <a:schemeClr val="accent1"/>
-          </a:lnRef>
-          <a:fillRef idx="3">
-            <a:schemeClr val="accent1"/>
-          </a:fillRef>
-          <a:effectRef idx="2">
-            <a:schemeClr val="accent1"/>
-          </a:effectRef>
-          <a:fontRef idx="minor">
-            <a:schemeClr val="lt1"/>
-          </a:fontRef>
-        </p:style>
-        <p:txBody>
-          <a:bodyPr rtlCol="0" anchor="ctr"/>
-          <a:lstStyle/>
-          <a:p>
-            <a:pPr algn="ctr"/>
-          </a:p>
-        </p:txBody>
-      </p:sp>
-      <p:sp>
-        <p:nvSpPr>
-          <p:cNvPr id="26" name="TextBox 25"/>
-          <p:cNvSpPr txBox="1"/>
-          <p:nvPr/>
-        </p:nvSpPr>
-        <p:spPr>
-          <a:xfrm>
-            <a:off x="822960" y="5294376"/>
-            <a:ext cx="2834640" cy="274320"/>
-          </a:xfrm>
-          <a:prstGeom prst="rect">
-            <a:avLst/>
-          </a:prstGeom>
-          <a:noFill/>
-        </p:spPr>
-        <p:txBody>
-          <a:bodyPr wrap="square" anchor="t" lIns="0" rIns="0" tIns="0" bIns="0">
-            <a:spAutoFit/>
-          </a:bodyPr>
-          <a:lstStyle/>
-          <a:p>
-            <a:pPr algn="l">
-              <a:lnSpc>
-                <a:spcPct val="100000"/>
-              </a:lnSpc>
-            </a:pPr>
-            <a:r>
-              <a:rPr sz="1000" b="1" spc="200">
-                <a:solidFill>
-                  <a:srgbClr val="D97725"/>
-                </a:solidFill>
-                <a:latin typeface="JetBrains Mono"/>
-              </a:rPr>
-              <a:t>EST. YIELD</a:t>
-            </a:r>
-          </a:p>
-        </p:txBody>
-      </p:sp>
-      <p:sp>
-        <p:nvSpPr>
-          <p:cNvPr id="27" name="TextBox 26"/>
-          <p:cNvSpPr txBox="1"/>
-          <p:nvPr/>
-        </p:nvSpPr>
-        <p:spPr>
-          <a:xfrm>
-            <a:off x="3840480" y="5266944"/>
-            <a:ext cx="7498079" cy="320040"/>
-          </a:xfrm>
-          <a:prstGeom prst="rect">
-            <a:avLst/>
-          </a:prstGeom>
-          <a:noFill/>
-        </p:spPr>
-        <p:txBody>
-          <a:bodyPr wrap="square" anchor="t" lIns="0" rIns="0" tIns="0" bIns="0">
-            <a:spAutoFit/>
-          </a:bodyPr>
-          <a:lstStyle/>
-          <a:p>
-            <a:pPr algn="l">
-              <a:lnSpc>
-                <a:spcPct val="100000"/>
-              </a:lnSpc>
-            </a:pPr>
-            <a:r>
-              <a:rPr sz="1200" b="0">
-                <a:solidFill>
-                  <a:srgbClr val="0A0A0C"/>
-                </a:solidFill>
-                <a:latin typeface="Satoshi"/>
-              </a:rPr>
-              <a:t>[X,XXX MWh in year one · PR ≥ XX%]</a:t>
-            </a:r>
-          </a:p>
-        </p:txBody>
-      </p:sp>
-      <p:sp>
-        <p:nvSpPr>
-          <p:cNvPr id="28" name="Rectangle 27"/>
-          <p:cNvSpPr/>
-          <p:nvPr/>
-        </p:nvSpPr>
-        <p:spPr>
-          <a:xfrm>
-            <a:off x="822960" y="5641848"/>
-            <a:ext cx="10543032" cy="9525"/>
-          </a:xfrm>
-          <a:prstGeom prst="rect">
-            <a:avLst/>
-          </a:prstGeom>
-          <a:solidFill>
-            <a:srgbClr val="E3E3E0"/>
-          </a:solidFill>
-          <a:ln>
-            <a:noFill/>
-          </a:ln>
-          <a:effectLst/>
-        </p:spPr>
-        <p:style>
-          <a:lnRef idx="1">
-            <a:schemeClr val="accent1"/>
-          </a:lnRef>
-          <a:fillRef idx="3">
-            <a:schemeClr val="accent1"/>
-          </a:fillRef>
-          <a:effectRef idx="2">
-            <a:schemeClr val="accent1"/>
-          </a:effectRef>
-          <a:fontRef idx="minor">
-            <a:schemeClr val="lt1"/>
-          </a:fontRef>
-        </p:style>
-        <p:txBody>
-          <a:bodyPr rtlCol="0" anchor="ctr"/>
-          <a:lstStyle/>
-          <a:p>
-            <a:pPr algn="ctr"/>
-          </a:p>
-        </p:txBody>
-      </p:sp>
-      <p:sp>
-        <p:nvSpPr>
-          <p:cNvPr id="29" name="TextBox 28"/>
-          <p:cNvSpPr txBox="1"/>
-          <p:nvPr/>
-        </p:nvSpPr>
-        <p:spPr>
-          <a:xfrm>
-            <a:off x="822960" y="5897880"/>
-            <a:ext cx="10515600" cy="914400"/>
-          </a:xfrm>
-          <a:prstGeom prst="rect">
-            <a:avLst/>
-          </a:prstGeom>
-          <a:noFill/>
-        </p:spPr>
-        <p:txBody>
-          <a:bodyPr wrap="square" anchor="t" lIns="0" rIns="0" tIns="0" bIns="0">
-            <a:spAutoFit/>
-          </a:bodyPr>
-          <a:lstStyle/>
-          <a:p>
-            <a:pPr algn="l">
-              <a:lnSpc>
-                <a:spcPct val="125000"/>
-              </a:lnSpc>
-            </a:pPr>
-            <a:r>
-              <a:rPr sz="1100" b="0">
-                <a:solidFill>
-                  <a:srgbClr val="737371"/>
-                </a:solidFill>
-                <a:latin typeface="Satoshi"/>
-              </a:rPr>
-              <a:t>Engineering basis: PVsyst simulation, utility interconnection study and structural verification precede construction. All equipment is Tier-1 with manufacturer warranties registered to the client.</a:t>
-            </a:r>
-          </a:p>
-        </p:txBody>
-      </p:sp>
-      <p:sp>
-        <p:nvSpPr>
-          <p:cNvPr id="30" name="TextBox 29"/>
           <p:cNvSpPr txBox="1"/>
           <p:nvPr/>
         </p:nvSpPr>
@@ -7480,7 +8612,7 @@
       </p:sp>
       <p:sp>
         <p:nvSpPr>
-          <p:cNvPr id="31" name="TextBox 30"/>
+          <p:cNvPr id="25" name="TextBox 24"/>
           <p:cNvSpPr txBox="1"/>
           <p:nvPr/>
         </p:nvSpPr>
@@ -7613,7 +8745,7 @@
                 </a:solidFill>
                 <a:latin typeface="JetBrains Mono"/>
               </a:rPr>
-              <a:t>04 — SCOPE OF WORK</a:t>
+              <a:t>04 — TECHNICAL OFFER</a:t>
             </a:r>
           </a:p>
         </p:txBody>
@@ -7652,7 +8784,7 @@
                 </a:solidFill>
                 <a:latin typeface="Cabinet Grotesk"/>
               </a:rPr>
-              <a:t>ONE CONTRACT. FULL ACCOUNTABILITY.</a:t>
+              <a:t>PROPOSED SYSTEM.</a:t>
             </a:r>
           </a:p>
         </p:txBody>
@@ -7665,8 +8797,8 @@
         </p:nvSpPr>
         <p:spPr>
           <a:xfrm>
-            <a:off x="822960" y="2057400"/>
-            <a:ext cx="457200" cy="365760"/>
+            <a:off x="822960" y="1965960"/>
+            <a:ext cx="2834640" cy="274320"/>
           </a:xfrm>
           <a:prstGeom prst="rect">
             <a:avLst/>
@@ -7685,13 +8817,13 @@
               </a:lnSpc>
             </a:pPr>
             <a:r>
-              <a:rPr sz="1400" b="1" spc="100">
+              <a:rPr sz="1000" b="1" spc="200">
                 <a:solidFill>
                   <a:srgbClr val="D97725"/>
                 </a:solidFill>
                 <a:latin typeface="JetBrains Mono"/>
               </a:rPr>
-              <a:t>A</a:t>
+              <a:t>SYSTEM SIZE</a:t>
             </a:r>
           </a:p>
         </p:txBody>
@@ -7704,8 +8836,8 @@
         </p:nvSpPr>
         <p:spPr>
           <a:xfrm>
-            <a:off x="1417320" y="2075688"/>
-            <a:ext cx="3291840" cy="457200"/>
+            <a:off x="3840480" y="1938528"/>
+            <a:ext cx="7498079" cy="320040"/>
           </a:xfrm>
           <a:prstGeom prst="rect">
             <a:avLst/>
@@ -7724,65 +8856,26 @@
               </a:lnSpc>
             </a:pPr>
             <a:r>
-              <a:rPr sz="1450" b="1" spc="40">
+              <a:rPr sz="1200" b="0">
                 <a:solidFill>
                   <a:srgbClr val="0A0A0C"/>
                 </a:solidFill>
-                <a:latin typeface="Cabinet Grotesk"/>
-              </a:rPr>
-              <a:t>ENGINEERING &amp; DESIGN</a:t>
-            </a:r>
-          </a:p>
-        </p:txBody>
-      </p:sp>
-      <p:sp>
-        <p:nvSpPr>
-          <p:cNvPr id="7" name="TextBox 6"/>
-          <p:cNvSpPr txBox="1"/>
-          <p:nvPr/>
-        </p:nvSpPr>
-        <p:spPr>
-          <a:xfrm>
-            <a:off x="4892040" y="2075688"/>
-            <a:ext cx="6492240" cy="640080"/>
-          </a:xfrm>
-          <a:prstGeom prst="rect">
-            <a:avLst/>
-          </a:prstGeom>
-          <a:noFill/>
-        </p:spPr>
-        <p:txBody>
-          <a:bodyPr wrap="square" anchor="t" lIns="0" rIns="0" tIns="0" bIns="0">
-            <a:spAutoFit/>
-          </a:bodyPr>
-          <a:lstStyle/>
-          <a:p>
-            <a:pPr algn="l">
-              <a:lnSpc>
-                <a:spcPct val="120000"/>
-              </a:lnSpc>
-            </a:pPr>
-            <a:r>
-              <a:rPr sz="1100" b="0">
-                <a:solidFill>
-                  <a:srgbClr val="737371"/>
-                </a:solidFill>
                 <a:latin typeface="Satoshi"/>
               </a:rPr>
-              <a:t>Site survey &amp; yield assessment · PVsyst design · single-line diagrams · structural checks · utility application</a:t>
-            </a:r>
-          </a:p>
-        </p:txBody>
-      </p:sp>
-      <p:sp>
-        <p:nvSpPr>
-          <p:cNvPr id="8" name="Rectangle 7"/>
+              <a:t>[XXX] kWp DC / [XXX] kW AC</a:t>
+            </a:r>
+          </a:p>
+        </p:txBody>
+      </p:sp>
+      <p:sp>
+        <p:nvSpPr>
+          <p:cNvPr id="7" name="Rectangle 6"/>
           <p:cNvSpPr/>
           <p:nvPr/>
         </p:nvSpPr>
         <p:spPr>
           <a:xfrm>
-            <a:off x="822960" y="2724912"/>
+            <a:off x="822960" y="2313432"/>
             <a:ext cx="10543032" cy="9525"/>
           </a:xfrm>
           <a:prstGeom prst="rect">
@@ -7820,14 +8913,53 @@
       </p:sp>
       <p:sp>
         <p:nvSpPr>
+          <p:cNvPr id="8" name="TextBox 7"/>
+          <p:cNvSpPr txBox="1"/>
+          <p:nvPr/>
+        </p:nvSpPr>
+        <p:spPr>
+          <a:xfrm>
+            <a:off x="822960" y="2441448"/>
+            <a:ext cx="2834640" cy="274320"/>
+          </a:xfrm>
+          <a:prstGeom prst="rect">
+            <a:avLst/>
+          </a:prstGeom>
+          <a:noFill/>
+        </p:spPr>
+        <p:txBody>
+          <a:bodyPr wrap="square" anchor="t" lIns="0" rIns="0" tIns="0" bIns="0">
+            <a:spAutoFit/>
+          </a:bodyPr>
+          <a:lstStyle/>
+          <a:p>
+            <a:pPr algn="l">
+              <a:lnSpc>
+                <a:spcPct val="100000"/>
+              </a:lnSpc>
+            </a:pPr>
+            <a:r>
+              <a:rPr sz="1000" b="1" spc="200">
+                <a:solidFill>
+                  <a:srgbClr val="D97725"/>
+                </a:solidFill>
+                <a:latin typeface="JetBrains Mono"/>
+              </a:rPr>
+              <a:t>PV MODULES</a:t>
+            </a:r>
+          </a:p>
+        </p:txBody>
+      </p:sp>
+      <p:sp>
+        <p:nvSpPr>
           <p:cNvPr id="9" name="TextBox 8"/>
           <p:cNvSpPr txBox="1"/>
           <p:nvPr/>
         </p:nvSpPr>
         <p:spPr>
           <a:xfrm>
-            <a:off x="822960" y="2926080"/>
-            <a:ext cx="457200" cy="365760"/>
+            <a:off x="3840480" y="2414016"/>
+            <a:ext cx="7498079" cy="320040"/>
           </a:xfrm>
           <a:prstGeom prst="rect">
             <a:avLst/>
@@ -7846,104 +8978,26 @@
               </a:lnSpc>
             </a:pPr>
             <a:r>
-              <a:rPr sz="1400" b="1" spc="100">
-                <a:solidFill>
-                  <a:srgbClr val="D97725"/>
-                </a:solidFill>
-                <a:latin typeface="JetBrains Mono"/>
-              </a:rPr>
-              <a:t>B</a:t>
-            </a:r>
-          </a:p>
-        </p:txBody>
-      </p:sp>
-      <p:sp>
-        <p:nvSpPr>
-          <p:cNvPr id="10" name="TextBox 9"/>
-          <p:cNvSpPr txBox="1"/>
-          <p:nvPr/>
-        </p:nvSpPr>
-        <p:spPr>
-          <a:xfrm>
-            <a:off x="1417320" y="2944368"/>
-            <a:ext cx="3291840" cy="457200"/>
-          </a:xfrm>
-          <a:prstGeom prst="rect">
-            <a:avLst/>
-          </a:prstGeom>
-          <a:noFill/>
-        </p:spPr>
-        <p:txBody>
-          <a:bodyPr wrap="square" anchor="t" lIns="0" rIns="0" tIns="0" bIns="0">
-            <a:spAutoFit/>
-          </a:bodyPr>
-          <a:lstStyle/>
-          <a:p>
-            <a:pPr algn="l">
-              <a:lnSpc>
-                <a:spcPct val="100000"/>
-              </a:lnSpc>
-            </a:pPr>
-            <a:r>
-              <a:rPr sz="1450" b="1" spc="40">
+              <a:rPr sz="1200" b="0">
                 <a:solidFill>
                   <a:srgbClr val="0A0A0C"/>
                 </a:solidFill>
-                <a:latin typeface="Cabinet Grotesk"/>
-              </a:rPr>
-              <a:t>PROCUREMENT</a:t>
-            </a:r>
-          </a:p>
-        </p:txBody>
-      </p:sp>
-      <p:sp>
-        <p:nvSpPr>
-          <p:cNvPr id="11" name="TextBox 10"/>
-          <p:cNvSpPr txBox="1"/>
-          <p:nvPr/>
-        </p:nvSpPr>
-        <p:spPr>
-          <a:xfrm>
-            <a:off x="4892040" y="2944368"/>
-            <a:ext cx="6492240" cy="640080"/>
-          </a:xfrm>
-          <a:prstGeom prst="rect">
-            <a:avLst/>
-          </a:prstGeom>
-          <a:noFill/>
-        </p:spPr>
-        <p:txBody>
-          <a:bodyPr wrap="square" anchor="t" lIns="0" rIns="0" tIns="0" bIns="0">
-            <a:spAutoFit/>
-          </a:bodyPr>
-          <a:lstStyle/>
-          <a:p>
-            <a:pPr algn="l">
-              <a:lnSpc>
-                <a:spcPct val="120000"/>
-              </a:lnSpc>
-            </a:pPr>
-            <a:r>
-              <a:rPr sz="1100" b="0">
-                <a:solidFill>
-                  <a:srgbClr val="737371"/>
-                </a:solidFill>
                 <a:latin typeface="Satoshi"/>
               </a:rPr>
-              <a:t>Tier-1 equipment sourcing · factory inspections · logistics &amp; customs · materials received &amp; stored to spec</a:t>
-            </a:r>
-          </a:p>
-        </p:txBody>
-      </p:sp>
-      <p:sp>
-        <p:nvSpPr>
-          <p:cNvPr id="12" name="Rectangle 11"/>
+              <a:t>[N × XXX Wp Tier-1 mono / n-type · make per final BOQ]</a:t>
+            </a:r>
+          </a:p>
+        </p:txBody>
+      </p:sp>
+      <p:sp>
+        <p:nvSpPr>
+          <p:cNvPr id="10" name="Rectangle 9"/>
           <p:cNvSpPr/>
           <p:nvPr/>
         </p:nvSpPr>
         <p:spPr>
           <a:xfrm>
-            <a:off x="822960" y="3593592"/>
+            <a:off x="822960" y="2788920"/>
             <a:ext cx="10543032" cy="9525"/>
           </a:xfrm>
           <a:prstGeom prst="rect">
@@ -7981,14 +9035,14 @@
       </p:sp>
       <p:sp>
         <p:nvSpPr>
-          <p:cNvPr id="13" name="TextBox 12"/>
-          <p:cNvSpPr txBox="1"/>
-          <p:nvPr/>
-        </p:nvSpPr>
-        <p:spPr>
-          <a:xfrm>
-            <a:off x="822960" y="3794760"/>
-            <a:ext cx="457200" cy="365760"/>
+          <p:cNvPr id="11" name="TextBox 10"/>
+          <p:cNvSpPr txBox="1"/>
+          <p:nvPr/>
+        </p:nvSpPr>
+        <p:spPr>
+          <a:xfrm>
+            <a:off x="822960" y="2916936"/>
+            <a:ext cx="2834640" cy="274320"/>
           </a:xfrm>
           <a:prstGeom prst="rect">
             <a:avLst/>
@@ -8007,27 +9061,27 @@
               </a:lnSpc>
             </a:pPr>
             <a:r>
-              <a:rPr sz="1400" b="1" spc="100">
+              <a:rPr sz="1000" b="1" spc="200">
                 <a:solidFill>
                   <a:srgbClr val="D97725"/>
                 </a:solidFill>
                 <a:latin typeface="JetBrains Mono"/>
               </a:rPr>
-              <a:t>C</a:t>
-            </a:r>
-          </a:p>
-        </p:txBody>
-      </p:sp>
-      <p:sp>
-        <p:nvSpPr>
-          <p:cNvPr id="14" name="TextBox 13"/>
-          <p:cNvSpPr txBox="1"/>
-          <p:nvPr/>
-        </p:nvSpPr>
-        <p:spPr>
-          <a:xfrm>
-            <a:off x="1417320" y="3813048"/>
-            <a:ext cx="3291840" cy="457200"/>
+              <a:t>INVERTERS</a:t>
+            </a:r>
+          </a:p>
+        </p:txBody>
+      </p:sp>
+      <p:sp>
+        <p:nvSpPr>
+          <p:cNvPr id="12" name="TextBox 11"/>
+          <p:cNvSpPr txBox="1"/>
+          <p:nvPr/>
+        </p:nvSpPr>
+        <p:spPr>
+          <a:xfrm>
+            <a:off x="3840480" y="2889504"/>
+            <a:ext cx="7498079" cy="320040"/>
           </a:xfrm>
           <a:prstGeom prst="rect">
             <a:avLst/>
@@ -8046,65 +9100,26 @@
               </a:lnSpc>
             </a:pPr>
             <a:r>
-              <a:rPr sz="1450" b="1" spc="40">
+              <a:rPr sz="1200" b="0">
                 <a:solidFill>
                   <a:srgbClr val="0A0A0C"/>
                 </a:solidFill>
-                <a:latin typeface="Cabinet Grotesk"/>
-              </a:rPr>
-              <a:t>CONSTRUCTION</a:t>
-            </a:r>
-          </a:p>
-        </p:txBody>
-      </p:sp>
-      <p:sp>
-        <p:nvSpPr>
-          <p:cNvPr id="15" name="TextBox 14"/>
-          <p:cNvSpPr txBox="1"/>
-          <p:nvPr/>
-        </p:nvSpPr>
-        <p:spPr>
-          <a:xfrm>
-            <a:off x="4892040" y="3813048"/>
-            <a:ext cx="6492240" cy="640080"/>
-          </a:xfrm>
-          <a:prstGeom prst="rect">
-            <a:avLst/>
-          </a:prstGeom>
-          <a:noFill/>
-        </p:spPr>
-        <p:txBody>
-          <a:bodyPr wrap="square" anchor="t" lIns="0" rIns="0" tIns="0" bIns="0">
-            <a:spAutoFit/>
-          </a:bodyPr>
-          <a:lstStyle/>
-          <a:p>
-            <a:pPr algn="l">
-              <a:lnSpc>
-                <a:spcPct val="120000"/>
-              </a:lnSpc>
-            </a:pPr>
-            <a:r>
-              <a:rPr sz="1100" b="0">
-                <a:solidFill>
-                  <a:srgbClr val="737371"/>
-                </a:solidFill>
                 <a:latin typeface="Satoshi"/>
               </a:rPr>
-              <a:t>Civil &amp; structural works · mechanical &amp; electrical installation · grid interconnection · HSE-managed site</a:t>
-            </a:r>
-          </a:p>
-        </p:txBody>
-      </p:sp>
-      <p:sp>
-        <p:nvSpPr>
-          <p:cNvPr id="16" name="Rectangle 15"/>
+              <a:t>[N × XXX kW string inverters · make per final BOQ]</a:t>
+            </a:r>
+          </a:p>
+        </p:txBody>
+      </p:sp>
+      <p:sp>
+        <p:nvSpPr>
+          <p:cNvPr id="13" name="Rectangle 12"/>
           <p:cNvSpPr/>
           <p:nvPr/>
         </p:nvSpPr>
         <p:spPr>
           <a:xfrm>
-            <a:off x="822960" y="4462272"/>
+            <a:off x="822960" y="3264408"/>
             <a:ext cx="10543032" cy="9525"/>
           </a:xfrm>
           <a:prstGeom prst="rect">
@@ -8142,14 +9157,14 @@
       </p:sp>
       <p:sp>
         <p:nvSpPr>
-          <p:cNvPr id="17" name="TextBox 16"/>
-          <p:cNvSpPr txBox="1"/>
-          <p:nvPr/>
-        </p:nvSpPr>
-        <p:spPr>
-          <a:xfrm>
-            <a:off x="822960" y="4663440"/>
-            <a:ext cx="457200" cy="365760"/>
+          <p:cNvPr id="14" name="TextBox 13"/>
+          <p:cNvSpPr txBox="1"/>
+          <p:nvPr/>
+        </p:nvSpPr>
+        <p:spPr>
+          <a:xfrm>
+            <a:off x="822960" y="3392424"/>
+            <a:ext cx="2834640" cy="274320"/>
           </a:xfrm>
           <a:prstGeom prst="rect">
             <a:avLst/>
@@ -8168,27 +9183,27 @@
               </a:lnSpc>
             </a:pPr>
             <a:r>
-              <a:rPr sz="1400" b="1" spc="100">
+              <a:rPr sz="1000" b="1" spc="200">
                 <a:solidFill>
                   <a:srgbClr val="D97725"/>
                 </a:solidFill>
                 <a:latin typeface="JetBrains Mono"/>
               </a:rPr>
-              <a:t>D</a:t>
-            </a:r>
-          </a:p>
-        </p:txBody>
-      </p:sp>
-      <p:sp>
-        <p:nvSpPr>
-          <p:cNvPr id="18" name="TextBox 17"/>
-          <p:cNvSpPr txBox="1"/>
-          <p:nvPr/>
-        </p:nvSpPr>
-        <p:spPr>
-          <a:xfrm>
-            <a:off x="1417320" y="4681728"/>
-            <a:ext cx="3291840" cy="457200"/>
+              <a:t>STORAGE (OPTION)</a:t>
+            </a:r>
+          </a:p>
+        </p:txBody>
+      </p:sp>
+      <p:sp>
+        <p:nvSpPr>
+          <p:cNvPr id="15" name="TextBox 14"/>
+          <p:cNvSpPr txBox="1"/>
+          <p:nvPr/>
+        </p:nvSpPr>
+        <p:spPr>
+          <a:xfrm>
+            <a:off x="3840480" y="3364992"/>
+            <a:ext cx="7498079" cy="320040"/>
           </a:xfrm>
           <a:prstGeom prst="rect">
             <a:avLst/>
@@ -8207,65 +9222,26 @@
               </a:lnSpc>
             </a:pPr>
             <a:r>
-              <a:rPr sz="1450" b="1" spc="40">
+              <a:rPr sz="1200" b="0">
                 <a:solidFill>
                   <a:srgbClr val="0A0A0C"/>
                 </a:solidFill>
-                <a:latin typeface="Cabinet Grotesk"/>
-              </a:rPr>
-              <a:t>COMMISSIONING &amp; HANDOVER</a:t>
-            </a:r>
-          </a:p>
-        </p:txBody>
-      </p:sp>
-      <p:sp>
-        <p:nvSpPr>
-          <p:cNvPr id="19" name="TextBox 18"/>
-          <p:cNvSpPr txBox="1"/>
-          <p:nvPr/>
-        </p:nvSpPr>
-        <p:spPr>
-          <a:xfrm>
-            <a:off x="4892040" y="4681728"/>
-            <a:ext cx="6492240" cy="640080"/>
-          </a:xfrm>
-          <a:prstGeom prst="rect">
-            <a:avLst/>
-          </a:prstGeom>
-          <a:noFill/>
-        </p:spPr>
-        <p:txBody>
-          <a:bodyPr wrap="square" anchor="t" lIns="0" rIns="0" tIns="0" bIns="0">
-            <a:spAutoFit/>
-          </a:bodyPr>
-          <a:lstStyle/>
-          <a:p>
-            <a:pPr algn="l">
-              <a:lnSpc>
-                <a:spcPct val="120000"/>
-              </a:lnSpc>
-            </a:pPr>
-            <a:r>
-              <a:rPr sz="1100" b="0">
-                <a:solidFill>
-                  <a:srgbClr val="737371"/>
-                </a:solidFill>
                 <a:latin typeface="Satoshi"/>
               </a:rPr>
-              <a:t>Testing &amp; commissioning · acceptance tests with client · as-built dossier · operator training · O&amp;M handover</a:t>
-            </a:r>
-          </a:p>
-        </p:txBody>
-      </p:sp>
-      <p:sp>
-        <p:nvSpPr>
-          <p:cNvPr id="20" name="Rectangle 19"/>
+              <a:t>[XXX kWh LFP BESS · hybrid inverter / PCS]</a:t>
+            </a:r>
+          </a:p>
+        </p:txBody>
+      </p:sp>
+      <p:sp>
+        <p:nvSpPr>
+          <p:cNvPr id="16" name="Rectangle 15"/>
           <p:cNvSpPr/>
           <p:nvPr/>
         </p:nvSpPr>
         <p:spPr>
           <a:xfrm>
-            <a:off x="822960" y="5330952"/>
+            <a:off x="822960" y="3739896"/>
             <a:ext cx="10543032" cy="9525"/>
           </a:xfrm>
           <a:prstGeom prst="rect">
@@ -8303,13 +9279,501 @@
       </p:sp>
       <p:sp>
         <p:nvSpPr>
+          <p:cNvPr id="17" name="TextBox 16"/>
+          <p:cNvSpPr txBox="1"/>
+          <p:nvPr/>
+        </p:nvSpPr>
+        <p:spPr>
+          <a:xfrm>
+            <a:off x="822960" y="3867912"/>
+            <a:ext cx="2834640" cy="274320"/>
+          </a:xfrm>
+          <a:prstGeom prst="rect">
+            <a:avLst/>
+          </a:prstGeom>
+          <a:noFill/>
+        </p:spPr>
+        <p:txBody>
+          <a:bodyPr wrap="square" anchor="t" lIns="0" rIns="0" tIns="0" bIns="0">
+            <a:spAutoFit/>
+          </a:bodyPr>
+          <a:lstStyle/>
+          <a:p>
+            <a:pPr algn="l">
+              <a:lnSpc>
+                <a:spcPct val="100000"/>
+              </a:lnSpc>
+            </a:pPr>
+            <a:r>
+              <a:rPr sz="1000" b="1" spc="200">
+                <a:solidFill>
+                  <a:srgbClr val="D97725"/>
+                </a:solidFill>
+                <a:latin typeface="JetBrains Mono"/>
+              </a:rPr>
+              <a:t>GRID INTERFACE</a:t>
+            </a:r>
+          </a:p>
+        </p:txBody>
+      </p:sp>
+      <p:sp>
+        <p:nvSpPr>
+          <p:cNvPr id="18" name="TextBox 17"/>
+          <p:cNvSpPr txBox="1"/>
+          <p:nvPr/>
+        </p:nvSpPr>
+        <p:spPr>
+          <a:xfrm>
+            <a:off x="3840480" y="3840480"/>
+            <a:ext cx="7498079" cy="320040"/>
+          </a:xfrm>
+          <a:prstGeom prst="rect">
+            <a:avLst/>
+          </a:prstGeom>
+          <a:noFill/>
+        </p:spPr>
+        <p:txBody>
+          <a:bodyPr wrap="square" anchor="t" lIns="0" rIns="0" tIns="0" bIns="0">
+            <a:spAutoFit/>
+          </a:bodyPr>
+          <a:lstStyle/>
+          <a:p>
+            <a:pPr algn="l">
+              <a:lnSpc>
+                <a:spcPct val="100000"/>
+              </a:lnSpc>
+            </a:pPr>
+            <a:r>
+              <a:rPr sz="1200" b="0">
+                <a:solidFill>
+                  <a:srgbClr val="0A0A0C"/>
+                </a:solidFill>
+                <a:latin typeface="Satoshi"/>
+              </a:rPr>
+              <a:t>[Grid-tied / grid-stabilising · protection &amp; synchronisation per utility]</a:t>
+            </a:r>
+          </a:p>
+        </p:txBody>
+      </p:sp>
+      <p:sp>
+        <p:nvSpPr>
+          <p:cNvPr id="19" name="Rectangle 18"/>
+          <p:cNvSpPr/>
+          <p:nvPr/>
+        </p:nvSpPr>
+        <p:spPr>
+          <a:xfrm>
+            <a:off x="822960" y="4215384"/>
+            <a:ext cx="10543032" cy="9525"/>
+          </a:xfrm>
+          <a:prstGeom prst="rect">
+            <a:avLst/>
+          </a:prstGeom>
+          <a:solidFill>
+            <a:srgbClr val="E3E3E0"/>
+          </a:solidFill>
+          <a:ln>
+            <a:noFill/>
+          </a:ln>
+          <a:effectLst/>
+        </p:spPr>
+        <p:style>
+          <a:lnRef idx="1">
+            <a:schemeClr val="accent1"/>
+          </a:lnRef>
+          <a:fillRef idx="3">
+            <a:schemeClr val="accent1"/>
+          </a:fillRef>
+          <a:effectRef idx="2">
+            <a:schemeClr val="accent1"/>
+          </a:effectRef>
+          <a:fontRef idx="minor">
+            <a:schemeClr val="lt1"/>
+          </a:fontRef>
+        </p:style>
+        <p:txBody>
+          <a:bodyPr rtlCol="0" anchor="ctr"/>
+          <a:lstStyle/>
+          <a:p>
+            <a:pPr algn="ctr"/>
+          </a:p>
+        </p:txBody>
+      </p:sp>
+      <p:sp>
+        <p:nvSpPr>
+          <p:cNvPr id="20" name="TextBox 19"/>
+          <p:cNvSpPr txBox="1"/>
+          <p:nvPr/>
+        </p:nvSpPr>
+        <p:spPr>
+          <a:xfrm>
+            <a:off x="822960" y="4343400"/>
+            <a:ext cx="2834640" cy="274320"/>
+          </a:xfrm>
+          <a:prstGeom prst="rect">
+            <a:avLst/>
+          </a:prstGeom>
+          <a:noFill/>
+        </p:spPr>
+        <p:txBody>
+          <a:bodyPr wrap="square" anchor="t" lIns="0" rIns="0" tIns="0" bIns="0">
+            <a:spAutoFit/>
+          </a:bodyPr>
+          <a:lstStyle/>
+          <a:p>
+            <a:pPr algn="l">
+              <a:lnSpc>
+                <a:spcPct val="100000"/>
+              </a:lnSpc>
+            </a:pPr>
+            <a:r>
+              <a:rPr sz="1000" b="1" spc="200">
+                <a:solidFill>
+                  <a:srgbClr val="D97725"/>
+                </a:solidFill>
+                <a:latin typeface="JetBrains Mono"/>
+              </a:rPr>
+              <a:t>MOUNTING</a:t>
+            </a:r>
+          </a:p>
+        </p:txBody>
+      </p:sp>
+      <p:sp>
+        <p:nvSpPr>
           <p:cNvPr id="21" name="TextBox 20"/>
           <p:cNvSpPr txBox="1"/>
           <p:nvPr/>
         </p:nvSpPr>
         <p:spPr>
           <a:xfrm>
-            <a:off x="822960" y="5669280"/>
+            <a:off x="3840480" y="4315968"/>
+            <a:ext cx="7498079" cy="320040"/>
+          </a:xfrm>
+          <a:prstGeom prst="rect">
+            <a:avLst/>
+          </a:prstGeom>
+          <a:noFill/>
+        </p:spPr>
+        <p:txBody>
+          <a:bodyPr wrap="square" anchor="t" lIns="0" rIns="0" tIns="0" bIns="0">
+            <a:spAutoFit/>
+          </a:bodyPr>
+          <a:lstStyle/>
+          <a:p>
+            <a:pPr algn="l">
+              <a:lnSpc>
+                <a:spcPct val="100000"/>
+              </a:lnSpc>
+            </a:pPr>
+            <a:r>
+              <a:rPr sz="1200" b="0">
+                <a:solidFill>
+                  <a:srgbClr val="0A0A0C"/>
+                </a:solidFill>
+                <a:latin typeface="Satoshi"/>
+              </a:rPr>
+              <a:t>[Roof / ground-mounted · hot-dip galvanised structure]</a:t>
+            </a:r>
+          </a:p>
+        </p:txBody>
+      </p:sp>
+      <p:sp>
+        <p:nvSpPr>
+          <p:cNvPr id="22" name="Rectangle 21"/>
+          <p:cNvSpPr/>
+          <p:nvPr/>
+        </p:nvSpPr>
+        <p:spPr>
+          <a:xfrm>
+            <a:off x="822960" y="4690872"/>
+            <a:ext cx="10543032" cy="9525"/>
+          </a:xfrm>
+          <a:prstGeom prst="rect">
+            <a:avLst/>
+          </a:prstGeom>
+          <a:solidFill>
+            <a:srgbClr val="E3E3E0"/>
+          </a:solidFill>
+          <a:ln>
+            <a:noFill/>
+          </a:ln>
+          <a:effectLst/>
+        </p:spPr>
+        <p:style>
+          <a:lnRef idx="1">
+            <a:schemeClr val="accent1"/>
+          </a:lnRef>
+          <a:fillRef idx="3">
+            <a:schemeClr val="accent1"/>
+          </a:fillRef>
+          <a:effectRef idx="2">
+            <a:schemeClr val="accent1"/>
+          </a:effectRef>
+          <a:fontRef idx="minor">
+            <a:schemeClr val="lt1"/>
+          </a:fontRef>
+        </p:style>
+        <p:txBody>
+          <a:bodyPr rtlCol="0" anchor="ctr"/>
+          <a:lstStyle/>
+          <a:p>
+            <a:pPr algn="ctr"/>
+          </a:p>
+        </p:txBody>
+      </p:sp>
+      <p:sp>
+        <p:nvSpPr>
+          <p:cNvPr id="23" name="TextBox 22"/>
+          <p:cNvSpPr txBox="1"/>
+          <p:nvPr/>
+        </p:nvSpPr>
+        <p:spPr>
+          <a:xfrm>
+            <a:off x="822960" y="4818888"/>
+            <a:ext cx="2834640" cy="274320"/>
+          </a:xfrm>
+          <a:prstGeom prst="rect">
+            <a:avLst/>
+          </a:prstGeom>
+          <a:noFill/>
+        </p:spPr>
+        <p:txBody>
+          <a:bodyPr wrap="square" anchor="t" lIns="0" rIns="0" tIns="0" bIns="0">
+            <a:spAutoFit/>
+          </a:bodyPr>
+          <a:lstStyle/>
+          <a:p>
+            <a:pPr algn="l">
+              <a:lnSpc>
+                <a:spcPct val="100000"/>
+              </a:lnSpc>
+            </a:pPr>
+            <a:r>
+              <a:rPr sz="1000" b="1" spc="200">
+                <a:solidFill>
+                  <a:srgbClr val="D97725"/>
+                </a:solidFill>
+                <a:latin typeface="JetBrains Mono"/>
+              </a:rPr>
+              <a:t>MONITORING</a:t>
+            </a:r>
+          </a:p>
+        </p:txBody>
+      </p:sp>
+      <p:sp>
+        <p:nvSpPr>
+          <p:cNvPr id="24" name="TextBox 23"/>
+          <p:cNvSpPr txBox="1"/>
+          <p:nvPr/>
+        </p:nvSpPr>
+        <p:spPr>
+          <a:xfrm>
+            <a:off x="3840480" y="4791456"/>
+            <a:ext cx="7498079" cy="320040"/>
+          </a:xfrm>
+          <a:prstGeom prst="rect">
+            <a:avLst/>
+          </a:prstGeom>
+          <a:noFill/>
+        </p:spPr>
+        <p:txBody>
+          <a:bodyPr wrap="square" anchor="t" lIns="0" rIns="0" tIns="0" bIns="0">
+            <a:spAutoFit/>
+          </a:bodyPr>
+          <a:lstStyle/>
+          <a:p>
+            <a:pPr algn="l">
+              <a:lnSpc>
+                <a:spcPct val="100000"/>
+              </a:lnSpc>
+            </a:pPr>
+            <a:r>
+              <a:rPr sz="1200" b="0">
+                <a:solidFill>
+                  <a:srgbClr val="0A0A0C"/>
+                </a:solidFill>
+                <a:latin typeface="Satoshi"/>
+              </a:rPr>
+              <a:t>[String-level monitoring · remote portal · generation meter]</a:t>
+            </a:r>
+          </a:p>
+        </p:txBody>
+      </p:sp>
+      <p:sp>
+        <p:nvSpPr>
+          <p:cNvPr id="25" name="Rectangle 24"/>
+          <p:cNvSpPr/>
+          <p:nvPr/>
+        </p:nvSpPr>
+        <p:spPr>
+          <a:xfrm>
+            <a:off x="822960" y="5166360"/>
+            <a:ext cx="10543032" cy="9525"/>
+          </a:xfrm>
+          <a:prstGeom prst="rect">
+            <a:avLst/>
+          </a:prstGeom>
+          <a:solidFill>
+            <a:srgbClr val="E3E3E0"/>
+          </a:solidFill>
+          <a:ln>
+            <a:noFill/>
+          </a:ln>
+          <a:effectLst/>
+        </p:spPr>
+        <p:style>
+          <a:lnRef idx="1">
+            <a:schemeClr val="accent1"/>
+          </a:lnRef>
+          <a:fillRef idx="3">
+            <a:schemeClr val="accent1"/>
+          </a:fillRef>
+          <a:effectRef idx="2">
+            <a:schemeClr val="accent1"/>
+          </a:effectRef>
+          <a:fontRef idx="minor">
+            <a:schemeClr val="lt1"/>
+          </a:fontRef>
+        </p:style>
+        <p:txBody>
+          <a:bodyPr rtlCol="0" anchor="ctr"/>
+          <a:lstStyle/>
+          <a:p>
+            <a:pPr algn="ctr"/>
+          </a:p>
+        </p:txBody>
+      </p:sp>
+      <p:sp>
+        <p:nvSpPr>
+          <p:cNvPr id="26" name="TextBox 25"/>
+          <p:cNvSpPr txBox="1"/>
+          <p:nvPr/>
+        </p:nvSpPr>
+        <p:spPr>
+          <a:xfrm>
+            <a:off x="822960" y="5294376"/>
+            <a:ext cx="2834640" cy="274320"/>
+          </a:xfrm>
+          <a:prstGeom prst="rect">
+            <a:avLst/>
+          </a:prstGeom>
+          <a:noFill/>
+        </p:spPr>
+        <p:txBody>
+          <a:bodyPr wrap="square" anchor="t" lIns="0" rIns="0" tIns="0" bIns="0">
+            <a:spAutoFit/>
+          </a:bodyPr>
+          <a:lstStyle/>
+          <a:p>
+            <a:pPr algn="l">
+              <a:lnSpc>
+                <a:spcPct val="100000"/>
+              </a:lnSpc>
+            </a:pPr>
+            <a:r>
+              <a:rPr sz="1000" b="1" spc="200">
+                <a:solidFill>
+                  <a:srgbClr val="D97725"/>
+                </a:solidFill>
+                <a:latin typeface="JetBrains Mono"/>
+              </a:rPr>
+              <a:t>EST. YIELD</a:t>
+            </a:r>
+          </a:p>
+        </p:txBody>
+      </p:sp>
+      <p:sp>
+        <p:nvSpPr>
+          <p:cNvPr id="27" name="TextBox 26"/>
+          <p:cNvSpPr txBox="1"/>
+          <p:nvPr/>
+        </p:nvSpPr>
+        <p:spPr>
+          <a:xfrm>
+            <a:off x="3840480" y="5266944"/>
+            <a:ext cx="7498079" cy="320040"/>
+          </a:xfrm>
+          <a:prstGeom prst="rect">
+            <a:avLst/>
+          </a:prstGeom>
+          <a:noFill/>
+        </p:spPr>
+        <p:txBody>
+          <a:bodyPr wrap="square" anchor="t" lIns="0" rIns="0" tIns="0" bIns="0">
+            <a:spAutoFit/>
+          </a:bodyPr>
+          <a:lstStyle/>
+          <a:p>
+            <a:pPr algn="l">
+              <a:lnSpc>
+                <a:spcPct val="100000"/>
+              </a:lnSpc>
+            </a:pPr>
+            <a:r>
+              <a:rPr sz="1200" b="0">
+                <a:solidFill>
+                  <a:srgbClr val="0A0A0C"/>
+                </a:solidFill>
+                <a:latin typeface="Satoshi"/>
+              </a:rPr>
+              <a:t>[X,XXX MWh in year one · PR ≥ XX%]</a:t>
+            </a:r>
+          </a:p>
+        </p:txBody>
+      </p:sp>
+      <p:sp>
+        <p:nvSpPr>
+          <p:cNvPr id="28" name="Rectangle 27"/>
+          <p:cNvSpPr/>
+          <p:nvPr/>
+        </p:nvSpPr>
+        <p:spPr>
+          <a:xfrm>
+            <a:off x="822960" y="5641848"/>
+            <a:ext cx="10543032" cy="9525"/>
+          </a:xfrm>
+          <a:prstGeom prst="rect">
+            <a:avLst/>
+          </a:prstGeom>
+          <a:solidFill>
+            <a:srgbClr val="E3E3E0"/>
+          </a:solidFill>
+          <a:ln>
+            <a:noFill/>
+          </a:ln>
+          <a:effectLst/>
+        </p:spPr>
+        <p:style>
+          <a:lnRef idx="1">
+            <a:schemeClr val="accent1"/>
+          </a:lnRef>
+          <a:fillRef idx="3">
+            <a:schemeClr val="accent1"/>
+          </a:fillRef>
+          <a:effectRef idx="2">
+            <a:schemeClr val="accent1"/>
+          </a:effectRef>
+          <a:fontRef idx="minor">
+            <a:schemeClr val="lt1"/>
+          </a:fontRef>
+        </p:style>
+        <p:txBody>
+          <a:bodyPr rtlCol="0" anchor="ctr"/>
+          <a:lstStyle/>
+          <a:p>
+            <a:pPr algn="ctr"/>
+          </a:p>
+        </p:txBody>
+      </p:sp>
+      <p:sp>
+        <p:nvSpPr>
+          <p:cNvPr id="29" name="TextBox 28"/>
+          <p:cNvSpPr txBox="1"/>
+          <p:nvPr/>
+        </p:nvSpPr>
+        <p:spPr>
+          <a:xfrm>
+            <a:off x="822960" y="5897880"/>
             <a:ext cx="10515600" cy="914400"/>
           </a:xfrm>
           <a:prstGeom prst="rect">
@@ -8335,14 +9799,14 @@
                 </a:solidFill>
                 <a:latin typeface="Satoshi"/>
               </a:rPr>
-              <a:t>Exclusions: [utility connection fees · grid reinforcement · civils beyond agreed platform · VAT as stated].</a:t>
-            </a:r>
-          </a:p>
-        </p:txBody>
-      </p:sp>
-      <p:sp>
-        <p:nvSpPr>
-          <p:cNvPr id="22" name="TextBox 21"/>
+              <a:t>Engineering basis: PVsyst simulation, utility interconnection study and structural verification precede construction. All equipment is Tier-1 with manufacturer warranties registered to the client.</a:t>
+            </a:r>
+          </a:p>
+        </p:txBody>
+      </p:sp>
+      <p:sp>
+        <p:nvSpPr>
+          <p:cNvPr id="30" name="TextBox 29"/>
           <p:cNvSpPr txBox="1"/>
           <p:nvPr/>
         </p:nvSpPr>
@@ -8381,7 +9845,7 @@
       </p:sp>
       <p:sp>
         <p:nvSpPr>
-          <p:cNvPr id="23" name="TextBox 22"/>
+          <p:cNvPr id="31" name="TextBox 30"/>
           <p:cNvSpPr txBox="1"/>
           <p:nvPr/>
         </p:nvSpPr>
@@ -8514,7 +9978,908 @@
                 </a:solidFill>
                 <a:latin typeface="JetBrains Mono"/>
               </a:rPr>
-              <a:t>05 — DELIVERY PROGRAMME</a:t>
+              <a:t>05 — SCOPE OF WORK</a:t>
+            </a:r>
+          </a:p>
+        </p:txBody>
+      </p:sp>
+      <p:sp>
+        <p:nvSpPr>
+          <p:cNvPr id="4" name="TextBox 3"/>
+          <p:cNvSpPr txBox="1"/>
+          <p:nvPr/>
+        </p:nvSpPr>
+        <p:spPr>
+          <a:xfrm>
+            <a:off x="822960" y="960120"/>
+            <a:ext cx="10545775" cy="1463040"/>
+          </a:xfrm>
+          <a:prstGeom prst="rect">
+            <a:avLst/>
+          </a:prstGeom>
+          <a:noFill/>
+        </p:spPr>
+        <p:txBody>
+          <a:bodyPr wrap="square" anchor="t" lIns="0" rIns="0" tIns="0" bIns="0">
+            <a:spAutoFit/>
+          </a:bodyPr>
+          <a:lstStyle/>
+          <a:p>
+            <a:pPr algn="l">
+              <a:lnSpc>
+                <a:spcPct val="95000"/>
+              </a:lnSpc>
+            </a:pPr>
+            <a:r>
+              <a:rPr sz="4400" b="1" spc="-10">
+                <a:solidFill>
+                  <a:srgbClr val="0A0A0C"/>
+                </a:solidFill>
+                <a:latin typeface="Cabinet Grotesk"/>
+              </a:rPr>
+              <a:t>ONE CONTRACT. FULL ACCOUNTABILITY.</a:t>
+            </a:r>
+          </a:p>
+        </p:txBody>
+      </p:sp>
+      <p:sp>
+        <p:nvSpPr>
+          <p:cNvPr id="5" name="TextBox 4"/>
+          <p:cNvSpPr txBox="1"/>
+          <p:nvPr/>
+        </p:nvSpPr>
+        <p:spPr>
+          <a:xfrm>
+            <a:off x="822960" y="2057400"/>
+            <a:ext cx="457200" cy="365760"/>
+          </a:xfrm>
+          <a:prstGeom prst="rect">
+            <a:avLst/>
+          </a:prstGeom>
+          <a:noFill/>
+        </p:spPr>
+        <p:txBody>
+          <a:bodyPr wrap="square" anchor="t" lIns="0" rIns="0" tIns="0" bIns="0">
+            <a:spAutoFit/>
+          </a:bodyPr>
+          <a:lstStyle/>
+          <a:p>
+            <a:pPr algn="l">
+              <a:lnSpc>
+                <a:spcPct val="100000"/>
+              </a:lnSpc>
+            </a:pPr>
+            <a:r>
+              <a:rPr sz="1400" b="1" spc="100">
+                <a:solidFill>
+                  <a:srgbClr val="D97725"/>
+                </a:solidFill>
+                <a:latin typeface="JetBrains Mono"/>
+              </a:rPr>
+              <a:t>A</a:t>
+            </a:r>
+          </a:p>
+        </p:txBody>
+      </p:sp>
+      <p:sp>
+        <p:nvSpPr>
+          <p:cNvPr id="6" name="TextBox 5"/>
+          <p:cNvSpPr txBox="1"/>
+          <p:nvPr/>
+        </p:nvSpPr>
+        <p:spPr>
+          <a:xfrm>
+            <a:off x="1417320" y="2075688"/>
+            <a:ext cx="3291840" cy="457200"/>
+          </a:xfrm>
+          <a:prstGeom prst="rect">
+            <a:avLst/>
+          </a:prstGeom>
+          <a:noFill/>
+        </p:spPr>
+        <p:txBody>
+          <a:bodyPr wrap="square" anchor="t" lIns="0" rIns="0" tIns="0" bIns="0">
+            <a:spAutoFit/>
+          </a:bodyPr>
+          <a:lstStyle/>
+          <a:p>
+            <a:pPr algn="l">
+              <a:lnSpc>
+                <a:spcPct val="100000"/>
+              </a:lnSpc>
+            </a:pPr>
+            <a:r>
+              <a:rPr sz="1450" b="1" spc="40">
+                <a:solidFill>
+                  <a:srgbClr val="0A0A0C"/>
+                </a:solidFill>
+                <a:latin typeface="Cabinet Grotesk"/>
+              </a:rPr>
+              <a:t>ENGINEERING &amp; DESIGN</a:t>
+            </a:r>
+          </a:p>
+        </p:txBody>
+      </p:sp>
+      <p:sp>
+        <p:nvSpPr>
+          <p:cNvPr id="7" name="TextBox 6"/>
+          <p:cNvSpPr txBox="1"/>
+          <p:nvPr/>
+        </p:nvSpPr>
+        <p:spPr>
+          <a:xfrm>
+            <a:off x="4892040" y="2075688"/>
+            <a:ext cx="6492240" cy="640080"/>
+          </a:xfrm>
+          <a:prstGeom prst="rect">
+            <a:avLst/>
+          </a:prstGeom>
+          <a:noFill/>
+        </p:spPr>
+        <p:txBody>
+          <a:bodyPr wrap="square" anchor="t" lIns="0" rIns="0" tIns="0" bIns="0">
+            <a:spAutoFit/>
+          </a:bodyPr>
+          <a:lstStyle/>
+          <a:p>
+            <a:pPr algn="l">
+              <a:lnSpc>
+                <a:spcPct val="120000"/>
+              </a:lnSpc>
+            </a:pPr>
+            <a:r>
+              <a:rPr sz="1100" b="0">
+                <a:solidFill>
+                  <a:srgbClr val="737371"/>
+                </a:solidFill>
+                <a:latin typeface="Satoshi"/>
+              </a:rPr>
+              <a:t>Site survey &amp; yield assessment · PVsyst design · single-line diagrams · structural checks · utility application</a:t>
+            </a:r>
+          </a:p>
+        </p:txBody>
+      </p:sp>
+      <p:sp>
+        <p:nvSpPr>
+          <p:cNvPr id="8" name="Rectangle 7"/>
+          <p:cNvSpPr/>
+          <p:nvPr/>
+        </p:nvSpPr>
+        <p:spPr>
+          <a:xfrm>
+            <a:off x="822960" y="2724912"/>
+            <a:ext cx="10543032" cy="9525"/>
+          </a:xfrm>
+          <a:prstGeom prst="rect">
+            <a:avLst/>
+          </a:prstGeom>
+          <a:solidFill>
+            <a:srgbClr val="E3E3E0"/>
+          </a:solidFill>
+          <a:ln>
+            <a:noFill/>
+          </a:ln>
+          <a:effectLst/>
+        </p:spPr>
+        <p:style>
+          <a:lnRef idx="1">
+            <a:schemeClr val="accent1"/>
+          </a:lnRef>
+          <a:fillRef idx="3">
+            <a:schemeClr val="accent1"/>
+          </a:fillRef>
+          <a:effectRef idx="2">
+            <a:schemeClr val="accent1"/>
+          </a:effectRef>
+          <a:fontRef idx="minor">
+            <a:schemeClr val="lt1"/>
+          </a:fontRef>
+        </p:style>
+        <p:txBody>
+          <a:bodyPr rtlCol="0" anchor="ctr"/>
+          <a:lstStyle/>
+          <a:p>
+            <a:pPr algn="ctr"/>
+          </a:p>
+        </p:txBody>
+      </p:sp>
+      <p:sp>
+        <p:nvSpPr>
+          <p:cNvPr id="9" name="TextBox 8"/>
+          <p:cNvSpPr txBox="1"/>
+          <p:nvPr/>
+        </p:nvSpPr>
+        <p:spPr>
+          <a:xfrm>
+            <a:off x="822960" y="2926080"/>
+            <a:ext cx="457200" cy="365760"/>
+          </a:xfrm>
+          <a:prstGeom prst="rect">
+            <a:avLst/>
+          </a:prstGeom>
+          <a:noFill/>
+        </p:spPr>
+        <p:txBody>
+          <a:bodyPr wrap="square" anchor="t" lIns="0" rIns="0" tIns="0" bIns="0">
+            <a:spAutoFit/>
+          </a:bodyPr>
+          <a:lstStyle/>
+          <a:p>
+            <a:pPr algn="l">
+              <a:lnSpc>
+                <a:spcPct val="100000"/>
+              </a:lnSpc>
+            </a:pPr>
+            <a:r>
+              <a:rPr sz="1400" b="1" spc="100">
+                <a:solidFill>
+                  <a:srgbClr val="D97725"/>
+                </a:solidFill>
+                <a:latin typeface="JetBrains Mono"/>
+              </a:rPr>
+              <a:t>B</a:t>
+            </a:r>
+          </a:p>
+        </p:txBody>
+      </p:sp>
+      <p:sp>
+        <p:nvSpPr>
+          <p:cNvPr id="10" name="TextBox 9"/>
+          <p:cNvSpPr txBox="1"/>
+          <p:nvPr/>
+        </p:nvSpPr>
+        <p:spPr>
+          <a:xfrm>
+            <a:off x="1417320" y="2944368"/>
+            <a:ext cx="3291840" cy="457200"/>
+          </a:xfrm>
+          <a:prstGeom prst="rect">
+            <a:avLst/>
+          </a:prstGeom>
+          <a:noFill/>
+        </p:spPr>
+        <p:txBody>
+          <a:bodyPr wrap="square" anchor="t" lIns="0" rIns="0" tIns="0" bIns="0">
+            <a:spAutoFit/>
+          </a:bodyPr>
+          <a:lstStyle/>
+          <a:p>
+            <a:pPr algn="l">
+              <a:lnSpc>
+                <a:spcPct val="100000"/>
+              </a:lnSpc>
+            </a:pPr>
+            <a:r>
+              <a:rPr sz="1450" b="1" spc="40">
+                <a:solidFill>
+                  <a:srgbClr val="0A0A0C"/>
+                </a:solidFill>
+                <a:latin typeface="Cabinet Grotesk"/>
+              </a:rPr>
+              <a:t>PROCUREMENT</a:t>
+            </a:r>
+          </a:p>
+        </p:txBody>
+      </p:sp>
+      <p:sp>
+        <p:nvSpPr>
+          <p:cNvPr id="11" name="TextBox 10"/>
+          <p:cNvSpPr txBox="1"/>
+          <p:nvPr/>
+        </p:nvSpPr>
+        <p:spPr>
+          <a:xfrm>
+            <a:off x="4892040" y="2944368"/>
+            <a:ext cx="6492240" cy="640080"/>
+          </a:xfrm>
+          <a:prstGeom prst="rect">
+            <a:avLst/>
+          </a:prstGeom>
+          <a:noFill/>
+        </p:spPr>
+        <p:txBody>
+          <a:bodyPr wrap="square" anchor="t" lIns="0" rIns="0" tIns="0" bIns="0">
+            <a:spAutoFit/>
+          </a:bodyPr>
+          <a:lstStyle/>
+          <a:p>
+            <a:pPr algn="l">
+              <a:lnSpc>
+                <a:spcPct val="120000"/>
+              </a:lnSpc>
+            </a:pPr>
+            <a:r>
+              <a:rPr sz="1100" b="0">
+                <a:solidFill>
+                  <a:srgbClr val="737371"/>
+                </a:solidFill>
+                <a:latin typeface="Satoshi"/>
+              </a:rPr>
+              <a:t>Tier-1 equipment sourcing · factory inspections · logistics &amp; customs · materials received &amp; stored to spec</a:t>
+            </a:r>
+          </a:p>
+        </p:txBody>
+      </p:sp>
+      <p:sp>
+        <p:nvSpPr>
+          <p:cNvPr id="12" name="Rectangle 11"/>
+          <p:cNvSpPr/>
+          <p:nvPr/>
+        </p:nvSpPr>
+        <p:spPr>
+          <a:xfrm>
+            <a:off x="822960" y="3593592"/>
+            <a:ext cx="10543032" cy="9525"/>
+          </a:xfrm>
+          <a:prstGeom prst="rect">
+            <a:avLst/>
+          </a:prstGeom>
+          <a:solidFill>
+            <a:srgbClr val="E3E3E0"/>
+          </a:solidFill>
+          <a:ln>
+            <a:noFill/>
+          </a:ln>
+          <a:effectLst/>
+        </p:spPr>
+        <p:style>
+          <a:lnRef idx="1">
+            <a:schemeClr val="accent1"/>
+          </a:lnRef>
+          <a:fillRef idx="3">
+            <a:schemeClr val="accent1"/>
+          </a:fillRef>
+          <a:effectRef idx="2">
+            <a:schemeClr val="accent1"/>
+          </a:effectRef>
+          <a:fontRef idx="minor">
+            <a:schemeClr val="lt1"/>
+          </a:fontRef>
+        </p:style>
+        <p:txBody>
+          <a:bodyPr rtlCol="0" anchor="ctr"/>
+          <a:lstStyle/>
+          <a:p>
+            <a:pPr algn="ctr"/>
+          </a:p>
+        </p:txBody>
+      </p:sp>
+      <p:sp>
+        <p:nvSpPr>
+          <p:cNvPr id="13" name="TextBox 12"/>
+          <p:cNvSpPr txBox="1"/>
+          <p:nvPr/>
+        </p:nvSpPr>
+        <p:spPr>
+          <a:xfrm>
+            <a:off x="822960" y="3794760"/>
+            <a:ext cx="457200" cy="365760"/>
+          </a:xfrm>
+          <a:prstGeom prst="rect">
+            <a:avLst/>
+          </a:prstGeom>
+          <a:noFill/>
+        </p:spPr>
+        <p:txBody>
+          <a:bodyPr wrap="square" anchor="t" lIns="0" rIns="0" tIns="0" bIns="0">
+            <a:spAutoFit/>
+          </a:bodyPr>
+          <a:lstStyle/>
+          <a:p>
+            <a:pPr algn="l">
+              <a:lnSpc>
+                <a:spcPct val="100000"/>
+              </a:lnSpc>
+            </a:pPr>
+            <a:r>
+              <a:rPr sz="1400" b="1" spc="100">
+                <a:solidFill>
+                  <a:srgbClr val="D97725"/>
+                </a:solidFill>
+                <a:latin typeface="JetBrains Mono"/>
+              </a:rPr>
+              <a:t>C</a:t>
+            </a:r>
+          </a:p>
+        </p:txBody>
+      </p:sp>
+      <p:sp>
+        <p:nvSpPr>
+          <p:cNvPr id="14" name="TextBox 13"/>
+          <p:cNvSpPr txBox="1"/>
+          <p:nvPr/>
+        </p:nvSpPr>
+        <p:spPr>
+          <a:xfrm>
+            <a:off x="1417320" y="3813048"/>
+            <a:ext cx="3291840" cy="457200"/>
+          </a:xfrm>
+          <a:prstGeom prst="rect">
+            <a:avLst/>
+          </a:prstGeom>
+          <a:noFill/>
+        </p:spPr>
+        <p:txBody>
+          <a:bodyPr wrap="square" anchor="t" lIns="0" rIns="0" tIns="0" bIns="0">
+            <a:spAutoFit/>
+          </a:bodyPr>
+          <a:lstStyle/>
+          <a:p>
+            <a:pPr algn="l">
+              <a:lnSpc>
+                <a:spcPct val="100000"/>
+              </a:lnSpc>
+            </a:pPr>
+            <a:r>
+              <a:rPr sz="1450" b="1" spc="40">
+                <a:solidFill>
+                  <a:srgbClr val="0A0A0C"/>
+                </a:solidFill>
+                <a:latin typeface="Cabinet Grotesk"/>
+              </a:rPr>
+              <a:t>CONSTRUCTION</a:t>
+            </a:r>
+          </a:p>
+        </p:txBody>
+      </p:sp>
+      <p:sp>
+        <p:nvSpPr>
+          <p:cNvPr id="15" name="TextBox 14"/>
+          <p:cNvSpPr txBox="1"/>
+          <p:nvPr/>
+        </p:nvSpPr>
+        <p:spPr>
+          <a:xfrm>
+            <a:off x="4892040" y="3813048"/>
+            <a:ext cx="6492240" cy="640080"/>
+          </a:xfrm>
+          <a:prstGeom prst="rect">
+            <a:avLst/>
+          </a:prstGeom>
+          <a:noFill/>
+        </p:spPr>
+        <p:txBody>
+          <a:bodyPr wrap="square" anchor="t" lIns="0" rIns="0" tIns="0" bIns="0">
+            <a:spAutoFit/>
+          </a:bodyPr>
+          <a:lstStyle/>
+          <a:p>
+            <a:pPr algn="l">
+              <a:lnSpc>
+                <a:spcPct val="120000"/>
+              </a:lnSpc>
+            </a:pPr>
+            <a:r>
+              <a:rPr sz="1100" b="0">
+                <a:solidFill>
+                  <a:srgbClr val="737371"/>
+                </a:solidFill>
+                <a:latin typeface="Satoshi"/>
+              </a:rPr>
+              <a:t>Civil &amp; structural works · mechanical &amp; electrical installation · grid interconnection · HSE-managed site</a:t>
+            </a:r>
+          </a:p>
+        </p:txBody>
+      </p:sp>
+      <p:sp>
+        <p:nvSpPr>
+          <p:cNvPr id="16" name="Rectangle 15"/>
+          <p:cNvSpPr/>
+          <p:nvPr/>
+        </p:nvSpPr>
+        <p:spPr>
+          <a:xfrm>
+            <a:off x="822960" y="4462272"/>
+            <a:ext cx="10543032" cy="9525"/>
+          </a:xfrm>
+          <a:prstGeom prst="rect">
+            <a:avLst/>
+          </a:prstGeom>
+          <a:solidFill>
+            <a:srgbClr val="E3E3E0"/>
+          </a:solidFill>
+          <a:ln>
+            <a:noFill/>
+          </a:ln>
+          <a:effectLst/>
+        </p:spPr>
+        <p:style>
+          <a:lnRef idx="1">
+            <a:schemeClr val="accent1"/>
+          </a:lnRef>
+          <a:fillRef idx="3">
+            <a:schemeClr val="accent1"/>
+          </a:fillRef>
+          <a:effectRef idx="2">
+            <a:schemeClr val="accent1"/>
+          </a:effectRef>
+          <a:fontRef idx="minor">
+            <a:schemeClr val="lt1"/>
+          </a:fontRef>
+        </p:style>
+        <p:txBody>
+          <a:bodyPr rtlCol="0" anchor="ctr"/>
+          <a:lstStyle/>
+          <a:p>
+            <a:pPr algn="ctr"/>
+          </a:p>
+        </p:txBody>
+      </p:sp>
+      <p:sp>
+        <p:nvSpPr>
+          <p:cNvPr id="17" name="TextBox 16"/>
+          <p:cNvSpPr txBox="1"/>
+          <p:nvPr/>
+        </p:nvSpPr>
+        <p:spPr>
+          <a:xfrm>
+            <a:off x="822960" y="4663440"/>
+            <a:ext cx="457200" cy="365760"/>
+          </a:xfrm>
+          <a:prstGeom prst="rect">
+            <a:avLst/>
+          </a:prstGeom>
+          <a:noFill/>
+        </p:spPr>
+        <p:txBody>
+          <a:bodyPr wrap="square" anchor="t" lIns="0" rIns="0" tIns="0" bIns="0">
+            <a:spAutoFit/>
+          </a:bodyPr>
+          <a:lstStyle/>
+          <a:p>
+            <a:pPr algn="l">
+              <a:lnSpc>
+                <a:spcPct val="100000"/>
+              </a:lnSpc>
+            </a:pPr>
+            <a:r>
+              <a:rPr sz="1400" b="1" spc="100">
+                <a:solidFill>
+                  <a:srgbClr val="D97725"/>
+                </a:solidFill>
+                <a:latin typeface="JetBrains Mono"/>
+              </a:rPr>
+              <a:t>D</a:t>
+            </a:r>
+          </a:p>
+        </p:txBody>
+      </p:sp>
+      <p:sp>
+        <p:nvSpPr>
+          <p:cNvPr id="18" name="TextBox 17"/>
+          <p:cNvSpPr txBox="1"/>
+          <p:nvPr/>
+        </p:nvSpPr>
+        <p:spPr>
+          <a:xfrm>
+            <a:off x="1417320" y="4681728"/>
+            <a:ext cx="3291840" cy="457200"/>
+          </a:xfrm>
+          <a:prstGeom prst="rect">
+            <a:avLst/>
+          </a:prstGeom>
+          <a:noFill/>
+        </p:spPr>
+        <p:txBody>
+          <a:bodyPr wrap="square" anchor="t" lIns="0" rIns="0" tIns="0" bIns="0">
+            <a:spAutoFit/>
+          </a:bodyPr>
+          <a:lstStyle/>
+          <a:p>
+            <a:pPr algn="l">
+              <a:lnSpc>
+                <a:spcPct val="100000"/>
+              </a:lnSpc>
+            </a:pPr>
+            <a:r>
+              <a:rPr sz="1450" b="1" spc="40">
+                <a:solidFill>
+                  <a:srgbClr val="0A0A0C"/>
+                </a:solidFill>
+                <a:latin typeface="Cabinet Grotesk"/>
+              </a:rPr>
+              <a:t>COMMISSIONING &amp; HANDOVER</a:t>
+            </a:r>
+          </a:p>
+        </p:txBody>
+      </p:sp>
+      <p:sp>
+        <p:nvSpPr>
+          <p:cNvPr id="19" name="TextBox 18"/>
+          <p:cNvSpPr txBox="1"/>
+          <p:nvPr/>
+        </p:nvSpPr>
+        <p:spPr>
+          <a:xfrm>
+            <a:off x="4892040" y="4681728"/>
+            <a:ext cx="6492240" cy="640080"/>
+          </a:xfrm>
+          <a:prstGeom prst="rect">
+            <a:avLst/>
+          </a:prstGeom>
+          <a:noFill/>
+        </p:spPr>
+        <p:txBody>
+          <a:bodyPr wrap="square" anchor="t" lIns="0" rIns="0" tIns="0" bIns="0">
+            <a:spAutoFit/>
+          </a:bodyPr>
+          <a:lstStyle/>
+          <a:p>
+            <a:pPr algn="l">
+              <a:lnSpc>
+                <a:spcPct val="120000"/>
+              </a:lnSpc>
+            </a:pPr>
+            <a:r>
+              <a:rPr sz="1100" b="0">
+                <a:solidFill>
+                  <a:srgbClr val="737371"/>
+                </a:solidFill>
+                <a:latin typeface="Satoshi"/>
+              </a:rPr>
+              <a:t>Testing &amp; commissioning · acceptance tests with client · as-built dossier · operator training · O&amp;M handover</a:t>
+            </a:r>
+          </a:p>
+        </p:txBody>
+      </p:sp>
+      <p:sp>
+        <p:nvSpPr>
+          <p:cNvPr id="20" name="Rectangle 19"/>
+          <p:cNvSpPr/>
+          <p:nvPr/>
+        </p:nvSpPr>
+        <p:spPr>
+          <a:xfrm>
+            <a:off x="822960" y="5330952"/>
+            <a:ext cx="10543032" cy="9525"/>
+          </a:xfrm>
+          <a:prstGeom prst="rect">
+            <a:avLst/>
+          </a:prstGeom>
+          <a:solidFill>
+            <a:srgbClr val="E3E3E0"/>
+          </a:solidFill>
+          <a:ln>
+            <a:noFill/>
+          </a:ln>
+          <a:effectLst/>
+        </p:spPr>
+        <p:style>
+          <a:lnRef idx="1">
+            <a:schemeClr val="accent1"/>
+          </a:lnRef>
+          <a:fillRef idx="3">
+            <a:schemeClr val="accent1"/>
+          </a:fillRef>
+          <a:effectRef idx="2">
+            <a:schemeClr val="accent1"/>
+          </a:effectRef>
+          <a:fontRef idx="minor">
+            <a:schemeClr val="lt1"/>
+          </a:fontRef>
+        </p:style>
+        <p:txBody>
+          <a:bodyPr rtlCol="0" anchor="ctr"/>
+          <a:lstStyle/>
+          <a:p>
+            <a:pPr algn="ctr"/>
+          </a:p>
+        </p:txBody>
+      </p:sp>
+      <p:sp>
+        <p:nvSpPr>
+          <p:cNvPr id="21" name="TextBox 20"/>
+          <p:cNvSpPr txBox="1"/>
+          <p:nvPr/>
+        </p:nvSpPr>
+        <p:spPr>
+          <a:xfrm>
+            <a:off x="822960" y="5669280"/>
+            <a:ext cx="10515600" cy="914400"/>
+          </a:xfrm>
+          <a:prstGeom prst="rect">
+            <a:avLst/>
+          </a:prstGeom>
+          <a:noFill/>
+        </p:spPr>
+        <p:txBody>
+          <a:bodyPr wrap="square" anchor="t" lIns="0" rIns="0" tIns="0" bIns="0">
+            <a:spAutoFit/>
+          </a:bodyPr>
+          <a:lstStyle/>
+          <a:p>
+            <a:pPr algn="l">
+              <a:lnSpc>
+                <a:spcPct val="125000"/>
+              </a:lnSpc>
+            </a:pPr>
+            <a:r>
+              <a:rPr sz="1100" b="0">
+                <a:solidFill>
+                  <a:srgbClr val="737371"/>
+                </a:solidFill>
+                <a:latin typeface="Satoshi"/>
+              </a:rPr>
+              <a:t>Exclusions: [utility connection fees · grid reinforcement · civils beyond agreed platform · VAT as stated].</a:t>
+            </a:r>
+          </a:p>
+        </p:txBody>
+      </p:sp>
+      <p:sp>
+        <p:nvSpPr>
+          <p:cNvPr id="22" name="TextBox 21"/>
+          <p:cNvSpPr txBox="1"/>
+          <p:nvPr/>
+        </p:nvSpPr>
+        <p:spPr>
+          <a:xfrm>
+            <a:off x="822960" y="6419088"/>
+            <a:ext cx="7315200" cy="274320"/>
+          </a:xfrm>
+          <a:prstGeom prst="rect">
+            <a:avLst/>
+          </a:prstGeom>
+          <a:noFill/>
+        </p:spPr>
+        <p:txBody>
+          <a:bodyPr wrap="square" anchor="t" lIns="0" rIns="0" tIns="0" bIns="0">
+            <a:spAutoFit/>
+          </a:bodyPr>
+          <a:lstStyle/>
+          <a:p>
+            <a:pPr algn="l">
+              <a:lnSpc>
+                <a:spcPct val="100000"/>
+              </a:lnSpc>
+            </a:pPr>
+            <a:r>
+              <a:rPr sz="800" b="0" spc="200">
+                <a:solidFill>
+                  <a:srgbClr val="A6A6A3"/>
+                </a:solidFill>
+                <a:latin typeface="JetBrains Mono"/>
+              </a:rPr>
+              <a:t>GJW ENERGY — TECHNO-COMMERCIAL PROPOSAL · GJW-TCO-[YYYY]-[NNN]</a:t>
+            </a:r>
+          </a:p>
+        </p:txBody>
+      </p:sp>
+      <p:sp>
+        <p:nvSpPr>
+          <p:cNvPr id="23" name="TextBox 22"/>
+          <p:cNvSpPr txBox="1"/>
+          <p:nvPr/>
+        </p:nvSpPr>
+        <p:spPr>
+          <a:xfrm>
+            <a:off x="11109960" y="6419088"/>
+            <a:ext cx="320040" cy="274320"/>
+          </a:xfrm>
+          <a:prstGeom prst="rect">
+            <a:avLst/>
+          </a:prstGeom>
+          <a:noFill/>
+        </p:spPr>
+        <p:txBody>
+          <a:bodyPr wrap="square" anchor="t" lIns="0" rIns="0" tIns="0" bIns="0">
+            <a:spAutoFit/>
+          </a:bodyPr>
+          <a:lstStyle/>
+          <a:p>
+            <a:pPr algn="r">
+              <a:lnSpc>
+                <a:spcPct val="100000"/>
+              </a:lnSpc>
+            </a:pPr>
+            <a:r>
+              <a:rPr sz="900" b="1" spc="150">
+                <a:solidFill>
+                  <a:srgbClr val="D97725"/>
+                </a:solidFill>
+                <a:latin typeface="JetBrains Mono"/>
+              </a:rPr>
+              <a:t>06</a:t>
+            </a:r>
+          </a:p>
+        </p:txBody>
+      </p:sp>
+    </p:spTree>
+  </p:cSld>
+  <p:clrMapOvr>
+    <a:masterClrMapping/>
+  </p:clrMapOvr>
+</p:sld>
+</file>
+
+<file path=ppt/slides/slide7.xml><?xml version="1.0" encoding="utf-8"?>
+<p:sld xmlns:a="http://schemas.openxmlformats.org/drawingml/2006/main" xmlns:p="http://schemas.openxmlformats.org/presentationml/2006/main" xmlns:r="http://schemas.openxmlformats.org/officeDocument/2006/relationships">
+  <p:cSld>
+    <p:spTree>
+      <p:nvGrpSpPr>
+        <p:cNvPr id="1" name=""/>
+        <p:cNvGrpSpPr/>
+        <p:nvPr/>
+      </p:nvGrpSpPr>
+      <p:grpSpPr/>
+      <p:sp>
+        <p:nvSpPr>
+          <p:cNvPr id="2" name="Rectangle 1"/>
+          <p:cNvSpPr/>
+          <p:nvPr/>
+        </p:nvSpPr>
+        <p:spPr>
+          <a:xfrm>
+            <a:off x="0" y="0"/>
+            <a:ext cx="12191695" cy="6858000"/>
+          </a:xfrm>
+          <a:prstGeom prst="rect">
+            <a:avLst/>
+          </a:prstGeom>
+          <a:solidFill>
+            <a:srgbClr val="F7F7F5"/>
+          </a:solidFill>
+          <a:ln>
+            <a:noFill/>
+          </a:ln>
+          <a:effectLst/>
+        </p:spPr>
+        <p:style>
+          <a:lnRef idx="1">
+            <a:schemeClr val="accent1"/>
+          </a:lnRef>
+          <a:fillRef idx="3">
+            <a:schemeClr val="accent1"/>
+          </a:fillRef>
+          <a:effectRef idx="2">
+            <a:schemeClr val="accent1"/>
+          </a:effectRef>
+          <a:fontRef idx="minor">
+            <a:schemeClr val="lt1"/>
+          </a:fontRef>
+        </p:style>
+        <p:txBody>
+          <a:bodyPr rtlCol="0" anchor="ctr"/>
+          <a:lstStyle/>
+          <a:p>
+            <a:pPr algn="ctr"/>
+          </a:p>
+        </p:txBody>
+      </p:sp>
+      <p:sp>
+        <p:nvSpPr>
+          <p:cNvPr id="3" name="TextBox 2"/>
+          <p:cNvSpPr txBox="1"/>
+          <p:nvPr/>
+        </p:nvSpPr>
+        <p:spPr>
+          <a:xfrm>
+            <a:off x="822960" y="566928"/>
+            <a:ext cx="8229600" cy="274320"/>
+          </a:xfrm>
+          <a:prstGeom prst="rect">
+            <a:avLst/>
+          </a:prstGeom>
+          <a:noFill/>
+        </p:spPr>
+        <p:txBody>
+          <a:bodyPr wrap="square" anchor="t" lIns="0" rIns="0" tIns="0" bIns="0">
+            <a:spAutoFit/>
+          </a:bodyPr>
+          <a:lstStyle/>
+          <a:p>
+            <a:pPr algn="l">
+              <a:lnSpc>
+                <a:spcPct val="100000"/>
+              </a:lnSpc>
+            </a:pPr>
+            <a:r>
+              <a:rPr sz="1100" b="1" spc="350">
+                <a:solidFill>
+                  <a:srgbClr val="D97725"/>
+                </a:solidFill>
+                <a:latin typeface="JetBrains Mono"/>
+              </a:rPr>
+              <a:t>06 — DELIVERY PROGRAMME</a:t>
             </a:r>
           </a:p>
         </p:txBody>
@@ -9105,942 +11470,6 @@
                 </a:solidFill>
                 <a:latin typeface="JetBrains Mono"/>
               </a:rPr>
-              <a:t>06</a:t>
-            </a:r>
-          </a:p>
-        </p:txBody>
-      </p:sp>
-    </p:spTree>
-  </p:cSld>
-  <p:clrMapOvr>
-    <a:masterClrMapping/>
-  </p:clrMapOvr>
-</p:sld>
-</file>
-
-<file path=ppt/slides/slide7.xml><?xml version="1.0" encoding="utf-8"?>
-<p:sld xmlns:a="http://schemas.openxmlformats.org/drawingml/2006/main" xmlns:p="http://schemas.openxmlformats.org/presentationml/2006/main" xmlns:r="http://schemas.openxmlformats.org/officeDocument/2006/relationships">
-  <p:cSld>
-    <p:spTree>
-      <p:nvGrpSpPr>
-        <p:cNvPr id="1" name=""/>
-        <p:cNvGrpSpPr/>
-        <p:nvPr/>
-      </p:nvGrpSpPr>
-      <p:grpSpPr/>
-      <p:sp>
-        <p:nvSpPr>
-          <p:cNvPr id="2" name="Rectangle 1"/>
-          <p:cNvSpPr/>
-          <p:nvPr/>
-        </p:nvSpPr>
-        <p:spPr>
-          <a:xfrm>
-            <a:off x="0" y="0"/>
-            <a:ext cx="12191695" cy="6858000"/>
-          </a:xfrm>
-          <a:prstGeom prst="rect">
-            <a:avLst/>
-          </a:prstGeom>
-          <a:solidFill>
-            <a:srgbClr val="0A0A0C"/>
-          </a:solidFill>
-          <a:ln>
-            <a:noFill/>
-          </a:ln>
-          <a:effectLst/>
-        </p:spPr>
-        <p:style>
-          <a:lnRef idx="1">
-            <a:schemeClr val="accent1"/>
-          </a:lnRef>
-          <a:fillRef idx="3">
-            <a:schemeClr val="accent1"/>
-          </a:fillRef>
-          <a:effectRef idx="2">
-            <a:schemeClr val="accent1"/>
-          </a:effectRef>
-          <a:fontRef idx="minor">
-            <a:schemeClr val="lt1"/>
-          </a:fontRef>
-        </p:style>
-        <p:txBody>
-          <a:bodyPr rtlCol="0" anchor="ctr"/>
-          <a:lstStyle/>
-          <a:p>
-            <a:pPr algn="ctr"/>
-          </a:p>
-        </p:txBody>
-      </p:sp>
-      <p:sp>
-        <p:nvSpPr>
-          <p:cNvPr id="3" name="TextBox 2"/>
-          <p:cNvSpPr txBox="1"/>
-          <p:nvPr/>
-        </p:nvSpPr>
-        <p:spPr>
-          <a:xfrm>
-            <a:off x="822960" y="566928"/>
-            <a:ext cx="8229600" cy="274320"/>
-          </a:xfrm>
-          <a:prstGeom prst="rect">
-            <a:avLst/>
-          </a:prstGeom>
-          <a:noFill/>
-        </p:spPr>
-        <p:txBody>
-          <a:bodyPr wrap="square" anchor="t" lIns="0" rIns="0" tIns="0" bIns="0">
-            <a:spAutoFit/>
-          </a:bodyPr>
-          <a:lstStyle/>
-          <a:p>
-            <a:pPr algn="l">
-              <a:lnSpc>
-                <a:spcPct val="100000"/>
-              </a:lnSpc>
-            </a:pPr>
-            <a:r>
-              <a:rPr sz="1100" b="1" spc="350">
-                <a:solidFill>
-                  <a:srgbClr val="D97725"/>
-                </a:solidFill>
-                <a:latin typeface="JetBrains Mono"/>
-              </a:rPr>
-              <a:t>06 — PROOF, NOT PROMISES</a:t>
-            </a:r>
-          </a:p>
-        </p:txBody>
-      </p:sp>
-      <p:sp>
-        <p:nvSpPr>
-          <p:cNvPr id="4" name="TextBox 3"/>
-          <p:cNvSpPr txBox="1"/>
-          <p:nvPr/>
-        </p:nvSpPr>
-        <p:spPr>
-          <a:xfrm>
-            <a:off x="822960" y="960120"/>
-            <a:ext cx="10545775" cy="1463040"/>
-          </a:xfrm>
-          <a:prstGeom prst="rect">
-            <a:avLst/>
-          </a:prstGeom>
-          <a:noFill/>
-        </p:spPr>
-        <p:txBody>
-          <a:bodyPr wrap="square" anchor="t" lIns="0" rIns="0" tIns="0" bIns="0">
-            <a:spAutoFit/>
-          </a:bodyPr>
-          <a:lstStyle/>
-          <a:p>
-            <a:pPr algn="l">
-              <a:lnSpc>
-                <a:spcPct val="95000"/>
-              </a:lnSpc>
-            </a:pPr>
-            <a:r>
-              <a:rPr sz="4400" b="1" spc="-10">
-                <a:solidFill>
-                  <a:srgbClr val="FFFFFF"/>
-                </a:solidFill>
-                <a:latin typeface="Cabinet Grotesk"/>
-              </a:rPr>
-              <a:t>DELIVERED BY THIS TEAM.</a:t>
-            </a:r>
-          </a:p>
-        </p:txBody>
-      </p:sp>
-      <p:sp>
-        <p:nvSpPr>
-          <p:cNvPr id="5" name="TextBox 4"/>
-          <p:cNvSpPr txBox="1"/>
-          <p:nvPr/>
-        </p:nvSpPr>
-        <p:spPr>
-          <a:xfrm>
-            <a:off x="822960" y="2103120"/>
-            <a:ext cx="6035040" cy="274320"/>
-          </a:xfrm>
-          <a:prstGeom prst="rect">
-            <a:avLst/>
-          </a:prstGeom>
-          <a:noFill/>
-        </p:spPr>
-        <p:txBody>
-          <a:bodyPr wrap="square" anchor="t" lIns="0" rIns="0" tIns="0" bIns="0">
-            <a:spAutoFit/>
-          </a:bodyPr>
-          <a:lstStyle/>
-          <a:p>
-            <a:pPr algn="l">
-              <a:lnSpc>
-                <a:spcPct val="100000"/>
-              </a:lnSpc>
-            </a:pPr>
-            <a:r>
-              <a:rPr sz="1300" b="1" spc="40">
-                <a:solidFill>
-                  <a:srgbClr val="FFFFFF"/>
-                </a:solidFill>
-                <a:latin typeface="Cabinet Grotesk"/>
-              </a:rPr>
-              <a:t>TATA CHEMICALS · MAGADI, KENYA</a:t>
-            </a:r>
-          </a:p>
-        </p:txBody>
-      </p:sp>
-      <p:sp>
-        <p:nvSpPr>
-          <p:cNvPr id="6" name="TextBox 5"/>
-          <p:cNvSpPr txBox="1"/>
-          <p:nvPr/>
-        </p:nvSpPr>
-        <p:spPr>
-          <a:xfrm>
-            <a:off x="822960" y="2395728"/>
-            <a:ext cx="6035040" cy="274320"/>
-          </a:xfrm>
-          <a:prstGeom prst="rect">
-            <a:avLst/>
-          </a:prstGeom>
-          <a:noFill/>
-        </p:spPr>
-        <p:txBody>
-          <a:bodyPr wrap="square" anchor="t" lIns="0" rIns="0" tIns="0" bIns="0">
-            <a:spAutoFit/>
-          </a:bodyPr>
-          <a:lstStyle/>
-          <a:p>
-            <a:pPr algn="l">
-              <a:lnSpc>
-                <a:spcPct val="100000"/>
-              </a:lnSpc>
-            </a:pPr>
-            <a:r>
-              <a:rPr sz="900" b="0" spc="120">
-                <a:solidFill>
-                  <a:srgbClr val="8C8C8C"/>
-                </a:solidFill>
-                <a:latin typeface="JetBrains Mono"/>
-              </a:rPr>
-              <a:t>5.1 MWp on-grid solar · grid stabilisation · D&amp;T</a:t>
-            </a:r>
-          </a:p>
-        </p:txBody>
-      </p:sp>
-      <p:sp>
-        <p:nvSpPr>
-          <p:cNvPr id="7" name="Rectangle 6"/>
-          <p:cNvSpPr/>
-          <p:nvPr/>
-        </p:nvSpPr>
-        <p:spPr>
-          <a:xfrm>
-            <a:off x="822960" y="2688336"/>
-            <a:ext cx="6035040" cy="9525"/>
-          </a:xfrm>
-          <a:prstGeom prst="rect">
-            <a:avLst/>
-          </a:prstGeom>
-          <a:solidFill>
-            <a:srgbClr val="5A5A5E"/>
-          </a:solidFill>
-          <a:ln>
-            <a:noFill/>
-          </a:ln>
-          <a:effectLst/>
-        </p:spPr>
-        <p:style>
-          <a:lnRef idx="1">
-            <a:schemeClr val="accent1"/>
-          </a:lnRef>
-          <a:fillRef idx="3">
-            <a:schemeClr val="accent1"/>
-          </a:fillRef>
-          <a:effectRef idx="2">
-            <a:schemeClr val="accent1"/>
-          </a:effectRef>
-          <a:fontRef idx="minor">
-            <a:schemeClr val="lt1"/>
-          </a:fontRef>
-        </p:style>
-        <p:txBody>
-          <a:bodyPr rtlCol="0" anchor="ctr"/>
-          <a:lstStyle/>
-          <a:p>
-            <a:pPr algn="ctr"/>
-          </a:p>
-        </p:txBody>
-      </p:sp>
-      <p:sp>
-        <p:nvSpPr>
-          <p:cNvPr id="8" name="TextBox 7"/>
-          <p:cNvSpPr txBox="1"/>
-          <p:nvPr/>
-        </p:nvSpPr>
-        <p:spPr>
-          <a:xfrm>
-            <a:off x="822960" y="2862072"/>
-            <a:ext cx="6035040" cy="274320"/>
-          </a:xfrm>
-          <a:prstGeom prst="rect">
-            <a:avLst/>
-          </a:prstGeom>
-          <a:noFill/>
-        </p:spPr>
-        <p:txBody>
-          <a:bodyPr wrap="square" anchor="t" lIns="0" rIns="0" tIns="0" bIns="0">
-            <a:spAutoFit/>
-          </a:bodyPr>
-          <a:lstStyle/>
-          <a:p>
-            <a:pPr algn="l">
-              <a:lnSpc>
-                <a:spcPct val="100000"/>
-              </a:lnSpc>
-            </a:pPr>
-            <a:r>
-              <a:rPr sz="1300" b="1" spc="40">
-                <a:solidFill>
-                  <a:srgbClr val="FFFFFF"/>
-                </a:solidFill>
-                <a:latin typeface="Cabinet Grotesk"/>
-              </a:rPr>
-              <a:t>DEVKI GROUP PORTFOLIO · KENYA</a:t>
-            </a:r>
-          </a:p>
-        </p:txBody>
-      </p:sp>
-      <p:sp>
-        <p:nvSpPr>
-          <p:cNvPr id="9" name="TextBox 8"/>
-          <p:cNvSpPr txBox="1"/>
-          <p:nvPr/>
-        </p:nvSpPr>
-        <p:spPr>
-          <a:xfrm>
-            <a:off x="822960" y="3154680"/>
-            <a:ext cx="6035040" cy="274320"/>
-          </a:xfrm>
-          <a:prstGeom prst="rect">
-            <a:avLst/>
-          </a:prstGeom>
-          <a:noFill/>
-        </p:spPr>
-        <p:txBody>
-          <a:bodyPr wrap="square" anchor="t" lIns="0" rIns="0" tIns="0" bIns="0">
-            <a:spAutoFit/>
-          </a:bodyPr>
-          <a:lstStyle/>
-          <a:p>
-            <a:pPr algn="l">
-              <a:lnSpc>
-                <a:spcPct val="100000"/>
-              </a:lnSpc>
-            </a:pPr>
-            <a:r>
-              <a:rPr sz="900" b="0" spc="120">
-                <a:solidFill>
-                  <a:srgbClr val="8C8C8C"/>
-                </a:solidFill>
-                <a:latin typeface="JetBrains Mono"/>
-              </a:rPr>
-              <a:t>3.8 MWp rooftop across 4 manufacturing sites</a:t>
-            </a:r>
-          </a:p>
-        </p:txBody>
-      </p:sp>
-      <p:sp>
-        <p:nvSpPr>
-          <p:cNvPr id="10" name="Rectangle 9"/>
-          <p:cNvSpPr/>
-          <p:nvPr/>
-        </p:nvSpPr>
-        <p:spPr>
-          <a:xfrm>
-            <a:off x="822960" y="3447288"/>
-            <a:ext cx="6035040" cy="9525"/>
-          </a:xfrm>
-          <a:prstGeom prst="rect">
-            <a:avLst/>
-          </a:prstGeom>
-          <a:solidFill>
-            <a:srgbClr val="5A5A5E"/>
-          </a:solidFill>
-          <a:ln>
-            <a:noFill/>
-          </a:ln>
-          <a:effectLst/>
-        </p:spPr>
-        <p:style>
-          <a:lnRef idx="1">
-            <a:schemeClr val="accent1"/>
-          </a:lnRef>
-          <a:fillRef idx="3">
-            <a:schemeClr val="accent1"/>
-          </a:fillRef>
-          <a:effectRef idx="2">
-            <a:schemeClr val="accent1"/>
-          </a:effectRef>
-          <a:fontRef idx="minor">
-            <a:schemeClr val="lt1"/>
-          </a:fontRef>
-        </p:style>
-        <p:txBody>
-          <a:bodyPr rtlCol="0" anchor="ctr"/>
-          <a:lstStyle/>
-          <a:p>
-            <a:pPr algn="ctr"/>
-          </a:p>
-        </p:txBody>
-      </p:sp>
-      <p:sp>
-        <p:nvSpPr>
-          <p:cNvPr id="11" name="TextBox 10"/>
-          <p:cNvSpPr txBox="1"/>
-          <p:nvPr/>
-        </p:nvSpPr>
-        <p:spPr>
-          <a:xfrm>
-            <a:off x="822960" y="3621024"/>
-            <a:ext cx="6035040" cy="274320"/>
-          </a:xfrm>
-          <a:prstGeom prst="rect">
-            <a:avLst/>
-          </a:prstGeom>
-          <a:noFill/>
-        </p:spPr>
-        <p:txBody>
-          <a:bodyPr wrap="square" anchor="t" lIns="0" rIns="0" tIns="0" bIns="0">
-            <a:spAutoFit/>
-          </a:bodyPr>
-          <a:lstStyle/>
-          <a:p>
-            <a:pPr algn="l">
-              <a:lnSpc>
-                <a:spcPct val="100000"/>
-              </a:lnSpc>
-            </a:pPr>
-            <a:r>
-              <a:rPr sz="1300" b="1" spc="40">
-                <a:solidFill>
-                  <a:srgbClr val="FFFFFF"/>
-                </a:solidFill>
-                <a:latin typeface="Cabinet Grotesk"/>
-              </a:rPr>
-              <a:t>TATU CITY SEZ · KENYA</a:t>
-            </a:r>
-          </a:p>
-        </p:txBody>
-      </p:sp>
-      <p:sp>
-        <p:nvSpPr>
-          <p:cNvPr id="12" name="TextBox 11"/>
-          <p:cNvSpPr txBox="1"/>
-          <p:nvPr/>
-        </p:nvSpPr>
-        <p:spPr>
-          <a:xfrm>
-            <a:off x="822960" y="3913632"/>
-            <a:ext cx="6035040" cy="274320"/>
-          </a:xfrm>
-          <a:prstGeom prst="rect">
-            <a:avLst/>
-          </a:prstGeom>
-          <a:noFill/>
-        </p:spPr>
-        <p:txBody>
-          <a:bodyPr wrap="square" anchor="t" lIns="0" rIns="0" tIns="0" bIns="0">
-            <a:spAutoFit/>
-          </a:bodyPr>
-          <a:lstStyle/>
-          <a:p>
-            <a:pPr algn="l">
-              <a:lnSpc>
-                <a:spcPct val="100000"/>
-              </a:lnSpc>
-            </a:pPr>
-            <a:r>
-              <a:rPr sz="900" b="0" spc="120">
-                <a:solidFill>
-                  <a:srgbClr val="8C8C8C"/>
-                </a:solidFill>
-                <a:latin typeface="JetBrains Mono"/>
-              </a:rPr>
-              <a:t>2.05 MW rooftop · 3,468 modules · mixed-use city</a:t>
-            </a:r>
-          </a:p>
-        </p:txBody>
-      </p:sp>
-      <p:sp>
-        <p:nvSpPr>
-          <p:cNvPr id="13" name="Rectangle 12"/>
-          <p:cNvSpPr/>
-          <p:nvPr/>
-        </p:nvSpPr>
-        <p:spPr>
-          <a:xfrm>
-            <a:off x="822960" y="4206240"/>
-            <a:ext cx="6035040" cy="9525"/>
-          </a:xfrm>
-          <a:prstGeom prst="rect">
-            <a:avLst/>
-          </a:prstGeom>
-          <a:solidFill>
-            <a:srgbClr val="5A5A5E"/>
-          </a:solidFill>
-          <a:ln>
-            <a:noFill/>
-          </a:ln>
-          <a:effectLst/>
-        </p:spPr>
-        <p:style>
-          <a:lnRef idx="1">
-            <a:schemeClr val="accent1"/>
-          </a:lnRef>
-          <a:fillRef idx="3">
-            <a:schemeClr val="accent1"/>
-          </a:fillRef>
-          <a:effectRef idx="2">
-            <a:schemeClr val="accent1"/>
-          </a:effectRef>
-          <a:fontRef idx="minor">
-            <a:schemeClr val="lt1"/>
-          </a:fontRef>
-        </p:style>
-        <p:txBody>
-          <a:bodyPr rtlCol="0" anchor="ctr"/>
-          <a:lstStyle/>
-          <a:p>
-            <a:pPr algn="ctr"/>
-          </a:p>
-        </p:txBody>
-      </p:sp>
-      <p:sp>
-        <p:nvSpPr>
-          <p:cNvPr id="14" name="TextBox 13"/>
-          <p:cNvSpPr txBox="1"/>
-          <p:nvPr/>
-        </p:nvSpPr>
-        <p:spPr>
-          <a:xfrm>
-            <a:off x="822960" y="4379976"/>
-            <a:ext cx="6035040" cy="274320"/>
-          </a:xfrm>
-          <a:prstGeom prst="rect">
-            <a:avLst/>
-          </a:prstGeom>
-          <a:noFill/>
-        </p:spPr>
-        <p:txBody>
-          <a:bodyPr wrap="square" anchor="t" lIns="0" rIns="0" tIns="0" bIns="0">
-            <a:spAutoFit/>
-          </a:bodyPr>
-          <a:lstStyle/>
-          <a:p>
-            <a:pPr algn="l">
-              <a:lnSpc>
-                <a:spcPct val="100000"/>
-              </a:lnSpc>
-            </a:pPr>
-            <a:r>
-              <a:rPr sz="1300" b="1" spc="40">
-                <a:solidFill>
-                  <a:srgbClr val="FFFFFF"/>
-                </a:solidFill>
-                <a:latin typeface="Cabinet Grotesk"/>
-              </a:rPr>
-              <a:t>SAJ CERAMICS · KENYA</a:t>
-            </a:r>
-          </a:p>
-        </p:txBody>
-      </p:sp>
-      <p:sp>
-        <p:nvSpPr>
-          <p:cNvPr id="15" name="TextBox 14"/>
-          <p:cNvSpPr txBox="1"/>
-          <p:nvPr/>
-        </p:nvSpPr>
-        <p:spPr>
-          <a:xfrm>
-            <a:off x="822960" y="4672584"/>
-            <a:ext cx="6035040" cy="274320"/>
-          </a:xfrm>
-          <a:prstGeom prst="rect">
-            <a:avLst/>
-          </a:prstGeom>
-          <a:noFill/>
-        </p:spPr>
-        <p:txBody>
-          <a:bodyPr wrap="square" anchor="t" lIns="0" rIns="0" tIns="0" bIns="0">
-            <a:spAutoFit/>
-          </a:bodyPr>
-          <a:lstStyle/>
-          <a:p>
-            <a:pPr algn="l">
-              <a:lnSpc>
-                <a:spcPct val="100000"/>
-              </a:lnSpc>
-            </a:pPr>
-            <a:r>
-              <a:rPr sz="900" b="0" spc="120">
-                <a:solidFill>
-                  <a:srgbClr val="8C8C8C"/>
-                </a:solidFill>
-                <a:latin typeface="JetBrains Mono"/>
-              </a:rPr>
-              <a:t>693 kWp rooftop + genset control</a:t>
-            </a:r>
-          </a:p>
-        </p:txBody>
-      </p:sp>
-      <p:sp>
-        <p:nvSpPr>
-          <p:cNvPr id="16" name="Rectangle 15"/>
-          <p:cNvSpPr/>
-          <p:nvPr/>
-        </p:nvSpPr>
-        <p:spPr>
-          <a:xfrm>
-            <a:off x="822960" y="4965192"/>
-            <a:ext cx="6035040" cy="9525"/>
-          </a:xfrm>
-          <a:prstGeom prst="rect">
-            <a:avLst/>
-          </a:prstGeom>
-          <a:solidFill>
-            <a:srgbClr val="5A5A5E"/>
-          </a:solidFill>
-          <a:ln>
-            <a:noFill/>
-          </a:ln>
-          <a:effectLst/>
-        </p:spPr>
-        <p:style>
-          <a:lnRef idx="1">
-            <a:schemeClr val="accent1"/>
-          </a:lnRef>
-          <a:fillRef idx="3">
-            <a:schemeClr val="accent1"/>
-          </a:fillRef>
-          <a:effectRef idx="2">
-            <a:schemeClr val="accent1"/>
-          </a:effectRef>
-          <a:fontRef idx="minor">
-            <a:schemeClr val="lt1"/>
-          </a:fontRef>
-        </p:style>
-        <p:txBody>
-          <a:bodyPr rtlCol="0" anchor="ctr"/>
-          <a:lstStyle/>
-          <a:p>
-            <a:pPr algn="ctr"/>
-          </a:p>
-        </p:txBody>
-      </p:sp>
-      <p:sp>
-        <p:nvSpPr>
-          <p:cNvPr id="17" name="TextBox 16"/>
-          <p:cNvSpPr txBox="1"/>
-          <p:nvPr/>
-        </p:nvSpPr>
-        <p:spPr>
-          <a:xfrm>
-            <a:off x="822960" y="5138928"/>
-            <a:ext cx="6035040" cy="274320"/>
-          </a:xfrm>
-          <a:prstGeom prst="rect">
-            <a:avLst/>
-          </a:prstGeom>
-          <a:noFill/>
-        </p:spPr>
-        <p:txBody>
-          <a:bodyPr wrap="square" anchor="t" lIns="0" rIns="0" tIns="0" bIns="0">
-            <a:spAutoFit/>
-          </a:bodyPr>
-          <a:lstStyle/>
-          <a:p>
-            <a:pPr algn="l">
-              <a:lnSpc>
-                <a:spcPct val="100000"/>
-              </a:lnSpc>
-            </a:pPr>
-            <a:r>
-              <a:rPr sz="1300" b="1" spc="40">
-                <a:solidFill>
-                  <a:srgbClr val="FFFFFF"/>
-                </a:solidFill>
-                <a:latin typeface="Cabinet Grotesk"/>
-              </a:rPr>
-              <a:t>KINONDO KWETU · DIANI, KENYA</a:t>
-            </a:r>
-          </a:p>
-        </p:txBody>
-      </p:sp>
-      <p:sp>
-        <p:nvSpPr>
-          <p:cNvPr id="18" name="TextBox 17"/>
-          <p:cNvSpPr txBox="1"/>
-          <p:nvPr/>
-        </p:nvSpPr>
-        <p:spPr>
-          <a:xfrm>
-            <a:off x="822960" y="5431536"/>
-            <a:ext cx="6035040" cy="274320"/>
-          </a:xfrm>
-          <a:prstGeom prst="rect">
-            <a:avLst/>
-          </a:prstGeom>
-          <a:noFill/>
-        </p:spPr>
-        <p:txBody>
-          <a:bodyPr wrap="square" anchor="t" lIns="0" rIns="0" tIns="0" bIns="0">
-            <a:spAutoFit/>
-          </a:bodyPr>
-          <a:lstStyle/>
-          <a:p>
-            <a:pPr algn="l">
-              <a:lnSpc>
-                <a:spcPct val="100000"/>
-              </a:lnSpc>
-            </a:pPr>
-            <a:r>
-              <a:rPr sz="900" b="0" spc="120">
-                <a:solidFill>
-                  <a:srgbClr val="8C8C8C"/>
-                </a:solidFill>
-                <a:latin typeface="JetBrains Mono"/>
-              </a:rPr>
-              <a:t>Off-grid solar PV + BESS · diesel displaced</a:t>
-            </a:r>
-          </a:p>
-        </p:txBody>
-      </p:sp>
-      <p:sp>
-        <p:nvSpPr>
-          <p:cNvPr id="19" name="Rectangle 18"/>
-          <p:cNvSpPr/>
-          <p:nvPr/>
-        </p:nvSpPr>
-        <p:spPr>
-          <a:xfrm>
-            <a:off x="822960" y="5724144"/>
-            <a:ext cx="6035040" cy="9525"/>
-          </a:xfrm>
-          <a:prstGeom prst="rect">
-            <a:avLst/>
-          </a:prstGeom>
-          <a:solidFill>
-            <a:srgbClr val="5A5A5E"/>
-          </a:solidFill>
-          <a:ln>
-            <a:noFill/>
-          </a:ln>
-          <a:effectLst/>
-        </p:spPr>
-        <p:style>
-          <a:lnRef idx="1">
-            <a:schemeClr val="accent1"/>
-          </a:lnRef>
-          <a:fillRef idx="3">
-            <a:schemeClr val="accent1"/>
-          </a:fillRef>
-          <a:effectRef idx="2">
-            <a:schemeClr val="accent1"/>
-          </a:effectRef>
-          <a:fontRef idx="minor">
-            <a:schemeClr val="lt1"/>
-          </a:fontRef>
-        </p:style>
-        <p:txBody>
-          <a:bodyPr rtlCol="0" anchor="ctr"/>
-          <a:lstStyle/>
-          <a:p>
-            <a:pPr algn="ctr"/>
-          </a:p>
-        </p:txBody>
-      </p:sp>
-      <p:pic>
-        <p:nvPicPr>
-          <p:cNvPr id="20" name="Picture 19" descr="tata-aerial-top.jpg"/>
-          <p:cNvPicPr>
-            <a:picLocks noChangeAspect="1"/>
-          </p:cNvPicPr>
-          <p:nvPr/>
-        </p:nvPicPr>
-        <p:blipFill>
-          <a:blip r:embed="rId2"/>
-          <a:srcRect t="8000" b="8000"/>
-          <a:stretch>
-            <a:fillRect/>
-          </a:stretch>
-        </p:blipFill>
-        <p:spPr>
-          <a:xfrm>
-            <a:off x="7452360" y="2103120"/>
-            <a:ext cx="3913632" cy="2935224"/>
-          </a:xfrm>
-          <a:prstGeom prst="rect">
-            <a:avLst/>
-          </a:prstGeom>
-        </p:spPr>
-      </p:pic>
-      <p:sp>
-        <p:nvSpPr>
-          <p:cNvPr id="21" name="Rectangle 20"/>
-          <p:cNvSpPr/>
-          <p:nvPr/>
-        </p:nvSpPr>
-        <p:spPr>
-          <a:xfrm>
-            <a:off x="7452360" y="2103120"/>
-            <a:ext cx="3913632" cy="27940"/>
-          </a:xfrm>
-          <a:prstGeom prst="rect">
-            <a:avLst/>
-          </a:prstGeom>
-          <a:solidFill>
-            <a:srgbClr val="D97725"/>
-          </a:solidFill>
-          <a:ln>
-            <a:noFill/>
-          </a:ln>
-          <a:effectLst/>
-        </p:spPr>
-        <p:style>
-          <a:lnRef idx="1">
-            <a:schemeClr val="accent1"/>
-          </a:lnRef>
-          <a:fillRef idx="3">
-            <a:schemeClr val="accent1"/>
-          </a:fillRef>
-          <a:effectRef idx="2">
-            <a:schemeClr val="accent1"/>
-          </a:effectRef>
-          <a:fontRef idx="minor">
-            <a:schemeClr val="lt1"/>
-          </a:fontRef>
-        </p:style>
-        <p:txBody>
-          <a:bodyPr rtlCol="0" anchor="ctr"/>
-          <a:lstStyle/>
-          <a:p>
-            <a:pPr algn="ctr"/>
-          </a:p>
-        </p:txBody>
-      </p:sp>
-      <p:sp>
-        <p:nvSpPr>
-          <p:cNvPr id="22" name="TextBox 21"/>
-          <p:cNvSpPr txBox="1"/>
-          <p:nvPr/>
-        </p:nvSpPr>
-        <p:spPr>
-          <a:xfrm>
-            <a:off x="7452360" y="6144768"/>
-            <a:ext cx="3931920" cy="274320"/>
-          </a:xfrm>
-          <a:prstGeom prst="rect">
-            <a:avLst/>
-          </a:prstGeom>
-          <a:noFill/>
-        </p:spPr>
-        <p:txBody>
-          <a:bodyPr wrap="square" anchor="t" lIns="0" rIns="0" tIns="0" bIns="0">
-            <a:spAutoFit/>
-          </a:bodyPr>
-          <a:lstStyle/>
-          <a:p>
-            <a:pPr algn="l">
-              <a:lnSpc>
-                <a:spcPct val="100000"/>
-              </a:lnSpc>
-            </a:pPr>
-            <a:r>
-              <a:rPr sz="800" b="0" spc="150">
-                <a:solidFill>
-                  <a:srgbClr val="8C8C8C"/>
-                </a:solidFill>
-                <a:latin typeface="JetBrains Mono"/>
-              </a:rPr>
-              <a:t>TATA CHEMICALS MAGADI — 5.1 MWP · COMMISSIONED [2025]</a:t>
-            </a:r>
-          </a:p>
-        </p:txBody>
-      </p:sp>
-      <p:sp>
-        <p:nvSpPr>
-          <p:cNvPr id="23" name="TextBox 22"/>
-          <p:cNvSpPr txBox="1"/>
-          <p:nvPr/>
-        </p:nvSpPr>
-        <p:spPr>
-          <a:xfrm>
-            <a:off x="822960" y="6419088"/>
-            <a:ext cx="7315200" cy="274320"/>
-          </a:xfrm>
-          <a:prstGeom prst="rect">
-            <a:avLst/>
-          </a:prstGeom>
-          <a:noFill/>
-        </p:spPr>
-        <p:txBody>
-          <a:bodyPr wrap="square" anchor="t" lIns="0" rIns="0" tIns="0" bIns="0">
-            <a:spAutoFit/>
-          </a:bodyPr>
-          <a:lstStyle/>
-          <a:p>
-            <a:pPr algn="l">
-              <a:lnSpc>
-                <a:spcPct val="100000"/>
-              </a:lnSpc>
-            </a:pPr>
-            <a:r>
-              <a:rPr sz="800" b="0" spc="200">
-                <a:solidFill>
-                  <a:srgbClr val="8C8C8C"/>
-                </a:solidFill>
-                <a:latin typeface="JetBrains Mono"/>
-              </a:rPr>
-              <a:t>GJW ENERGY — TECHNO-COMMERCIAL PROPOSAL · GJW-TCO-[YYYY]-[NNN]</a:t>
-            </a:r>
-          </a:p>
-        </p:txBody>
-      </p:sp>
-      <p:sp>
-        <p:nvSpPr>
-          <p:cNvPr id="24" name="TextBox 23"/>
-          <p:cNvSpPr txBox="1"/>
-          <p:nvPr/>
-        </p:nvSpPr>
-        <p:spPr>
-          <a:xfrm>
-            <a:off x="11109960" y="6419088"/>
-            <a:ext cx="320040" cy="274320"/>
-          </a:xfrm>
-          <a:prstGeom prst="rect">
-            <a:avLst/>
-          </a:prstGeom>
-          <a:noFill/>
-        </p:spPr>
-        <p:txBody>
-          <a:bodyPr wrap="square" anchor="t" lIns="0" rIns="0" tIns="0" bIns="0">
-            <a:spAutoFit/>
-          </a:bodyPr>
-          <a:lstStyle/>
-          <a:p>
-            <a:pPr algn="r">
-              <a:lnSpc>
-                <a:spcPct val="100000"/>
-              </a:lnSpc>
-            </a:pPr>
-            <a:r>
-              <a:rPr sz="900" b="1" spc="150">
-                <a:solidFill>
-                  <a:srgbClr val="D97725"/>
-                </a:solidFill>
-                <a:latin typeface="JetBrains Mono"/>
-              </a:rPr>
               <a:t>07</a:t>
             </a:r>
           </a:p>
@@ -10079,6 +11508,942 @@
             <a:avLst/>
           </a:prstGeom>
           <a:solidFill>
+            <a:srgbClr val="0A0A0C"/>
+          </a:solidFill>
+          <a:ln>
+            <a:noFill/>
+          </a:ln>
+          <a:effectLst/>
+        </p:spPr>
+        <p:style>
+          <a:lnRef idx="1">
+            <a:schemeClr val="accent1"/>
+          </a:lnRef>
+          <a:fillRef idx="3">
+            <a:schemeClr val="accent1"/>
+          </a:fillRef>
+          <a:effectRef idx="2">
+            <a:schemeClr val="accent1"/>
+          </a:effectRef>
+          <a:fontRef idx="minor">
+            <a:schemeClr val="lt1"/>
+          </a:fontRef>
+        </p:style>
+        <p:txBody>
+          <a:bodyPr rtlCol="0" anchor="ctr"/>
+          <a:lstStyle/>
+          <a:p>
+            <a:pPr algn="ctr"/>
+          </a:p>
+        </p:txBody>
+      </p:sp>
+      <p:sp>
+        <p:nvSpPr>
+          <p:cNvPr id="3" name="TextBox 2"/>
+          <p:cNvSpPr txBox="1"/>
+          <p:nvPr/>
+        </p:nvSpPr>
+        <p:spPr>
+          <a:xfrm>
+            <a:off x="822960" y="566928"/>
+            <a:ext cx="8229600" cy="274320"/>
+          </a:xfrm>
+          <a:prstGeom prst="rect">
+            <a:avLst/>
+          </a:prstGeom>
+          <a:noFill/>
+        </p:spPr>
+        <p:txBody>
+          <a:bodyPr wrap="square" anchor="t" lIns="0" rIns="0" tIns="0" bIns="0">
+            <a:spAutoFit/>
+          </a:bodyPr>
+          <a:lstStyle/>
+          <a:p>
+            <a:pPr algn="l">
+              <a:lnSpc>
+                <a:spcPct val="100000"/>
+              </a:lnSpc>
+            </a:pPr>
+            <a:r>
+              <a:rPr sz="1100" b="1" spc="350">
+                <a:solidFill>
+                  <a:srgbClr val="D97725"/>
+                </a:solidFill>
+                <a:latin typeface="JetBrains Mono"/>
+              </a:rPr>
+              <a:t>07 — PROOF, NOT PROMISES</a:t>
+            </a:r>
+          </a:p>
+        </p:txBody>
+      </p:sp>
+      <p:sp>
+        <p:nvSpPr>
+          <p:cNvPr id="4" name="TextBox 3"/>
+          <p:cNvSpPr txBox="1"/>
+          <p:nvPr/>
+        </p:nvSpPr>
+        <p:spPr>
+          <a:xfrm>
+            <a:off x="822960" y="960120"/>
+            <a:ext cx="10545775" cy="1463040"/>
+          </a:xfrm>
+          <a:prstGeom prst="rect">
+            <a:avLst/>
+          </a:prstGeom>
+          <a:noFill/>
+        </p:spPr>
+        <p:txBody>
+          <a:bodyPr wrap="square" anchor="t" lIns="0" rIns="0" tIns="0" bIns="0">
+            <a:spAutoFit/>
+          </a:bodyPr>
+          <a:lstStyle/>
+          <a:p>
+            <a:pPr algn="l">
+              <a:lnSpc>
+                <a:spcPct val="95000"/>
+              </a:lnSpc>
+            </a:pPr>
+            <a:r>
+              <a:rPr sz="4400" b="1" spc="-10">
+                <a:solidFill>
+                  <a:srgbClr val="FFFFFF"/>
+                </a:solidFill>
+                <a:latin typeface="Cabinet Grotesk"/>
+              </a:rPr>
+              <a:t>DELIVERED BY THIS TEAM.</a:t>
+            </a:r>
+          </a:p>
+        </p:txBody>
+      </p:sp>
+      <p:sp>
+        <p:nvSpPr>
+          <p:cNvPr id="5" name="TextBox 4"/>
+          <p:cNvSpPr txBox="1"/>
+          <p:nvPr/>
+        </p:nvSpPr>
+        <p:spPr>
+          <a:xfrm>
+            <a:off x="822960" y="2103120"/>
+            <a:ext cx="6035040" cy="274320"/>
+          </a:xfrm>
+          <a:prstGeom prst="rect">
+            <a:avLst/>
+          </a:prstGeom>
+          <a:noFill/>
+        </p:spPr>
+        <p:txBody>
+          <a:bodyPr wrap="square" anchor="t" lIns="0" rIns="0" tIns="0" bIns="0">
+            <a:spAutoFit/>
+          </a:bodyPr>
+          <a:lstStyle/>
+          <a:p>
+            <a:pPr algn="l">
+              <a:lnSpc>
+                <a:spcPct val="100000"/>
+              </a:lnSpc>
+            </a:pPr>
+            <a:r>
+              <a:rPr sz="1300" b="1" spc="40">
+                <a:solidFill>
+                  <a:srgbClr val="FFFFFF"/>
+                </a:solidFill>
+                <a:latin typeface="Cabinet Grotesk"/>
+              </a:rPr>
+              <a:t>TATA CHEMICALS · MAGADI, KENYA</a:t>
+            </a:r>
+          </a:p>
+        </p:txBody>
+      </p:sp>
+      <p:sp>
+        <p:nvSpPr>
+          <p:cNvPr id="6" name="TextBox 5"/>
+          <p:cNvSpPr txBox="1"/>
+          <p:nvPr/>
+        </p:nvSpPr>
+        <p:spPr>
+          <a:xfrm>
+            <a:off x="822960" y="2395728"/>
+            <a:ext cx="6035040" cy="274320"/>
+          </a:xfrm>
+          <a:prstGeom prst="rect">
+            <a:avLst/>
+          </a:prstGeom>
+          <a:noFill/>
+        </p:spPr>
+        <p:txBody>
+          <a:bodyPr wrap="square" anchor="t" lIns="0" rIns="0" tIns="0" bIns="0">
+            <a:spAutoFit/>
+          </a:bodyPr>
+          <a:lstStyle/>
+          <a:p>
+            <a:pPr algn="l">
+              <a:lnSpc>
+                <a:spcPct val="100000"/>
+              </a:lnSpc>
+            </a:pPr>
+            <a:r>
+              <a:rPr sz="900" b="0" spc="120">
+                <a:solidFill>
+                  <a:srgbClr val="8C8C8C"/>
+                </a:solidFill>
+                <a:latin typeface="JetBrains Mono"/>
+              </a:rPr>
+              <a:t>5.1 MWp on-grid solar · grid stabilisation · D&amp;T</a:t>
+            </a:r>
+          </a:p>
+        </p:txBody>
+      </p:sp>
+      <p:sp>
+        <p:nvSpPr>
+          <p:cNvPr id="7" name="Rectangle 6"/>
+          <p:cNvSpPr/>
+          <p:nvPr/>
+        </p:nvSpPr>
+        <p:spPr>
+          <a:xfrm>
+            <a:off x="822960" y="2688336"/>
+            <a:ext cx="6035040" cy="9525"/>
+          </a:xfrm>
+          <a:prstGeom prst="rect">
+            <a:avLst/>
+          </a:prstGeom>
+          <a:solidFill>
+            <a:srgbClr val="5A5A5E"/>
+          </a:solidFill>
+          <a:ln>
+            <a:noFill/>
+          </a:ln>
+          <a:effectLst/>
+        </p:spPr>
+        <p:style>
+          <a:lnRef idx="1">
+            <a:schemeClr val="accent1"/>
+          </a:lnRef>
+          <a:fillRef idx="3">
+            <a:schemeClr val="accent1"/>
+          </a:fillRef>
+          <a:effectRef idx="2">
+            <a:schemeClr val="accent1"/>
+          </a:effectRef>
+          <a:fontRef idx="minor">
+            <a:schemeClr val="lt1"/>
+          </a:fontRef>
+        </p:style>
+        <p:txBody>
+          <a:bodyPr rtlCol="0" anchor="ctr"/>
+          <a:lstStyle/>
+          <a:p>
+            <a:pPr algn="ctr"/>
+          </a:p>
+        </p:txBody>
+      </p:sp>
+      <p:sp>
+        <p:nvSpPr>
+          <p:cNvPr id="8" name="TextBox 7"/>
+          <p:cNvSpPr txBox="1"/>
+          <p:nvPr/>
+        </p:nvSpPr>
+        <p:spPr>
+          <a:xfrm>
+            <a:off x="822960" y="2862072"/>
+            <a:ext cx="6035040" cy="274320"/>
+          </a:xfrm>
+          <a:prstGeom prst="rect">
+            <a:avLst/>
+          </a:prstGeom>
+          <a:noFill/>
+        </p:spPr>
+        <p:txBody>
+          <a:bodyPr wrap="square" anchor="t" lIns="0" rIns="0" tIns="0" bIns="0">
+            <a:spAutoFit/>
+          </a:bodyPr>
+          <a:lstStyle/>
+          <a:p>
+            <a:pPr algn="l">
+              <a:lnSpc>
+                <a:spcPct val="100000"/>
+              </a:lnSpc>
+            </a:pPr>
+            <a:r>
+              <a:rPr sz="1300" b="1" spc="40">
+                <a:solidFill>
+                  <a:srgbClr val="FFFFFF"/>
+                </a:solidFill>
+                <a:latin typeface="Cabinet Grotesk"/>
+              </a:rPr>
+              <a:t>DEVKI GROUP PORTFOLIO · KENYA</a:t>
+            </a:r>
+          </a:p>
+        </p:txBody>
+      </p:sp>
+      <p:sp>
+        <p:nvSpPr>
+          <p:cNvPr id="9" name="TextBox 8"/>
+          <p:cNvSpPr txBox="1"/>
+          <p:nvPr/>
+        </p:nvSpPr>
+        <p:spPr>
+          <a:xfrm>
+            <a:off x="822960" y="3154680"/>
+            <a:ext cx="6035040" cy="274320"/>
+          </a:xfrm>
+          <a:prstGeom prst="rect">
+            <a:avLst/>
+          </a:prstGeom>
+          <a:noFill/>
+        </p:spPr>
+        <p:txBody>
+          <a:bodyPr wrap="square" anchor="t" lIns="0" rIns="0" tIns="0" bIns="0">
+            <a:spAutoFit/>
+          </a:bodyPr>
+          <a:lstStyle/>
+          <a:p>
+            <a:pPr algn="l">
+              <a:lnSpc>
+                <a:spcPct val="100000"/>
+              </a:lnSpc>
+            </a:pPr>
+            <a:r>
+              <a:rPr sz="900" b="0" spc="120">
+                <a:solidFill>
+                  <a:srgbClr val="8C8C8C"/>
+                </a:solidFill>
+                <a:latin typeface="JetBrains Mono"/>
+              </a:rPr>
+              <a:t>3.8 MWp rooftop across 4 manufacturing sites</a:t>
+            </a:r>
+          </a:p>
+        </p:txBody>
+      </p:sp>
+      <p:sp>
+        <p:nvSpPr>
+          <p:cNvPr id="10" name="Rectangle 9"/>
+          <p:cNvSpPr/>
+          <p:nvPr/>
+        </p:nvSpPr>
+        <p:spPr>
+          <a:xfrm>
+            <a:off x="822960" y="3447288"/>
+            <a:ext cx="6035040" cy="9525"/>
+          </a:xfrm>
+          <a:prstGeom prst="rect">
+            <a:avLst/>
+          </a:prstGeom>
+          <a:solidFill>
+            <a:srgbClr val="5A5A5E"/>
+          </a:solidFill>
+          <a:ln>
+            <a:noFill/>
+          </a:ln>
+          <a:effectLst/>
+        </p:spPr>
+        <p:style>
+          <a:lnRef idx="1">
+            <a:schemeClr val="accent1"/>
+          </a:lnRef>
+          <a:fillRef idx="3">
+            <a:schemeClr val="accent1"/>
+          </a:fillRef>
+          <a:effectRef idx="2">
+            <a:schemeClr val="accent1"/>
+          </a:effectRef>
+          <a:fontRef idx="minor">
+            <a:schemeClr val="lt1"/>
+          </a:fontRef>
+        </p:style>
+        <p:txBody>
+          <a:bodyPr rtlCol="0" anchor="ctr"/>
+          <a:lstStyle/>
+          <a:p>
+            <a:pPr algn="ctr"/>
+          </a:p>
+        </p:txBody>
+      </p:sp>
+      <p:sp>
+        <p:nvSpPr>
+          <p:cNvPr id="11" name="TextBox 10"/>
+          <p:cNvSpPr txBox="1"/>
+          <p:nvPr/>
+        </p:nvSpPr>
+        <p:spPr>
+          <a:xfrm>
+            <a:off x="822960" y="3621024"/>
+            <a:ext cx="6035040" cy="274320"/>
+          </a:xfrm>
+          <a:prstGeom prst="rect">
+            <a:avLst/>
+          </a:prstGeom>
+          <a:noFill/>
+        </p:spPr>
+        <p:txBody>
+          <a:bodyPr wrap="square" anchor="t" lIns="0" rIns="0" tIns="0" bIns="0">
+            <a:spAutoFit/>
+          </a:bodyPr>
+          <a:lstStyle/>
+          <a:p>
+            <a:pPr algn="l">
+              <a:lnSpc>
+                <a:spcPct val="100000"/>
+              </a:lnSpc>
+            </a:pPr>
+            <a:r>
+              <a:rPr sz="1300" b="1" spc="40">
+                <a:solidFill>
+                  <a:srgbClr val="FFFFFF"/>
+                </a:solidFill>
+                <a:latin typeface="Cabinet Grotesk"/>
+              </a:rPr>
+              <a:t>TATU CITY SEZ · KENYA</a:t>
+            </a:r>
+          </a:p>
+        </p:txBody>
+      </p:sp>
+      <p:sp>
+        <p:nvSpPr>
+          <p:cNvPr id="12" name="TextBox 11"/>
+          <p:cNvSpPr txBox="1"/>
+          <p:nvPr/>
+        </p:nvSpPr>
+        <p:spPr>
+          <a:xfrm>
+            <a:off x="822960" y="3913632"/>
+            <a:ext cx="6035040" cy="274320"/>
+          </a:xfrm>
+          <a:prstGeom prst="rect">
+            <a:avLst/>
+          </a:prstGeom>
+          <a:noFill/>
+        </p:spPr>
+        <p:txBody>
+          <a:bodyPr wrap="square" anchor="t" lIns="0" rIns="0" tIns="0" bIns="0">
+            <a:spAutoFit/>
+          </a:bodyPr>
+          <a:lstStyle/>
+          <a:p>
+            <a:pPr algn="l">
+              <a:lnSpc>
+                <a:spcPct val="100000"/>
+              </a:lnSpc>
+            </a:pPr>
+            <a:r>
+              <a:rPr sz="900" b="0" spc="120">
+                <a:solidFill>
+                  <a:srgbClr val="8C8C8C"/>
+                </a:solidFill>
+                <a:latin typeface="JetBrains Mono"/>
+              </a:rPr>
+              <a:t>2.05 MW rooftop · 3,468 modules · mixed-use city</a:t>
+            </a:r>
+          </a:p>
+        </p:txBody>
+      </p:sp>
+      <p:sp>
+        <p:nvSpPr>
+          <p:cNvPr id="13" name="Rectangle 12"/>
+          <p:cNvSpPr/>
+          <p:nvPr/>
+        </p:nvSpPr>
+        <p:spPr>
+          <a:xfrm>
+            <a:off x="822960" y="4206240"/>
+            <a:ext cx="6035040" cy="9525"/>
+          </a:xfrm>
+          <a:prstGeom prst="rect">
+            <a:avLst/>
+          </a:prstGeom>
+          <a:solidFill>
+            <a:srgbClr val="5A5A5E"/>
+          </a:solidFill>
+          <a:ln>
+            <a:noFill/>
+          </a:ln>
+          <a:effectLst/>
+        </p:spPr>
+        <p:style>
+          <a:lnRef idx="1">
+            <a:schemeClr val="accent1"/>
+          </a:lnRef>
+          <a:fillRef idx="3">
+            <a:schemeClr val="accent1"/>
+          </a:fillRef>
+          <a:effectRef idx="2">
+            <a:schemeClr val="accent1"/>
+          </a:effectRef>
+          <a:fontRef idx="minor">
+            <a:schemeClr val="lt1"/>
+          </a:fontRef>
+        </p:style>
+        <p:txBody>
+          <a:bodyPr rtlCol="0" anchor="ctr"/>
+          <a:lstStyle/>
+          <a:p>
+            <a:pPr algn="ctr"/>
+          </a:p>
+        </p:txBody>
+      </p:sp>
+      <p:sp>
+        <p:nvSpPr>
+          <p:cNvPr id="14" name="TextBox 13"/>
+          <p:cNvSpPr txBox="1"/>
+          <p:nvPr/>
+        </p:nvSpPr>
+        <p:spPr>
+          <a:xfrm>
+            <a:off x="822960" y="4379976"/>
+            <a:ext cx="6035040" cy="274320"/>
+          </a:xfrm>
+          <a:prstGeom prst="rect">
+            <a:avLst/>
+          </a:prstGeom>
+          <a:noFill/>
+        </p:spPr>
+        <p:txBody>
+          <a:bodyPr wrap="square" anchor="t" lIns="0" rIns="0" tIns="0" bIns="0">
+            <a:spAutoFit/>
+          </a:bodyPr>
+          <a:lstStyle/>
+          <a:p>
+            <a:pPr algn="l">
+              <a:lnSpc>
+                <a:spcPct val="100000"/>
+              </a:lnSpc>
+            </a:pPr>
+            <a:r>
+              <a:rPr sz="1300" b="1" spc="40">
+                <a:solidFill>
+                  <a:srgbClr val="FFFFFF"/>
+                </a:solidFill>
+                <a:latin typeface="Cabinet Grotesk"/>
+              </a:rPr>
+              <a:t>SAJ CERAMICS · KENYA</a:t>
+            </a:r>
+          </a:p>
+        </p:txBody>
+      </p:sp>
+      <p:sp>
+        <p:nvSpPr>
+          <p:cNvPr id="15" name="TextBox 14"/>
+          <p:cNvSpPr txBox="1"/>
+          <p:nvPr/>
+        </p:nvSpPr>
+        <p:spPr>
+          <a:xfrm>
+            <a:off x="822960" y="4672584"/>
+            <a:ext cx="6035040" cy="274320"/>
+          </a:xfrm>
+          <a:prstGeom prst="rect">
+            <a:avLst/>
+          </a:prstGeom>
+          <a:noFill/>
+        </p:spPr>
+        <p:txBody>
+          <a:bodyPr wrap="square" anchor="t" lIns="0" rIns="0" tIns="0" bIns="0">
+            <a:spAutoFit/>
+          </a:bodyPr>
+          <a:lstStyle/>
+          <a:p>
+            <a:pPr algn="l">
+              <a:lnSpc>
+                <a:spcPct val="100000"/>
+              </a:lnSpc>
+            </a:pPr>
+            <a:r>
+              <a:rPr sz="900" b="0" spc="120">
+                <a:solidFill>
+                  <a:srgbClr val="8C8C8C"/>
+                </a:solidFill>
+                <a:latin typeface="JetBrains Mono"/>
+              </a:rPr>
+              <a:t>693 kWp rooftop + genset control</a:t>
+            </a:r>
+          </a:p>
+        </p:txBody>
+      </p:sp>
+      <p:sp>
+        <p:nvSpPr>
+          <p:cNvPr id="16" name="Rectangle 15"/>
+          <p:cNvSpPr/>
+          <p:nvPr/>
+        </p:nvSpPr>
+        <p:spPr>
+          <a:xfrm>
+            <a:off x="822960" y="4965192"/>
+            <a:ext cx="6035040" cy="9525"/>
+          </a:xfrm>
+          <a:prstGeom prst="rect">
+            <a:avLst/>
+          </a:prstGeom>
+          <a:solidFill>
+            <a:srgbClr val="5A5A5E"/>
+          </a:solidFill>
+          <a:ln>
+            <a:noFill/>
+          </a:ln>
+          <a:effectLst/>
+        </p:spPr>
+        <p:style>
+          <a:lnRef idx="1">
+            <a:schemeClr val="accent1"/>
+          </a:lnRef>
+          <a:fillRef idx="3">
+            <a:schemeClr val="accent1"/>
+          </a:fillRef>
+          <a:effectRef idx="2">
+            <a:schemeClr val="accent1"/>
+          </a:effectRef>
+          <a:fontRef idx="minor">
+            <a:schemeClr val="lt1"/>
+          </a:fontRef>
+        </p:style>
+        <p:txBody>
+          <a:bodyPr rtlCol="0" anchor="ctr"/>
+          <a:lstStyle/>
+          <a:p>
+            <a:pPr algn="ctr"/>
+          </a:p>
+        </p:txBody>
+      </p:sp>
+      <p:sp>
+        <p:nvSpPr>
+          <p:cNvPr id="17" name="TextBox 16"/>
+          <p:cNvSpPr txBox="1"/>
+          <p:nvPr/>
+        </p:nvSpPr>
+        <p:spPr>
+          <a:xfrm>
+            <a:off x="822960" y="5138928"/>
+            <a:ext cx="6035040" cy="274320"/>
+          </a:xfrm>
+          <a:prstGeom prst="rect">
+            <a:avLst/>
+          </a:prstGeom>
+          <a:noFill/>
+        </p:spPr>
+        <p:txBody>
+          <a:bodyPr wrap="square" anchor="t" lIns="0" rIns="0" tIns="0" bIns="0">
+            <a:spAutoFit/>
+          </a:bodyPr>
+          <a:lstStyle/>
+          <a:p>
+            <a:pPr algn="l">
+              <a:lnSpc>
+                <a:spcPct val="100000"/>
+              </a:lnSpc>
+            </a:pPr>
+            <a:r>
+              <a:rPr sz="1300" b="1" spc="40">
+                <a:solidFill>
+                  <a:srgbClr val="FFFFFF"/>
+                </a:solidFill>
+                <a:latin typeface="Cabinet Grotesk"/>
+              </a:rPr>
+              <a:t>KINONDO KWETU · DIANI, KENYA</a:t>
+            </a:r>
+          </a:p>
+        </p:txBody>
+      </p:sp>
+      <p:sp>
+        <p:nvSpPr>
+          <p:cNvPr id="18" name="TextBox 17"/>
+          <p:cNvSpPr txBox="1"/>
+          <p:nvPr/>
+        </p:nvSpPr>
+        <p:spPr>
+          <a:xfrm>
+            <a:off x="822960" y="5431536"/>
+            <a:ext cx="6035040" cy="274320"/>
+          </a:xfrm>
+          <a:prstGeom prst="rect">
+            <a:avLst/>
+          </a:prstGeom>
+          <a:noFill/>
+        </p:spPr>
+        <p:txBody>
+          <a:bodyPr wrap="square" anchor="t" lIns="0" rIns="0" tIns="0" bIns="0">
+            <a:spAutoFit/>
+          </a:bodyPr>
+          <a:lstStyle/>
+          <a:p>
+            <a:pPr algn="l">
+              <a:lnSpc>
+                <a:spcPct val="100000"/>
+              </a:lnSpc>
+            </a:pPr>
+            <a:r>
+              <a:rPr sz="900" b="0" spc="120">
+                <a:solidFill>
+                  <a:srgbClr val="8C8C8C"/>
+                </a:solidFill>
+                <a:latin typeface="JetBrains Mono"/>
+              </a:rPr>
+              <a:t>Off-grid solar PV + BESS · diesel displaced</a:t>
+            </a:r>
+          </a:p>
+        </p:txBody>
+      </p:sp>
+      <p:sp>
+        <p:nvSpPr>
+          <p:cNvPr id="19" name="Rectangle 18"/>
+          <p:cNvSpPr/>
+          <p:nvPr/>
+        </p:nvSpPr>
+        <p:spPr>
+          <a:xfrm>
+            <a:off x="822960" y="5724144"/>
+            <a:ext cx="6035040" cy="9525"/>
+          </a:xfrm>
+          <a:prstGeom prst="rect">
+            <a:avLst/>
+          </a:prstGeom>
+          <a:solidFill>
+            <a:srgbClr val="5A5A5E"/>
+          </a:solidFill>
+          <a:ln>
+            <a:noFill/>
+          </a:ln>
+          <a:effectLst/>
+        </p:spPr>
+        <p:style>
+          <a:lnRef idx="1">
+            <a:schemeClr val="accent1"/>
+          </a:lnRef>
+          <a:fillRef idx="3">
+            <a:schemeClr val="accent1"/>
+          </a:fillRef>
+          <a:effectRef idx="2">
+            <a:schemeClr val="accent1"/>
+          </a:effectRef>
+          <a:fontRef idx="minor">
+            <a:schemeClr val="lt1"/>
+          </a:fontRef>
+        </p:style>
+        <p:txBody>
+          <a:bodyPr rtlCol="0" anchor="ctr"/>
+          <a:lstStyle/>
+          <a:p>
+            <a:pPr algn="ctr"/>
+          </a:p>
+        </p:txBody>
+      </p:sp>
+      <p:pic>
+        <p:nvPicPr>
+          <p:cNvPr id="20" name="Picture 19" descr="tata-aerial-top.jpg"/>
+          <p:cNvPicPr>
+            <a:picLocks noChangeAspect="1"/>
+          </p:cNvPicPr>
+          <p:nvPr/>
+        </p:nvPicPr>
+        <p:blipFill>
+          <a:blip r:embed="rId2"/>
+          <a:srcRect t="8000" b="8000"/>
+          <a:stretch>
+            <a:fillRect/>
+          </a:stretch>
+        </p:blipFill>
+        <p:spPr>
+          <a:xfrm>
+            <a:off x="7452360" y="2103120"/>
+            <a:ext cx="3913632" cy="2935224"/>
+          </a:xfrm>
+          <a:prstGeom prst="rect">
+            <a:avLst/>
+          </a:prstGeom>
+        </p:spPr>
+      </p:pic>
+      <p:sp>
+        <p:nvSpPr>
+          <p:cNvPr id="21" name="Rectangle 20"/>
+          <p:cNvSpPr/>
+          <p:nvPr/>
+        </p:nvSpPr>
+        <p:spPr>
+          <a:xfrm>
+            <a:off x="7452360" y="2103120"/>
+            <a:ext cx="3913632" cy="27940"/>
+          </a:xfrm>
+          <a:prstGeom prst="rect">
+            <a:avLst/>
+          </a:prstGeom>
+          <a:solidFill>
+            <a:srgbClr val="D97725"/>
+          </a:solidFill>
+          <a:ln>
+            <a:noFill/>
+          </a:ln>
+          <a:effectLst/>
+        </p:spPr>
+        <p:style>
+          <a:lnRef idx="1">
+            <a:schemeClr val="accent1"/>
+          </a:lnRef>
+          <a:fillRef idx="3">
+            <a:schemeClr val="accent1"/>
+          </a:fillRef>
+          <a:effectRef idx="2">
+            <a:schemeClr val="accent1"/>
+          </a:effectRef>
+          <a:fontRef idx="minor">
+            <a:schemeClr val="lt1"/>
+          </a:fontRef>
+        </p:style>
+        <p:txBody>
+          <a:bodyPr rtlCol="0" anchor="ctr"/>
+          <a:lstStyle/>
+          <a:p>
+            <a:pPr algn="ctr"/>
+          </a:p>
+        </p:txBody>
+      </p:sp>
+      <p:sp>
+        <p:nvSpPr>
+          <p:cNvPr id="22" name="TextBox 21"/>
+          <p:cNvSpPr txBox="1"/>
+          <p:nvPr/>
+        </p:nvSpPr>
+        <p:spPr>
+          <a:xfrm>
+            <a:off x="7452360" y="6144768"/>
+            <a:ext cx="3931920" cy="274320"/>
+          </a:xfrm>
+          <a:prstGeom prst="rect">
+            <a:avLst/>
+          </a:prstGeom>
+          <a:noFill/>
+        </p:spPr>
+        <p:txBody>
+          <a:bodyPr wrap="square" anchor="t" lIns="0" rIns="0" tIns="0" bIns="0">
+            <a:spAutoFit/>
+          </a:bodyPr>
+          <a:lstStyle/>
+          <a:p>
+            <a:pPr algn="l">
+              <a:lnSpc>
+                <a:spcPct val="100000"/>
+              </a:lnSpc>
+            </a:pPr>
+            <a:r>
+              <a:rPr sz="800" b="0" spc="150">
+                <a:solidFill>
+                  <a:srgbClr val="8C8C8C"/>
+                </a:solidFill>
+                <a:latin typeface="JetBrains Mono"/>
+              </a:rPr>
+              <a:t>TATA CHEMICALS MAGADI — 5.1 MWP · COMMISSIONED [2025]</a:t>
+            </a:r>
+          </a:p>
+        </p:txBody>
+      </p:sp>
+      <p:sp>
+        <p:nvSpPr>
+          <p:cNvPr id="23" name="TextBox 22"/>
+          <p:cNvSpPr txBox="1"/>
+          <p:nvPr/>
+        </p:nvSpPr>
+        <p:spPr>
+          <a:xfrm>
+            <a:off x="822960" y="6419088"/>
+            <a:ext cx="7315200" cy="274320"/>
+          </a:xfrm>
+          <a:prstGeom prst="rect">
+            <a:avLst/>
+          </a:prstGeom>
+          <a:noFill/>
+        </p:spPr>
+        <p:txBody>
+          <a:bodyPr wrap="square" anchor="t" lIns="0" rIns="0" tIns="0" bIns="0">
+            <a:spAutoFit/>
+          </a:bodyPr>
+          <a:lstStyle/>
+          <a:p>
+            <a:pPr algn="l">
+              <a:lnSpc>
+                <a:spcPct val="100000"/>
+              </a:lnSpc>
+            </a:pPr>
+            <a:r>
+              <a:rPr sz="800" b="0" spc="200">
+                <a:solidFill>
+                  <a:srgbClr val="8C8C8C"/>
+                </a:solidFill>
+                <a:latin typeface="JetBrains Mono"/>
+              </a:rPr>
+              <a:t>GJW ENERGY — TECHNO-COMMERCIAL PROPOSAL · GJW-TCO-[YYYY]-[NNN]</a:t>
+            </a:r>
+          </a:p>
+        </p:txBody>
+      </p:sp>
+      <p:sp>
+        <p:nvSpPr>
+          <p:cNvPr id="24" name="TextBox 23"/>
+          <p:cNvSpPr txBox="1"/>
+          <p:nvPr/>
+        </p:nvSpPr>
+        <p:spPr>
+          <a:xfrm>
+            <a:off x="11109960" y="6419088"/>
+            <a:ext cx="320040" cy="274320"/>
+          </a:xfrm>
+          <a:prstGeom prst="rect">
+            <a:avLst/>
+          </a:prstGeom>
+          <a:noFill/>
+        </p:spPr>
+        <p:txBody>
+          <a:bodyPr wrap="square" anchor="t" lIns="0" rIns="0" tIns="0" bIns="0">
+            <a:spAutoFit/>
+          </a:bodyPr>
+          <a:lstStyle/>
+          <a:p>
+            <a:pPr algn="r">
+              <a:lnSpc>
+                <a:spcPct val="100000"/>
+              </a:lnSpc>
+            </a:pPr>
+            <a:r>
+              <a:rPr sz="900" b="1" spc="150">
+                <a:solidFill>
+                  <a:srgbClr val="D97725"/>
+                </a:solidFill>
+                <a:latin typeface="JetBrains Mono"/>
+              </a:rPr>
+              <a:t>08</a:t>
+            </a:r>
+          </a:p>
+        </p:txBody>
+      </p:sp>
+    </p:spTree>
+  </p:cSld>
+  <p:clrMapOvr>
+    <a:masterClrMapping/>
+  </p:clrMapOvr>
+</p:sld>
+</file>
+
+<file path=ppt/slides/slide9.xml><?xml version="1.0" encoding="utf-8"?>
+<p:sld xmlns:a="http://schemas.openxmlformats.org/drawingml/2006/main" xmlns:p="http://schemas.openxmlformats.org/presentationml/2006/main" xmlns:r="http://schemas.openxmlformats.org/officeDocument/2006/relationships">
+  <p:cSld>
+    <p:spTree>
+      <p:nvGrpSpPr>
+        <p:cNvPr id="1" name=""/>
+        <p:cNvGrpSpPr/>
+        <p:nvPr/>
+      </p:nvGrpSpPr>
+      <p:grpSpPr/>
+      <p:sp>
+        <p:nvSpPr>
+          <p:cNvPr id="2" name="Rectangle 1"/>
+          <p:cNvSpPr/>
+          <p:nvPr/>
+        </p:nvSpPr>
+        <p:spPr>
+          <a:xfrm>
+            <a:off x="0" y="0"/>
+            <a:ext cx="12191695" cy="6858000"/>
+          </a:xfrm>
+          <a:prstGeom prst="rect">
+            <a:avLst/>
+          </a:prstGeom>
+          <a:solidFill>
             <a:srgbClr val="F7F7F5"/>
           </a:solidFill>
           <a:ln>
@@ -10142,7 +12507,7 @@
                 </a:solidFill>
                 <a:latin typeface="JetBrains Mono"/>
               </a:rPr>
-              <a:t>07 — COMMERCIAL OFFER</a:t>
+              <a:t>08 — COMMERCIAL OFFER</a:t>
             </a:r>
           </a:p>
         </p:txBody>
@@ -10976,1322 +13341,6 @@
                 </a:solidFill>
                 <a:latin typeface="JetBrains Mono"/>
               </a:rPr>
-              <a:t>08</a:t>
-            </a:r>
-          </a:p>
-        </p:txBody>
-      </p:sp>
-    </p:spTree>
-  </p:cSld>
-  <p:clrMapOvr>
-    <a:masterClrMapping/>
-  </p:clrMapOvr>
-</p:sld>
-</file>
-
-<file path=ppt/slides/slide9.xml><?xml version="1.0" encoding="utf-8"?>
-<p:sld xmlns:a="http://schemas.openxmlformats.org/drawingml/2006/main" xmlns:p="http://schemas.openxmlformats.org/presentationml/2006/main" xmlns:r="http://schemas.openxmlformats.org/officeDocument/2006/relationships">
-  <p:cSld>
-    <p:spTree>
-      <p:nvGrpSpPr>
-        <p:cNvPr id="1" name=""/>
-        <p:cNvGrpSpPr/>
-        <p:nvPr/>
-      </p:nvGrpSpPr>
-      <p:grpSpPr/>
-      <p:sp>
-        <p:nvSpPr>
-          <p:cNvPr id="2" name="Rectangle 1"/>
-          <p:cNvSpPr/>
-          <p:nvPr/>
-        </p:nvSpPr>
-        <p:spPr>
-          <a:xfrm>
-            <a:off x="0" y="0"/>
-            <a:ext cx="12191695" cy="6858000"/>
-          </a:xfrm>
-          <a:prstGeom prst="rect">
-            <a:avLst/>
-          </a:prstGeom>
-          <a:solidFill>
-            <a:srgbClr val="F7F7F5"/>
-          </a:solidFill>
-          <a:ln>
-            <a:noFill/>
-          </a:ln>
-          <a:effectLst/>
-        </p:spPr>
-        <p:style>
-          <a:lnRef idx="1">
-            <a:schemeClr val="accent1"/>
-          </a:lnRef>
-          <a:fillRef idx="3">
-            <a:schemeClr val="accent1"/>
-          </a:fillRef>
-          <a:effectRef idx="2">
-            <a:schemeClr val="accent1"/>
-          </a:effectRef>
-          <a:fontRef idx="minor">
-            <a:schemeClr val="lt1"/>
-          </a:fontRef>
-        </p:style>
-        <p:txBody>
-          <a:bodyPr rtlCol="0" anchor="ctr"/>
-          <a:lstStyle/>
-          <a:p>
-            <a:pPr algn="ctr"/>
-          </a:p>
-        </p:txBody>
-      </p:sp>
-      <p:sp>
-        <p:nvSpPr>
-          <p:cNvPr id="3" name="TextBox 2"/>
-          <p:cNvSpPr txBox="1"/>
-          <p:nvPr/>
-        </p:nvSpPr>
-        <p:spPr>
-          <a:xfrm>
-            <a:off x="822960" y="566928"/>
-            <a:ext cx="8229600" cy="274320"/>
-          </a:xfrm>
-          <a:prstGeom prst="rect">
-            <a:avLst/>
-          </a:prstGeom>
-          <a:noFill/>
-        </p:spPr>
-        <p:txBody>
-          <a:bodyPr wrap="square" anchor="t" lIns="0" rIns="0" tIns="0" bIns="0">
-            <a:spAutoFit/>
-          </a:bodyPr>
-          <a:lstStyle/>
-          <a:p>
-            <a:pPr algn="l">
-              <a:lnSpc>
-                <a:spcPct val="100000"/>
-              </a:lnSpc>
-            </a:pPr>
-            <a:r>
-              <a:rPr sz="1100" b="1" spc="350">
-                <a:solidFill>
-                  <a:srgbClr val="D97725"/>
-                </a:solidFill>
-                <a:latin typeface="JetBrains Mono"/>
-              </a:rPr>
-              <a:t>08 — COMMERCIAL TERMS</a:t>
-            </a:r>
-          </a:p>
-        </p:txBody>
-      </p:sp>
-      <p:sp>
-        <p:nvSpPr>
-          <p:cNvPr id="4" name="TextBox 3"/>
-          <p:cNvSpPr txBox="1"/>
-          <p:nvPr/>
-        </p:nvSpPr>
-        <p:spPr>
-          <a:xfrm>
-            <a:off x="822960" y="960120"/>
-            <a:ext cx="10545775" cy="1463040"/>
-          </a:xfrm>
-          <a:prstGeom prst="rect">
-            <a:avLst/>
-          </a:prstGeom>
-          <a:noFill/>
-        </p:spPr>
-        <p:txBody>
-          <a:bodyPr wrap="square" anchor="t" lIns="0" rIns="0" tIns="0" bIns="0">
-            <a:spAutoFit/>
-          </a:bodyPr>
-          <a:lstStyle/>
-          <a:p>
-            <a:pPr algn="l">
-              <a:lnSpc>
-                <a:spcPct val="95000"/>
-              </a:lnSpc>
-            </a:pPr>
-            <a:r>
-              <a:rPr sz="4400" b="1" spc="-10">
-                <a:solidFill>
-                  <a:srgbClr val="0A0A0C"/>
-                </a:solidFill>
-                <a:latin typeface="Cabinet Grotesk"/>
-              </a:rPr>
-              <a:t>CLEAR TERMS. NO SURPRISES.</a:t>
-            </a:r>
-          </a:p>
-        </p:txBody>
-      </p:sp>
-      <p:sp>
-        <p:nvSpPr>
-          <p:cNvPr id="5" name="Rectangle 4"/>
-          <p:cNvSpPr/>
-          <p:nvPr/>
-        </p:nvSpPr>
-        <p:spPr>
-          <a:xfrm>
-            <a:off x="822960" y="2148840"/>
-            <a:ext cx="2377440" cy="19050"/>
-          </a:xfrm>
-          <a:prstGeom prst="rect">
-            <a:avLst/>
-          </a:prstGeom>
-          <a:solidFill>
-            <a:srgbClr val="0A0A0C"/>
-          </a:solidFill>
-          <a:ln>
-            <a:noFill/>
-          </a:ln>
-          <a:effectLst/>
-        </p:spPr>
-        <p:style>
-          <a:lnRef idx="1">
-            <a:schemeClr val="accent1"/>
-          </a:lnRef>
-          <a:fillRef idx="3">
-            <a:schemeClr val="accent1"/>
-          </a:fillRef>
-          <a:effectRef idx="2">
-            <a:schemeClr val="accent1"/>
-          </a:effectRef>
-          <a:fontRef idx="minor">
-            <a:schemeClr val="lt1"/>
-          </a:fontRef>
-        </p:style>
-        <p:txBody>
-          <a:bodyPr rtlCol="0" anchor="ctr"/>
-          <a:lstStyle/>
-          <a:p>
-            <a:pPr algn="ctr"/>
-          </a:p>
-        </p:txBody>
-      </p:sp>
-      <p:sp>
-        <p:nvSpPr>
-          <p:cNvPr id="6" name="TextBox 5"/>
-          <p:cNvSpPr txBox="1"/>
-          <p:nvPr/>
-        </p:nvSpPr>
-        <p:spPr>
-          <a:xfrm>
-            <a:off x="822960" y="2286000"/>
-            <a:ext cx="2377440" cy="457200"/>
-          </a:xfrm>
-          <a:prstGeom prst="rect">
-            <a:avLst/>
-          </a:prstGeom>
-          <a:noFill/>
-        </p:spPr>
-        <p:txBody>
-          <a:bodyPr wrap="square" anchor="t" lIns="0" rIns="0" tIns="0" bIns="0">
-            <a:spAutoFit/>
-          </a:bodyPr>
-          <a:lstStyle/>
-          <a:p>
-            <a:pPr algn="l">
-              <a:lnSpc>
-                <a:spcPct val="100000"/>
-              </a:lnSpc>
-            </a:pPr>
-            <a:r>
-              <a:rPr sz="2600" b="1" spc="-10">
-                <a:solidFill>
-                  <a:srgbClr val="D97725"/>
-                </a:solidFill>
-                <a:latin typeface="Cabinet Grotesk"/>
-              </a:rPr>
-              <a:t>30%</a:t>
-            </a:r>
-          </a:p>
-        </p:txBody>
-      </p:sp>
-      <p:sp>
-        <p:nvSpPr>
-          <p:cNvPr id="7" name="TextBox 6"/>
-          <p:cNvSpPr txBox="1"/>
-          <p:nvPr/>
-        </p:nvSpPr>
-        <p:spPr>
-          <a:xfrm>
-            <a:off x="822960" y="2788920"/>
-            <a:ext cx="2331720" cy="640080"/>
-          </a:xfrm>
-          <a:prstGeom prst="rect">
-            <a:avLst/>
-          </a:prstGeom>
-          <a:noFill/>
-        </p:spPr>
-        <p:txBody>
-          <a:bodyPr wrap="square" anchor="t" lIns="0" rIns="0" tIns="0" bIns="0">
-            <a:spAutoFit/>
-          </a:bodyPr>
-          <a:lstStyle/>
-          <a:p>
-            <a:pPr algn="l">
-              <a:lnSpc>
-                <a:spcPct val="125000"/>
-              </a:lnSpc>
-            </a:pPr>
-            <a:r>
-              <a:rPr sz="900" b="0" spc="150">
-                <a:solidFill>
-                  <a:srgbClr val="737371"/>
-                </a:solidFill>
-                <a:latin typeface="JetBrains Mono"/>
-              </a:rPr>
-              <a:t>CONTRACT SIGNATURE &amp; MOBILISATION</a:t>
-            </a:r>
-          </a:p>
-        </p:txBody>
-      </p:sp>
-      <p:sp>
-        <p:nvSpPr>
-          <p:cNvPr id="8" name="Rectangle 7"/>
-          <p:cNvSpPr/>
-          <p:nvPr/>
-        </p:nvSpPr>
-        <p:spPr>
-          <a:xfrm>
-            <a:off x="3547872" y="2148840"/>
-            <a:ext cx="2377440" cy="19050"/>
-          </a:xfrm>
-          <a:prstGeom prst="rect">
-            <a:avLst/>
-          </a:prstGeom>
-          <a:solidFill>
-            <a:srgbClr val="0A0A0C"/>
-          </a:solidFill>
-          <a:ln>
-            <a:noFill/>
-          </a:ln>
-          <a:effectLst/>
-        </p:spPr>
-        <p:style>
-          <a:lnRef idx="1">
-            <a:schemeClr val="accent1"/>
-          </a:lnRef>
-          <a:fillRef idx="3">
-            <a:schemeClr val="accent1"/>
-          </a:fillRef>
-          <a:effectRef idx="2">
-            <a:schemeClr val="accent1"/>
-          </a:effectRef>
-          <a:fontRef idx="minor">
-            <a:schemeClr val="lt1"/>
-          </a:fontRef>
-        </p:style>
-        <p:txBody>
-          <a:bodyPr rtlCol="0" anchor="ctr"/>
-          <a:lstStyle/>
-          <a:p>
-            <a:pPr algn="ctr"/>
-          </a:p>
-        </p:txBody>
-      </p:sp>
-      <p:sp>
-        <p:nvSpPr>
-          <p:cNvPr id="9" name="TextBox 8"/>
-          <p:cNvSpPr txBox="1"/>
-          <p:nvPr/>
-        </p:nvSpPr>
-        <p:spPr>
-          <a:xfrm>
-            <a:off x="3547872" y="2286000"/>
-            <a:ext cx="2377440" cy="457200"/>
-          </a:xfrm>
-          <a:prstGeom prst="rect">
-            <a:avLst/>
-          </a:prstGeom>
-          <a:noFill/>
-        </p:spPr>
-        <p:txBody>
-          <a:bodyPr wrap="square" anchor="t" lIns="0" rIns="0" tIns="0" bIns="0">
-            <a:spAutoFit/>
-          </a:bodyPr>
-          <a:lstStyle/>
-          <a:p>
-            <a:pPr algn="l">
-              <a:lnSpc>
-                <a:spcPct val="100000"/>
-              </a:lnSpc>
-            </a:pPr>
-            <a:r>
-              <a:rPr sz="2600" b="1" spc="-10">
-                <a:solidFill>
-                  <a:srgbClr val="D97725"/>
-                </a:solidFill>
-                <a:latin typeface="Cabinet Grotesk"/>
-              </a:rPr>
-              <a:t>40%</a:t>
-            </a:r>
-          </a:p>
-        </p:txBody>
-      </p:sp>
-      <p:sp>
-        <p:nvSpPr>
-          <p:cNvPr id="10" name="TextBox 9"/>
-          <p:cNvSpPr txBox="1"/>
-          <p:nvPr/>
-        </p:nvSpPr>
-        <p:spPr>
-          <a:xfrm>
-            <a:off x="3547872" y="2788920"/>
-            <a:ext cx="2331720" cy="640080"/>
-          </a:xfrm>
-          <a:prstGeom prst="rect">
-            <a:avLst/>
-          </a:prstGeom>
-          <a:noFill/>
-        </p:spPr>
-        <p:txBody>
-          <a:bodyPr wrap="square" anchor="t" lIns="0" rIns="0" tIns="0" bIns="0">
-            <a:spAutoFit/>
-          </a:bodyPr>
-          <a:lstStyle/>
-          <a:p>
-            <a:pPr algn="l">
-              <a:lnSpc>
-                <a:spcPct val="125000"/>
-              </a:lnSpc>
-            </a:pPr>
-            <a:r>
-              <a:rPr sz="900" b="0" spc="150">
-                <a:solidFill>
-                  <a:srgbClr val="737371"/>
-                </a:solidFill>
-                <a:latin typeface="JetBrains Mono"/>
-              </a:rPr>
-              <a:t>MAJOR EQUIPMENT DELIVERED TO SITE</a:t>
-            </a:r>
-          </a:p>
-        </p:txBody>
-      </p:sp>
-      <p:sp>
-        <p:nvSpPr>
-          <p:cNvPr id="11" name="Rectangle 10"/>
-          <p:cNvSpPr/>
-          <p:nvPr/>
-        </p:nvSpPr>
-        <p:spPr>
-          <a:xfrm>
-            <a:off x="6272784" y="2148840"/>
-            <a:ext cx="2377440" cy="19050"/>
-          </a:xfrm>
-          <a:prstGeom prst="rect">
-            <a:avLst/>
-          </a:prstGeom>
-          <a:solidFill>
-            <a:srgbClr val="0A0A0C"/>
-          </a:solidFill>
-          <a:ln>
-            <a:noFill/>
-          </a:ln>
-          <a:effectLst/>
-        </p:spPr>
-        <p:style>
-          <a:lnRef idx="1">
-            <a:schemeClr val="accent1"/>
-          </a:lnRef>
-          <a:fillRef idx="3">
-            <a:schemeClr val="accent1"/>
-          </a:fillRef>
-          <a:effectRef idx="2">
-            <a:schemeClr val="accent1"/>
-          </a:effectRef>
-          <a:fontRef idx="minor">
-            <a:schemeClr val="lt1"/>
-          </a:fontRef>
-        </p:style>
-        <p:txBody>
-          <a:bodyPr rtlCol="0" anchor="ctr"/>
-          <a:lstStyle/>
-          <a:p>
-            <a:pPr algn="ctr"/>
-          </a:p>
-        </p:txBody>
-      </p:sp>
-      <p:sp>
-        <p:nvSpPr>
-          <p:cNvPr id="12" name="TextBox 11"/>
-          <p:cNvSpPr txBox="1"/>
-          <p:nvPr/>
-        </p:nvSpPr>
-        <p:spPr>
-          <a:xfrm>
-            <a:off x="6272784" y="2286000"/>
-            <a:ext cx="2377440" cy="457200"/>
-          </a:xfrm>
-          <a:prstGeom prst="rect">
-            <a:avLst/>
-          </a:prstGeom>
-          <a:noFill/>
-        </p:spPr>
-        <p:txBody>
-          <a:bodyPr wrap="square" anchor="t" lIns="0" rIns="0" tIns="0" bIns="0">
-            <a:spAutoFit/>
-          </a:bodyPr>
-          <a:lstStyle/>
-          <a:p>
-            <a:pPr algn="l">
-              <a:lnSpc>
-                <a:spcPct val="100000"/>
-              </a:lnSpc>
-            </a:pPr>
-            <a:r>
-              <a:rPr sz="2600" b="1" spc="-10">
-                <a:solidFill>
-                  <a:srgbClr val="D97725"/>
-                </a:solidFill>
-                <a:latin typeface="Cabinet Grotesk"/>
-              </a:rPr>
-              <a:t>20%</a:t>
-            </a:r>
-          </a:p>
-        </p:txBody>
-      </p:sp>
-      <p:sp>
-        <p:nvSpPr>
-          <p:cNvPr id="13" name="TextBox 12"/>
-          <p:cNvSpPr txBox="1"/>
-          <p:nvPr/>
-        </p:nvSpPr>
-        <p:spPr>
-          <a:xfrm>
-            <a:off x="6272784" y="2788920"/>
-            <a:ext cx="2331720" cy="640080"/>
-          </a:xfrm>
-          <a:prstGeom prst="rect">
-            <a:avLst/>
-          </a:prstGeom>
-          <a:noFill/>
-        </p:spPr>
-        <p:txBody>
-          <a:bodyPr wrap="square" anchor="t" lIns="0" rIns="0" tIns="0" bIns="0">
-            <a:spAutoFit/>
-          </a:bodyPr>
-          <a:lstStyle/>
-          <a:p>
-            <a:pPr algn="l">
-              <a:lnSpc>
-                <a:spcPct val="125000"/>
-              </a:lnSpc>
-            </a:pPr>
-            <a:r>
-              <a:rPr sz="900" b="0" spc="150">
-                <a:solidFill>
-                  <a:srgbClr val="737371"/>
-                </a:solidFill>
-                <a:latin typeface="JetBrains Mono"/>
-              </a:rPr>
-              <a:t>MECHANICAL COMPLETION</a:t>
-            </a:r>
-          </a:p>
-        </p:txBody>
-      </p:sp>
-      <p:sp>
-        <p:nvSpPr>
-          <p:cNvPr id="14" name="Rectangle 13"/>
-          <p:cNvSpPr/>
-          <p:nvPr/>
-        </p:nvSpPr>
-        <p:spPr>
-          <a:xfrm>
-            <a:off x="8997696" y="2148840"/>
-            <a:ext cx="2377440" cy="19050"/>
-          </a:xfrm>
-          <a:prstGeom prst="rect">
-            <a:avLst/>
-          </a:prstGeom>
-          <a:solidFill>
-            <a:srgbClr val="0A0A0C"/>
-          </a:solidFill>
-          <a:ln>
-            <a:noFill/>
-          </a:ln>
-          <a:effectLst/>
-        </p:spPr>
-        <p:style>
-          <a:lnRef idx="1">
-            <a:schemeClr val="accent1"/>
-          </a:lnRef>
-          <a:fillRef idx="3">
-            <a:schemeClr val="accent1"/>
-          </a:fillRef>
-          <a:effectRef idx="2">
-            <a:schemeClr val="accent1"/>
-          </a:effectRef>
-          <a:fontRef idx="minor">
-            <a:schemeClr val="lt1"/>
-          </a:fontRef>
-        </p:style>
-        <p:txBody>
-          <a:bodyPr rtlCol="0" anchor="ctr"/>
-          <a:lstStyle/>
-          <a:p>
-            <a:pPr algn="ctr"/>
-          </a:p>
-        </p:txBody>
-      </p:sp>
-      <p:sp>
-        <p:nvSpPr>
-          <p:cNvPr id="15" name="TextBox 14"/>
-          <p:cNvSpPr txBox="1"/>
-          <p:nvPr/>
-        </p:nvSpPr>
-        <p:spPr>
-          <a:xfrm>
-            <a:off x="8997696" y="2286000"/>
-            <a:ext cx="2377440" cy="457200"/>
-          </a:xfrm>
-          <a:prstGeom prst="rect">
-            <a:avLst/>
-          </a:prstGeom>
-          <a:noFill/>
-        </p:spPr>
-        <p:txBody>
-          <a:bodyPr wrap="square" anchor="t" lIns="0" rIns="0" tIns="0" bIns="0">
-            <a:spAutoFit/>
-          </a:bodyPr>
-          <a:lstStyle/>
-          <a:p>
-            <a:pPr algn="l">
-              <a:lnSpc>
-                <a:spcPct val="100000"/>
-              </a:lnSpc>
-            </a:pPr>
-            <a:r>
-              <a:rPr sz="2600" b="1" spc="-10">
-                <a:solidFill>
-                  <a:srgbClr val="D97725"/>
-                </a:solidFill>
-                <a:latin typeface="Cabinet Grotesk"/>
-              </a:rPr>
-              <a:t>10%</a:t>
-            </a:r>
-          </a:p>
-        </p:txBody>
-      </p:sp>
-      <p:sp>
-        <p:nvSpPr>
-          <p:cNvPr id="16" name="TextBox 15"/>
-          <p:cNvSpPr txBox="1"/>
-          <p:nvPr/>
-        </p:nvSpPr>
-        <p:spPr>
-          <a:xfrm>
-            <a:off x="8997696" y="2788920"/>
-            <a:ext cx="2331720" cy="640080"/>
-          </a:xfrm>
-          <a:prstGeom prst="rect">
-            <a:avLst/>
-          </a:prstGeom>
-          <a:noFill/>
-        </p:spPr>
-        <p:txBody>
-          <a:bodyPr wrap="square" anchor="t" lIns="0" rIns="0" tIns="0" bIns="0">
-            <a:spAutoFit/>
-          </a:bodyPr>
-          <a:lstStyle/>
-          <a:p>
-            <a:pPr algn="l">
-              <a:lnSpc>
-                <a:spcPct val="125000"/>
-              </a:lnSpc>
-            </a:pPr>
-            <a:r>
-              <a:rPr sz="900" b="0" spc="150">
-                <a:solidFill>
-                  <a:srgbClr val="737371"/>
-                </a:solidFill>
-                <a:latin typeface="JetBrains Mono"/>
-              </a:rPr>
-              <a:t>COMMISSIONING &amp; ACCEPTANCE</a:t>
-            </a:r>
-          </a:p>
-        </p:txBody>
-      </p:sp>
-      <p:sp>
-        <p:nvSpPr>
-          <p:cNvPr id="17" name="TextBox 16"/>
-          <p:cNvSpPr txBox="1"/>
-          <p:nvPr/>
-        </p:nvSpPr>
-        <p:spPr>
-          <a:xfrm>
-            <a:off x="822960" y="3749039"/>
-            <a:ext cx="2377440" cy="274320"/>
-          </a:xfrm>
-          <a:prstGeom prst="rect">
-            <a:avLst/>
-          </a:prstGeom>
-          <a:noFill/>
-        </p:spPr>
-        <p:txBody>
-          <a:bodyPr wrap="square" anchor="t" lIns="0" rIns="0" tIns="0" bIns="0">
-            <a:spAutoFit/>
-          </a:bodyPr>
-          <a:lstStyle/>
-          <a:p>
-            <a:pPr algn="l">
-              <a:lnSpc>
-                <a:spcPct val="100000"/>
-              </a:lnSpc>
-            </a:pPr>
-            <a:r>
-              <a:rPr sz="1000" b="1" spc="220">
-                <a:solidFill>
-                  <a:srgbClr val="D97725"/>
-                </a:solidFill>
-                <a:latin typeface="JetBrains Mono"/>
-              </a:rPr>
-              <a:t>VALIDITY</a:t>
-            </a:r>
-          </a:p>
-        </p:txBody>
-      </p:sp>
-      <p:sp>
-        <p:nvSpPr>
-          <p:cNvPr id="18" name="TextBox 17"/>
-          <p:cNvSpPr txBox="1"/>
-          <p:nvPr/>
-        </p:nvSpPr>
-        <p:spPr>
-          <a:xfrm>
-            <a:off x="3291840" y="3721607"/>
-            <a:ext cx="8046720" cy="365760"/>
-          </a:xfrm>
-          <a:prstGeom prst="rect">
-            <a:avLst/>
-          </a:prstGeom>
-          <a:noFill/>
-        </p:spPr>
-        <p:txBody>
-          <a:bodyPr wrap="square" anchor="t" lIns="0" rIns="0" tIns="0" bIns="0">
-            <a:spAutoFit/>
-          </a:bodyPr>
-          <a:lstStyle/>
-          <a:p>
-            <a:pPr algn="l">
-              <a:lnSpc>
-                <a:spcPct val="100000"/>
-              </a:lnSpc>
-            </a:pPr>
-            <a:r>
-              <a:rPr sz="1150" b="0">
-                <a:solidFill>
-                  <a:srgbClr val="0A0A0C"/>
-                </a:solidFill>
-                <a:latin typeface="Satoshi"/>
-              </a:rPr>
-              <a:t>This offer remains open for [30] days from the date of issue.</a:t>
-            </a:r>
-          </a:p>
-        </p:txBody>
-      </p:sp>
-      <p:sp>
-        <p:nvSpPr>
-          <p:cNvPr id="19" name="Rectangle 18"/>
-          <p:cNvSpPr/>
-          <p:nvPr/>
-        </p:nvSpPr>
-        <p:spPr>
-          <a:xfrm>
-            <a:off x="822960" y="4096511"/>
-            <a:ext cx="10543032" cy="9525"/>
-          </a:xfrm>
-          <a:prstGeom prst="rect">
-            <a:avLst/>
-          </a:prstGeom>
-          <a:solidFill>
-            <a:srgbClr val="E3E3E0"/>
-          </a:solidFill>
-          <a:ln>
-            <a:noFill/>
-          </a:ln>
-          <a:effectLst/>
-        </p:spPr>
-        <p:style>
-          <a:lnRef idx="1">
-            <a:schemeClr val="accent1"/>
-          </a:lnRef>
-          <a:fillRef idx="3">
-            <a:schemeClr val="accent1"/>
-          </a:fillRef>
-          <a:effectRef idx="2">
-            <a:schemeClr val="accent1"/>
-          </a:effectRef>
-          <a:fontRef idx="minor">
-            <a:schemeClr val="lt1"/>
-          </a:fontRef>
-        </p:style>
-        <p:txBody>
-          <a:bodyPr rtlCol="0" anchor="ctr"/>
-          <a:lstStyle/>
-          <a:p>
-            <a:pPr algn="ctr"/>
-          </a:p>
-        </p:txBody>
-      </p:sp>
-      <p:sp>
-        <p:nvSpPr>
-          <p:cNvPr id="20" name="TextBox 19"/>
-          <p:cNvSpPr txBox="1"/>
-          <p:nvPr/>
-        </p:nvSpPr>
-        <p:spPr>
-          <a:xfrm>
-            <a:off x="822960" y="4224527"/>
-            <a:ext cx="2377440" cy="274320"/>
-          </a:xfrm>
-          <a:prstGeom prst="rect">
-            <a:avLst/>
-          </a:prstGeom>
-          <a:noFill/>
-        </p:spPr>
-        <p:txBody>
-          <a:bodyPr wrap="square" anchor="t" lIns="0" rIns="0" tIns="0" bIns="0">
-            <a:spAutoFit/>
-          </a:bodyPr>
-          <a:lstStyle/>
-          <a:p>
-            <a:pPr algn="l">
-              <a:lnSpc>
-                <a:spcPct val="100000"/>
-              </a:lnSpc>
-            </a:pPr>
-            <a:r>
-              <a:rPr sz="1000" b="1" spc="220">
-                <a:solidFill>
-                  <a:srgbClr val="D97725"/>
-                </a:solidFill>
-                <a:latin typeface="JetBrains Mono"/>
-              </a:rPr>
-              <a:t>WARRANTIES</a:t>
-            </a:r>
-          </a:p>
-        </p:txBody>
-      </p:sp>
-      <p:sp>
-        <p:nvSpPr>
-          <p:cNvPr id="21" name="TextBox 20"/>
-          <p:cNvSpPr txBox="1"/>
-          <p:nvPr/>
-        </p:nvSpPr>
-        <p:spPr>
-          <a:xfrm>
-            <a:off x="3291840" y="4197095"/>
-            <a:ext cx="8046720" cy="365760"/>
-          </a:xfrm>
-          <a:prstGeom prst="rect">
-            <a:avLst/>
-          </a:prstGeom>
-          <a:noFill/>
-        </p:spPr>
-        <p:txBody>
-          <a:bodyPr wrap="square" anchor="t" lIns="0" rIns="0" tIns="0" bIns="0">
-            <a:spAutoFit/>
-          </a:bodyPr>
-          <a:lstStyle/>
-          <a:p>
-            <a:pPr algn="l">
-              <a:lnSpc>
-                <a:spcPct val="100000"/>
-              </a:lnSpc>
-            </a:pPr>
-            <a:r>
-              <a:rPr sz="1150" b="0">
-                <a:solidFill>
-                  <a:srgbClr val="0A0A0C"/>
-                </a:solidFill>
-                <a:latin typeface="Satoshi"/>
-              </a:rPr>
-              <a:t>Modules [12/25] yrs product &amp; performance · inverters [5–10] yrs · workmanship [2] yrs.</a:t>
-            </a:r>
-          </a:p>
-        </p:txBody>
-      </p:sp>
-      <p:sp>
-        <p:nvSpPr>
-          <p:cNvPr id="22" name="Rectangle 21"/>
-          <p:cNvSpPr/>
-          <p:nvPr/>
-        </p:nvSpPr>
-        <p:spPr>
-          <a:xfrm>
-            <a:off x="822960" y="4571999"/>
-            <a:ext cx="10543032" cy="9525"/>
-          </a:xfrm>
-          <a:prstGeom prst="rect">
-            <a:avLst/>
-          </a:prstGeom>
-          <a:solidFill>
-            <a:srgbClr val="E3E3E0"/>
-          </a:solidFill>
-          <a:ln>
-            <a:noFill/>
-          </a:ln>
-          <a:effectLst/>
-        </p:spPr>
-        <p:style>
-          <a:lnRef idx="1">
-            <a:schemeClr val="accent1"/>
-          </a:lnRef>
-          <a:fillRef idx="3">
-            <a:schemeClr val="accent1"/>
-          </a:fillRef>
-          <a:effectRef idx="2">
-            <a:schemeClr val="accent1"/>
-          </a:effectRef>
-          <a:fontRef idx="minor">
-            <a:schemeClr val="lt1"/>
-          </a:fontRef>
-        </p:style>
-        <p:txBody>
-          <a:bodyPr rtlCol="0" anchor="ctr"/>
-          <a:lstStyle/>
-          <a:p>
-            <a:pPr algn="ctr"/>
-          </a:p>
-        </p:txBody>
-      </p:sp>
-      <p:sp>
-        <p:nvSpPr>
-          <p:cNvPr id="23" name="TextBox 22"/>
-          <p:cNvSpPr txBox="1"/>
-          <p:nvPr/>
-        </p:nvSpPr>
-        <p:spPr>
-          <a:xfrm>
-            <a:off x="822960" y="4700015"/>
-            <a:ext cx="2377440" cy="274320"/>
-          </a:xfrm>
-          <a:prstGeom prst="rect">
-            <a:avLst/>
-          </a:prstGeom>
-          <a:noFill/>
-        </p:spPr>
-        <p:txBody>
-          <a:bodyPr wrap="square" anchor="t" lIns="0" rIns="0" tIns="0" bIns="0">
-            <a:spAutoFit/>
-          </a:bodyPr>
-          <a:lstStyle/>
-          <a:p>
-            <a:pPr algn="l">
-              <a:lnSpc>
-                <a:spcPct val="100000"/>
-              </a:lnSpc>
-            </a:pPr>
-            <a:r>
-              <a:rPr sz="1000" b="1" spc="220">
-                <a:solidFill>
-                  <a:srgbClr val="D97725"/>
-                </a:solidFill>
-                <a:latin typeface="JetBrains Mono"/>
-              </a:rPr>
-              <a:t>PERFORMANCE</a:t>
-            </a:r>
-          </a:p>
-        </p:txBody>
-      </p:sp>
-      <p:sp>
-        <p:nvSpPr>
-          <p:cNvPr id="24" name="TextBox 23"/>
-          <p:cNvSpPr txBox="1"/>
-          <p:nvPr/>
-        </p:nvSpPr>
-        <p:spPr>
-          <a:xfrm>
-            <a:off x="3291840" y="4672583"/>
-            <a:ext cx="8046720" cy="365760"/>
-          </a:xfrm>
-          <a:prstGeom prst="rect">
-            <a:avLst/>
-          </a:prstGeom>
-          <a:noFill/>
-        </p:spPr>
-        <p:txBody>
-          <a:bodyPr wrap="square" anchor="t" lIns="0" rIns="0" tIns="0" bIns="0">
-            <a:spAutoFit/>
-          </a:bodyPr>
-          <a:lstStyle/>
-          <a:p>
-            <a:pPr algn="l">
-              <a:lnSpc>
-                <a:spcPct val="100000"/>
-              </a:lnSpc>
-            </a:pPr>
-            <a:r>
-              <a:rPr sz="1150" b="0">
-                <a:solidFill>
-                  <a:srgbClr val="0A0A0C"/>
-                </a:solidFill>
-                <a:latin typeface="Satoshi"/>
-              </a:rPr>
-              <a:t>Year-one yield per PVsyst P50 estimate · measured at the generation meter.</a:t>
-            </a:r>
-          </a:p>
-        </p:txBody>
-      </p:sp>
-      <p:sp>
-        <p:nvSpPr>
-          <p:cNvPr id="25" name="Rectangle 24"/>
-          <p:cNvSpPr/>
-          <p:nvPr/>
-        </p:nvSpPr>
-        <p:spPr>
-          <a:xfrm>
-            <a:off x="822960" y="5047487"/>
-            <a:ext cx="10543032" cy="9525"/>
-          </a:xfrm>
-          <a:prstGeom prst="rect">
-            <a:avLst/>
-          </a:prstGeom>
-          <a:solidFill>
-            <a:srgbClr val="E3E3E0"/>
-          </a:solidFill>
-          <a:ln>
-            <a:noFill/>
-          </a:ln>
-          <a:effectLst/>
-        </p:spPr>
-        <p:style>
-          <a:lnRef idx="1">
-            <a:schemeClr val="accent1"/>
-          </a:lnRef>
-          <a:fillRef idx="3">
-            <a:schemeClr val="accent1"/>
-          </a:fillRef>
-          <a:effectRef idx="2">
-            <a:schemeClr val="accent1"/>
-          </a:effectRef>
-          <a:fontRef idx="minor">
-            <a:schemeClr val="lt1"/>
-          </a:fontRef>
-        </p:style>
-        <p:txBody>
-          <a:bodyPr rtlCol="0" anchor="ctr"/>
-          <a:lstStyle/>
-          <a:p>
-            <a:pPr algn="ctr"/>
-          </a:p>
-        </p:txBody>
-      </p:sp>
-      <p:sp>
-        <p:nvSpPr>
-          <p:cNvPr id="26" name="TextBox 25"/>
-          <p:cNvSpPr txBox="1"/>
-          <p:nvPr/>
-        </p:nvSpPr>
-        <p:spPr>
-          <a:xfrm>
-            <a:off x="822960" y="5175503"/>
-            <a:ext cx="2377440" cy="274320"/>
-          </a:xfrm>
-          <a:prstGeom prst="rect">
-            <a:avLst/>
-          </a:prstGeom>
-          <a:noFill/>
-        </p:spPr>
-        <p:txBody>
-          <a:bodyPr wrap="square" anchor="t" lIns="0" rIns="0" tIns="0" bIns="0">
-            <a:spAutoFit/>
-          </a:bodyPr>
-          <a:lstStyle/>
-          <a:p>
-            <a:pPr algn="l">
-              <a:lnSpc>
-                <a:spcPct val="100000"/>
-              </a:lnSpc>
-            </a:pPr>
-            <a:r>
-              <a:rPr sz="1000" b="1" spc="220">
-                <a:solidFill>
-                  <a:srgbClr val="D97725"/>
-                </a:solidFill>
-                <a:latin typeface="JetBrains Mono"/>
-              </a:rPr>
-              <a:t>EXCLUSIONS</a:t>
-            </a:r>
-          </a:p>
-        </p:txBody>
-      </p:sp>
-      <p:sp>
-        <p:nvSpPr>
-          <p:cNvPr id="27" name="TextBox 26"/>
-          <p:cNvSpPr txBox="1"/>
-          <p:nvPr/>
-        </p:nvSpPr>
-        <p:spPr>
-          <a:xfrm>
-            <a:off x="3291840" y="5148071"/>
-            <a:ext cx="8046720" cy="365760"/>
-          </a:xfrm>
-          <a:prstGeom prst="rect">
-            <a:avLst/>
-          </a:prstGeom>
-          <a:noFill/>
-        </p:spPr>
-        <p:txBody>
-          <a:bodyPr wrap="square" anchor="t" lIns="0" rIns="0" tIns="0" bIns="0">
-            <a:spAutoFit/>
-          </a:bodyPr>
-          <a:lstStyle/>
-          <a:p>
-            <a:pPr algn="l">
-              <a:lnSpc>
-                <a:spcPct val="100000"/>
-              </a:lnSpc>
-            </a:pPr>
-            <a:r>
-              <a:rPr sz="1150" b="0">
-                <a:solidFill>
-                  <a:srgbClr val="0A0A0C"/>
-                </a:solidFill>
-                <a:latin typeface="Satoshi"/>
-              </a:rPr>
-              <a:t>Utility connection fees · grid reinforcement · unforeseen civils · VAT unless stated.</a:t>
-            </a:r>
-          </a:p>
-        </p:txBody>
-      </p:sp>
-      <p:sp>
-        <p:nvSpPr>
-          <p:cNvPr id="28" name="Rectangle 27"/>
-          <p:cNvSpPr/>
-          <p:nvPr/>
-        </p:nvSpPr>
-        <p:spPr>
-          <a:xfrm>
-            <a:off x="822960" y="5522975"/>
-            <a:ext cx="10543032" cy="9525"/>
-          </a:xfrm>
-          <a:prstGeom prst="rect">
-            <a:avLst/>
-          </a:prstGeom>
-          <a:solidFill>
-            <a:srgbClr val="E3E3E0"/>
-          </a:solidFill>
-          <a:ln>
-            <a:noFill/>
-          </a:ln>
-          <a:effectLst/>
-        </p:spPr>
-        <p:style>
-          <a:lnRef idx="1">
-            <a:schemeClr val="accent1"/>
-          </a:lnRef>
-          <a:fillRef idx="3">
-            <a:schemeClr val="accent1"/>
-          </a:fillRef>
-          <a:effectRef idx="2">
-            <a:schemeClr val="accent1"/>
-          </a:effectRef>
-          <a:fontRef idx="minor">
-            <a:schemeClr val="lt1"/>
-          </a:fontRef>
-        </p:style>
-        <p:txBody>
-          <a:bodyPr rtlCol="0" anchor="ctr"/>
-          <a:lstStyle/>
-          <a:p>
-            <a:pPr algn="ctr"/>
-          </a:p>
-        </p:txBody>
-      </p:sp>
-      <p:sp>
-        <p:nvSpPr>
-          <p:cNvPr id="29" name="TextBox 28"/>
-          <p:cNvSpPr txBox="1"/>
-          <p:nvPr/>
-        </p:nvSpPr>
-        <p:spPr>
-          <a:xfrm>
-            <a:off x="822960" y="5650991"/>
-            <a:ext cx="2377440" cy="274320"/>
-          </a:xfrm>
-          <a:prstGeom prst="rect">
-            <a:avLst/>
-          </a:prstGeom>
-          <a:noFill/>
-        </p:spPr>
-        <p:txBody>
-          <a:bodyPr wrap="square" anchor="t" lIns="0" rIns="0" tIns="0" bIns="0">
-            <a:spAutoFit/>
-          </a:bodyPr>
-          <a:lstStyle/>
-          <a:p>
-            <a:pPr algn="l">
-              <a:lnSpc>
-                <a:spcPct val="100000"/>
-              </a:lnSpc>
-            </a:pPr>
-            <a:r>
-              <a:rPr sz="1000" b="1" spc="220">
-                <a:solidFill>
-                  <a:srgbClr val="D97725"/>
-                </a:solidFill>
-                <a:latin typeface="JetBrains Mono"/>
-              </a:rPr>
-              <a:t>GOVERNING TERMS</a:t>
-            </a:r>
-          </a:p>
-        </p:txBody>
-      </p:sp>
-      <p:sp>
-        <p:nvSpPr>
-          <p:cNvPr id="30" name="TextBox 29"/>
-          <p:cNvSpPr txBox="1"/>
-          <p:nvPr/>
-        </p:nvSpPr>
-        <p:spPr>
-          <a:xfrm>
-            <a:off x="3291840" y="5623559"/>
-            <a:ext cx="8046720" cy="365760"/>
-          </a:xfrm>
-          <a:prstGeom prst="rect">
-            <a:avLst/>
-          </a:prstGeom>
-          <a:noFill/>
-        </p:spPr>
-        <p:txBody>
-          <a:bodyPr wrap="square" anchor="t" lIns="0" rIns="0" tIns="0" bIns="0">
-            <a:spAutoFit/>
-          </a:bodyPr>
-          <a:lstStyle/>
-          <a:p>
-            <a:pPr algn="l">
-              <a:lnSpc>
-                <a:spcPct val="100000"/>
-              </a:lnSpc>
-            </a:pPr>
-            <a:r>
-              <a:rPr sz="1150" b="0">
-                <a:solidFill>
-                  <a:srgbClr val="0A0A0C"/>
-                </a:solidFill>
-                <a:latin typeface="Satoshi"/>
-              </a:rPr>
-              <a:t>[FIDIC-based / client contract] · Kenyan law · amicable resolution then arbitration.</a:t>
-            </a:r>
-          </a:p>
-        </p:txBody>
-      </p:sp>
-      <p:sp>
-        <p:nvSpPr>
-          <p:cNvPr id="31" name="Rectangle 30"/>
-          <p:cNvSpPr/>
-          <p:nvPr/>
-        </p:nvSpPr>
-        <p:spPr>
-          <a:xfrm>
-            <a:off x="822960" y="5998463"/>
-            <a:ext cx="10543032" cy="9525"/>
-          </a:xfrm>
-          <a:prstGeom prst="rect">
-            <a:avLst/>
-          </a:prstGeom>
-          <a:solidFill>
-            <a:srgbClr val="E3E3E0"/>
-          </a:solidFill>
-          <a:ln>
-            <a:noFill/>
-          </a:ln>
-          <a:effectLst/>
-        </p:spPr>
-        <p:style>
-          <a:lnRef idx="1">
-            <a:schemeClr val="accent1"/>
-          </a:lnRef>
-          <a:fillRef idx="3">
-            <a:schemeClr val="accent1"/>
-          </a:fillRef>
-          <a:effectRef idx="2">
-            <a:schemeClr val="accent1"/>
-          </a:effectRef>
-          <a:fontRef idx="minor">
-            <a:schemeClr val="lt1"/>
-          </a:fontRef>
-        </p:style>
-        <p:txBody>
-          <a:bodyPr rtlCol="0" anchor="ctr"/>
-          <a:lstStyle/>
-          <a:p>
-            <a:pPr algn="ctr"/>
-          </a:p>
-        </p:txBody>
-      </p:sp>
-      <p:sp>
-        <p:nvSpPr>
-          <p:cNvPr id="32" name="TextBox 31"/>
-          <p:cNvSpPr txBox="1"/>
-          <p:nvPr/>
-        </p:nvSpPr>
-        <p:spPr>
-          <a:xfrm>
-            <a:off x="822960" y="6419088"/>
-            <a:ext cx="7315200" cy="274320"/>
-          </a:xfrm>
-          <a:prstGeom prst="rect">
-            <a:avLst/>
-          </a:prstGeom>
-          <a:noFill/>
-        </p:spPr>
-        <p:txBody>
-          <a:bodyPr wrap="square" anchor="t" lIns="0" rIns="0" tIns="0" bIns="0">
-            <a:spAutoFit/>
-          </a:bodyPr>
-          <a:lstStyle/>
-          <a:p>
-            <a:pPr algn="l">
-              <a:lnSpc>
-                <a:spcPct val="100000"/>
-              </a:lnSpc>
-            </a:pPr>
-            <a:r>
-              <a:rPr sz="800" b="0" spc="200">
-                <a:solidFill>
-                  <a:srgbClr val="A6A6A3"/>
-                </a:solidFill>
-                <a:latin typeface="JetBrains Mono"/>
-              </a:rPr>
-              <a:t>GJW ENERGY — TECHNO-COMMERCIAL PROPOSAL · GJW-TCO-[YYYY]-[NNN]</a:t>
-            </a:r>
-          </a:p>
-        </p:txBody>
-      </p:sp>
-      <p:sp>
-        <p:nvSpPr>
-          <p:cNvPr id="33" name="TextBox 32"/>
-          <p:cNvSpPr txBox="1"/>
-          <p:nvPr/>
-        </p:nvSpPr>
-        <p:spPr>
-          <a:xfrm>
-            <a:off x="11109960" y="6419088"/>
-            <a:ext cx="320040" cy="274320"/>
-          </a:xfrm>
-          <a:prstGeom prst="rect">
-            <a:avLst/>
-          </a:prstGeom>
-          <a:noFill/>
-        </p:spPr>
-        <p:txBody>
-          <a:bodyPr wrap="square" anchor="t" lIns="0" rIns="0" tIns="0" bIns="0">
-            <a:spAutoFit/>
-          </a:bodyPr>
-          <a:lstStyle/>
-          <a:p>
-            <a:pPr algn="r">
-              <a:lnSpc>
-                <a:spcPct val="100000"/>
-              </a:lnSpc>
-            </a:pPr>
-            <a:r>
-              <a:rPr sz="900" b="1" spc="150">
-                <a:solidFill>
-                  <a:srgbClr val="D97725"/>
-                </a:solidFill>
-                <a:latin typeface="JetBrains Mono"/>
-              </a:rPr>
               <a:t>09</a:t>
             </a:r>
           </a:p>
